--- a/PDFS/C110-09-TOP-DOWN-PARSING.pptx
+++ b/PDFS/C110-09-TOP-DOWN-PARSING.pptx
@@ -5,7 +5,7 @@
     <p:sldMasterId id="2147483648" r:id="rId1"/>
   </p:sldMasterIdLst>
   <p:notesMasterIdLst>
-    <p:notesMasterId r:id="rId67"/>
+    <p:notesMasterId r:id="rId81"/>
   </p:notesMasterIdLst>
   <p:sldIdLst>
     <p:sldId id="257" r:id="rId2"/>
@@ -73,6 +73,20 @@
     <p:sldId id="1302" r:id="rId64"/>
     <p:sldId id="1264" r:id="rId65"/>
     <p:sldId id="1265" r:id="rId66"/>
+    <p:sldId id="787" r:id="rId67"/>
+    <p:sldId id="1346" r:id="rId68"/>
+    <p:sldId id="1347" r:id="rId69"/>
+    <p:sldId id="1348" r:id="rId70"/>
+    <p:sldId id="1318" r:id="rId71"/>
+    <p:sldId id="1319" r:id="rId72"/>
+    <p:sldId id="1328" r:id="rId73"/>
+    <p:sldId id="1329" r:id="rId74"/>
+    <p:sldId id="1330" r:id="rId75"/>
+    <p:sldId id="1331" r:id="rId76"/>
+    <p:sldId id="1332" r:id="rId77"/>
+    <p:sldId id="1333" r:id="rId78"/>
+    <p:sldId id="1334" r:id="rId79"/>
+    <p:sldId id="1335" r:id="rId80"/>
   </p:sldIdLst>
   <p:sldSz cx="12192000" cy="6858000"/>
   <p:notesSz cx="6858000" cy="9144000"/>
@@ -261,7 +275,7 @@
           <a:p>
             <a:fld id="{6F6A6930-6FE4-5249-A389-5C34F8D02512}" type="datetimeFigureOut">
               <a:rPr lang="en-US" smtClean="0"/>
-              <a:t>1/28/2026</a:t>
+              <a:t>1/29/2026</a:t>
             </a:fld>
             <a:endParaRPr lang="en-US"/>
           </a:p>
@@ -675,7 +689,7 @@
           <a:p>
             <a:fld id="{574CE19A-8503-7843-8A88-9F39D8324431}" type="datetimeFigureOut">
               <a:rPr lang="en-US" smtClean="0"/>
-              <a:t>1/28/2026</a:t>
+              <a:t>1/29/2026</a:t>
             </a:fld>
             <a:endParaRPr lang="en-US"/>
           </a:p>
@@ -873,7 +887,7 @@
           <a:p>
             <a:fld id="{574CE19A-8503-7843-8A88-9F39D8324431}" type="datetimeFigureOut">
               <a:rPr lang="en-US" smtClean="0"/>
-              <a:t>1/28/2026</a:t>
+              <a:t>1/29/2026</a:t>
             </a:fld>
             <a:endParaRPr lang="en-US"/>
           </a:p>
@@ -1081,7 +1095,7 @@
           <a:p>
             <a:fld id="{574CE19A-8503-7843-8A88-9F39D8324431}" type="datetimeFigureOut">
               <a:rPr lang="en-US" smtClean="0"/>
-              <a:t>1/28/2026</a:t>
+              <a:t>1/29/2026</a:t>
             </a:fld>
             <a:endParaRPr lang="en-US"/>
           </a:p>
@@ -1279,7 +1293,7 @@
           <a:p>
             <a:fld id="{574CE19A-8503-7843-8A88-9F39D8324431}" type="datetimeFigureOut">
               <a:rPr lang="en-US" smtClean="0"/>
-              <a:t>1/28/2026</a:t>
+              <a:t>1/29/2026</a:t>
             </a:fld>
             <a:endParaRPr lang="en-US"/>
           </a:p>
@@ -1554,7 +1568,7 @@
           <a:p>
             <a:fld id="{574CE19A-8503-7843-8A88-9F39D8324431}" type="datetimeFigureOut">
               <a:rPr lang="en-US" smtClean="0"/>
-              <a:t>1/28/2026</a:t>
+              <a:t>1/29/2026</a:t>
             </a:fld>
             <a:endParaRPr lang="en-US"/>
           </a:p>
@@ -1819,7 +1833,7 @@
           <a:p>
             <a:fld id="{574CE19A-8503-7843-8A88-9F39D8324431}" type="datetimeFigureOut">
               <a:rPr lang="en-US" smtClean="0"/>
-              <a:t>1/28/2026</a:t>
+              <a:t>1/29/2026</a:t>
             </a:fld>
             <a:endParaRPr lang="en-US"/>
           </a:p>
@@ -2231,7 +2245,7 @@
           <a:p>
             <a:fld id="{574CE19A-8503-7843-8A88-9F39D8324431}" type="datetimeFigureOut">
               <a:rPr lang="en-US" smtClean="0"/>
-              <a:t>1/28/2026</a:t>
+              <a:t>1/29/2026</a:t>
             </a:fld>
             <a:endParaRPr lang="en-US"/>
           </a:p>
@@ -2372,7 +2386,7 @@
           <a:p>
             <a:fld id="{574CE19A-8503-7843-8A88-9F39D8324431}" type="datetimeFigureOut">
               <a:rPr lang="en-US" smtClean="0"/>
-              <a:t>1/28/2026</a:t>
+              <a:t>1/29/2026</a:t>
             </a:fld>
             <a:endParaRPr lang="en-US"/>
           </a:p>
@@ -2485,7 +2499,7 @@
           <a:p>
             <a:fld id="{574CE19A-8503-7843-8A88-9F39D8324431}" type="datetimeFigureOut">
               <a:rPr lang="en-US" smtClean="0"/>
-              <a:t>1/28/2026</a:t>
+              <a:t>1/29/2026</a:t>
             </a:fld>
             <a:endParaRPr lang="en-US"/>
           </a:p>
@@ -2796,7 +2810,7 @@
           <a:p>
             <a:fld id="{574CE19A-8503-7843-8A88-9F39D8324431}" type="datetimeFigureOut">
               <a:rPr lang="en-US" smtClean="0"/>
-              <a:t>1/28/2026</a:t>
+              <a:t>1/29/2026</a:t>
             </a:fld>
             <a:endParaRPr lang="en-US"/>
           </a:p>
@@ -3084,7 +3098,7 @@
           <a:p>
             <a:fld id="{574CE19A-8503-7843-8A88-9F39D8324431}" type="datetimeFigureOut">
               <a:rPr lang="en-US" smtClean="0"/>
-              <a:t>1/28/2026</a:t>
+              <a:t>1/29/2026</a:t>
             </a:fld>
             <a:endParaRPr lang="en-US"/>
           </a:p>
@@ -3325,7 +3339,7 @@
           <a:p>
             <a:fld id="{574CE19A-8503-7843-8A88-9F39D8324431}" type="datetimeFigureOut">
               <a:rPr lang="en-US" smtClean="0"/>
-              <a:t>1/28/2026</a:t>
+              <a:t>1/29/2026</a:t>
             </a:fld>
             <a:endParaRPr lang="en-US"/>
           </a:p>
@@ -3848,6 +3862,13 @@
             <a:r>
               <a:rPr lang="en-US" i="1" dirty="0"/>
               <a:t>LL(1) Parser</a:t>
+            </a:r>
+          </a:p>
+          <a:p>
+            <a:pPr lvl="2"/>
+            <a:r>
+              <a:rPr lang="en-US" i="1" dirty="0"/>
+              <a:t>A Recursive Descent Parser</a:t>
             </a:r>
           </a:p>
           <a:p>
@@ -25481,21 +25502,7 @@
                             <a:latin typeface="Cambria Math" panose="02040503050406030204" pitchFamily="18" charset="0"/>
                             <a:ea typeface="Cambria Math" panose="02040503050406030204" pitchFamily="18" charset="0"/>
                           </a:rPr>
-                          <m:t>𝑙</m:t>
-                        </m:r>
-                        <m:r>
-                          <a:rPr lang="en-US" sz="2400" i="1" dirty="0">
-                            <a:latin typeface="Cambria Math" panose="02040503050406030204" pitchFamily="18" charset="0"/>
-                            <a:ea typeface="Cambria Math" panose="02040503050406030204" pitchFamily="18" charset="0"/>
-                          </a:rPr>
-                          <m:t>h</m:t>
-                        </m:r>
-                        <m:r>
-                          <a:rPr lang="en-US" sz="2400" i="1" dirty="0">
-                            <a:latin typeface="Cambria Math" panose="02040503050406030204" pitchFamily="18" charset="0"/>
-                            <a:ea typeface="Cambria Math" panose="02040503050406030204" pitchFamily="18" charset="0"/>
-                          </a:rPr>
-                          <m:t>𝑠</m:t>
+                          <m:t>𝑙h𝑠</m:t>
                         </m:r>
                       </m:sub>
                     </m:sSub>
@@ -25539,21 +25546,7 @@
                             <a:latin typeface="Cambria Math" panose="02040503050406030204" pitchFamily="18" charset="0"/>
                             <a:ea typeface="Cambria Math" panose="02040503050406030204" pitchFamily="18" charset="0"/>
                           </a:rPr>
-                          <m:t>𝑙</m:t>
-                        </m:r>
-                        <m:r>
-                          <a:rPr lang="en-US" sz="2400" i="1" dirty="0">
-                            <a:latin typeface="Cambria Math" panose="02040503050406030204" pitchFamily="18" charset="0"/>
-                            <a:ea typeface="Cambria Math" panose="02040503050406030204" pitchFamily="18" charset="0"/>
-                          </a:rPr>
-                          <m:t>h</m:t>
-                        </m:r>
-                        <m:r>
-                          <a:rPr lang="en-US" sz="2400" i="1" dirty="0">
-                            <a:latin typeface="Cambria Math" panose="02040503050406030204" pitchFamily="18" charset="0"/>
-                            <a:ea typeface="Cambria Math" panose="02040503050406030204" pitchFamily="18" charset="0"/>
-                          </a:rPr>
-                          <m:t>𝑠</m:t>
+                          <m:t>𝑙h𝑠</m:t>
                         </m:r>
                       </m:sub>
                     </m:sSub>
@@ -31978,8 +31971,8 @@
           </a:p>
         </p:txBody>
       </p:sp>
-      <mc:AlternateContent xmlns:mc="http://schemas.openxmlformats.org/markup-compatibility/2006">
-        <mc:Choice xmlns:a14="http://schemas.microsoft.com/office/drawing/2010/main" Requires="a14">
+      <mc:AlternateContent xmlns:mc="http://schemas.openxmlformats.org/markup-compatibility/2006" xmlns:a14="http://schemas.microsoft.com/office/drawing/2010/main">
+        <mc:Choice Requires="a14">
           <p:sp>
             <p:nvSpPr>
               <p:cNvPr id="3" name="TextBox 2">
@@ -32066,7 +32059,7 @@
             </p:txBody>
           </p:sp>
         </mc:Choice>
-        <mc:Fallback>
+        <mc:Fallback xmlns="">
           <p:sp>
             <p:nvSpPr>
               <p:cNvPr id="3" name="TextBox 2">
@@ -32111,8 +32104,8 @@
           </p:sp>
         </mc:Fallback>
       </mc:AlternateContent>
-      <mc:AlternateContent xmlns:mc="http://schemas.openxmlformats.org/markup-compatibility/2006">
-        <mc:Choice xmlns:a14="http://schemas.microsoft.com/office/drawing/2010/main" Requires="a14">
+      <mc:AlternateContent xmlns:mc="http://schemas.openxmlformats.org/markup-compatibility/2006" xmlns:a14="http://schemas.microsoft.com/office/drawing/2010/main">
+        <mc:Choice Requires="a14">
           <p:sp>
             <p:nvSpPr>
               <p:cNvPr id="5" name="TextBox 4">
@@ -32517,7 +32510,7 @@
             </p:txBody>
           </p:sp>
         </mc:Choice>
-        <mc:Fallback>
+        <mc:Fallback xmlns="">
           <p:sp>
             <p:nvSpPr>
               <p:cNvPr id="5" name="TextBox 4">
@@ -37945,6 +37938,597 @@
 </p:sld>
 </file>
 
+<file path=ppt/slides/slide66.xml><?xml version="1.0" encoding="utf-8"?>
+<p:sld xmlns:a="http://schemas.openxmlformats.org/drawingml/2006/main" xmlns:r="http://schemas.openxmlformats.org/officeDocument/2006/relationships" xmlns:p="http://schemas.openxmlformats.org/presentationml/2006/main">
+  <p:cSld>
+    <p:spTree>
+      <p:nvGrpSpPr>
+        <p:cNvPr id="1" name=""/>
+        <p:cNvGrpSpPr/>
+        <p:nvPr/>
+      </p:nvGrpSpPr>
+      <p:grpSpPr>
+        <a:xfrm>
+          <a:off x="0" y="0"/>
+          <a:ext cx="0" cy="0"/>
+          <a:chOff x="0" y="0"/>
+          <a:chExt cx="0" cy="0"/>
+        </a:xfrm>
+      </p:grpSpPr>
+      <p:sp>
+        <p:nvSpPr>
+          <p:cNvPr id="2" name="Title 1">
+            <a:extLst>
+              <a:ext uri="{FF2B5EF4-FFF2-40B4-BE49-F238E27FC236}">
+                <a16:creationId xmlns:a16="http://schemas.microsoft.com/office/drawing/2014/main" id="{8E062CCD-B8BC-B843-B90E-FF764E69C1B7}"/>
+              </a:ext>
+            </a:extLst>
+          </p:cNvPr>
+          <p:cNvSpPr>
+            <a:spLocks noGrp="1"/>
+          </p:cNvSpPr>
+          <p:nvPr>
+            <p:ph type="title"/>
+          </p:nvPr>
+        </p:nvSpPr>
+        <p:spPr>
+          <a:xfrm>
+            <a:off x="838200" y="788458"/>
+            <a:ext cx="10515600" cy="2259542"/>
+          </a:xfrm>
+        </p:spPr>
+        <p:txBody>
+          <a:bodyPr/>
+          <a:lstStyle/>
+          <a:p>
+            <a:pPr algn="ctr"/>
+            <a:r>
+              <a:rPr lang="en-US" dirty="0"/>
+              <a:t>Moving on to a simpler implementation:</a:t>
+            </a:r>
+            <a:br>
+              <a:rPr lang="en-US" dirty="0"/>
+            </a:br>
+            <a:br>
+              <a:rPr lang="en-US" dirty="0"/>
+            </a:br>
+            <a:r>
+              <a:rPr lang="en-US" dirty="0"/>
+              <a:t>Recursive Descent Parser</a:t>
+            </a:r>
+          </a:p>
+        </p:txBody>
+      </p:sp>
+    </p:spTree>
+    <p:extLst>
+      <p:ext uri="{BB962C8B-B14F-4D97-AF65-F5344CB8AC3E}">
+        <p14:creationId xmlns:p14="http://schemas.microsoft.com/office/powerpoint/2010/main" val="2524048308"/>
+      </p:ext>
+    </p:extLst>
+  </p:cSld>
+  <p:clrMapOvr>
+    <a:masterClrMapping/>
+  </p:clrMapOvr>
+</p:sld>
+</file>
+
+<file path=ppt/slides/slide67.xml><?xml version="1.0" encoding="utf-8"?>
+<p:sld xmlns:a="http://schemas.openxmlformats.org/drawingml/2006/main" xmlns:r="http://schemas.openxmlformats.org/officeDocument/2006/relationships" xmlns:p="http://schemas.openxmlformats.org/presentationml/2006/main">
+  <p:cSld>
+    <p:spTree>
+      <p:nvGrpSpPr>
+        <p:cNvPr id="1" name=""/>
+        <p:cNvGrpSpPr/>
+        <p:nvPr/>
+      </p:nvGrpSpPr>
+      <p:grpSpPr>
+        <a:xfrm>
+          <a:off x="0" y="0"/>
+          <a:ext cx="0" cy="0"/>
+          <a:chOff x="0" y="0"/>
+          <a:chExt cx="0" cy="0"/>
+        </a:xfrm>
+      </p:grpSpPr>
+      <p:sp>
+        <p:nvSpPr>
+          <p:cNvPr id="2" name="Title 1">
+            <a:extLst>
+              <a:ext uri="{FF2B5EF4-FFF2-40B4-BE49-F238E27FC236}">
+                <a16:creationId xmlns:a16="http://schemas.microsoft.com/office/drawing/2014/main" id="{8E411F96-7461-874D-8EA3-B6DFAA688889}"/>
+              </a:ext>
+            </a:extLst>
+          </p:cNvPr>
+          <p:cNvSpPr>
+            <a:spLocks noGrp="1"/>
+          </p:cNvSpPr>
+          <p:nvPr>
+            <p:ph type="title"/>
+          </p:nvPr>
+        </p:nvSpPr>
+        <p:spPr/>
+        <p:txBody>
+          <a:bodyPr/>
+          <a:lstStyle/>
+          <a:p>
+            <a:r>
+              <a:rPr lang="en-US" dirty="0"/>
+              <a:t>Let’s look at the grammar</a:t>
+            </a:r>
+          </a:p>
+        </p:txBody>
+      </p:sp>
+      <p:sp>
+        <p:nvSpPr>
+          <p:cNvPr id="5" name="Rectangle 4">
+            <a:extLst>
+              <a:ext uri="{FF2B5EF4-FFF2-40B4-BE49-F238E27FC236}">
+                <a16:creationId xmlns:a16="http://schemas.microsoft.com/office/drawing/2014/main" id="{7F6A4130-5D0E-DA48-B73C-8392BB9ECB07}"/>
+              </a:ext>
+            </a:extLst>
+          </p:cNvPr>
+          <p:cNvSpPr/>
+          <p:nvPr/>
+        </p:nvSpPr>
+        <p:spPr>
+          <a:xfrm>
+            <a:off x="838200" y="1507736"/>
+            <a:ext cx="3911601" cy="2031325"/>
+          </a:xfrm>
+          <a:prstGeom prst="rect">
+            <a:avLst/>
+          </a:prstGeom>
+        </p:spPr>
+        <p:txBody>
+          <a:bodyPr wrap="square">
+            <a:spAutoFit/>
+          </a:bodyPr>
+          <a:lstStyle/>
+          <a:p>
+            <a:r>
+              <a:rPr lang="en-US" dirty="0">
+                <a:latin typeface="Courier" pitchFamily="2" charset="0"/>
+              </a:rPr>
+              <a:t>1: Expr  ::= Unit Expr2</a:t>
+            </a:r>
+          </a:p>
+          <a:p>
+            <a:r>
+              <a:rPr lang="en-US" dirty="0">
+                <a:latin typeface="Courier" pitchFamily="2" charset="0"/>
+              </a:rPr>
+              <a:t>2: Expr2 ::= Op Unit Expr2</a:t>
+            </a:r>
+          </a:p>
+          <a:p>
+            <a:r>
+              <a:rPr lang="en-US" dirty="0">
+                <a:latin typeface="Courier" pitchFamily="2" charset="0"/>
+              </a:rPr>
+              <a:t>3:       | “”</a:t>
+            </a:r>
+            <a:br>
+              <a:rPr lang="en-US" dirty="0">
+                <a:latin typeface="Courier" pitchFamily="2" charset="0"/>
+              </a:rPr>
+            </a:br>
+            <a:r>
+              <a:rPr lang="en-US" dirty="0">
+                <a:latin typeface="Courier" pitchFamily="2" charset="0"/>
+              </a:rPr>
+              <a:t>4: Unit  ::= ‘(‘ Expr ‘)’</a:t>
+            </a:r>
+          </a:p>
+          <a:p>
+            <a:r>
+              <a:rPr lang="en-US" dirty="0">
+                <a:latin typeface="Courier" pitchFamily="2" charset="0"/>
+              </a:rPr>
+              <a:t>5:       |    ID</a:t>
+            </a:r>
+          </a:p>
+          <a:p>
+            <a:r>
+              <a:rPr lang="en-US" dirty="0">
+                <a:latin typeface="Courier" pitchFamily="2" charset="0"/>
+              </a:rPr>
+              <a:t>6: Op    ::= ‘+’</a:t>
+            </a:r>
+          </a:p>
+          <a:p>
+            <a:r>
+              <a:rPr lang="en-US" dirty="0">
+                <a:latin typeface="Courier" pitchFamily="2" charset="0"/>
+              </a:rPr>
+              <a:t>7:       |   ‘*’</a:t>
+            </a:r>
+          </a:p>
+        </p:txBody>
+      </p:sp>
+    </p:spTree>
+    <p:extLst>
+      <p:ext uri="{BB962C8B-B14F-4D97-AF65-F5344CB8AC3E}">
+        <p14:creationId xmlns:p14="http://schemas.microsoft.com/office/powerpoint/2010/main" val="1040701424"/>
+      </p:ext>
+    </p:extLst>
+  </p:cSld>
+  <p:clrMapOvr>
+    <a:masterClrMapping/>
+  </p:clrMapOvr>
+</p:sld>
+</file>
+
+<file path=ppt/slides/slide68.xml><?xml version="1.0" encoding="utf-8"?>
+<p:sld xmlns:a="http://schemas.openxmlformats.org/drawingml/2006/main" xmlns:r="http://schemas.openxmlformats.org/officeDocument/2006/relationships" xmlns:p="http://schemas.openxmlformats.org/presentationml/2006/main">
+  <p:cSld>
+    <p:spTree>
+      <p:nvGrpSpPr>
+        <p:cNvPr id="1" name=""/>
+        <p:cNvGrpSpPr/>
+        <p:nvPr/>
+      </p:nvGrpSpPr>
+      <p:grpSpPr>
+        <a:xfrm>
+          <a:off x="0" y="0"/>
+          <a:ext cx="0" cy="0"/>
+          <a:chOff x="0" y="0"/>
+          <a:chExt cx="0" cy="0"/>
+        </a:xfrm>
+      </p:grpSpPr>
+      <p:sp>
+        <p:nvSpPr>
+          <p:cNvPr id="2" name="Title 1">
+            <a:extLst>
+              <a:ext uri="{FF2B5EF4-FFF2-40B4-BE49-F238E27FC236}">
+                <a16:creationId xmlns:a16="http://schemas.microsoft.com/office/drawing/2014/main" id="{8E411F96-7461-874D-8EA3-B6DFAA688889}"/>
+              </a:ext>
+            </a:extLst>
+          </p:cNvPr>
+          <p:cNvSpPr>
+            <a:spLocks noGrp="1"/>
+          </p:cNvSpPr>
+          <p:nvPr>
+            <p:ph type="title"/>
+          </p:nvPr>
+        </p:nvSpPr>
+        <p:spPr/>
+        <p:txBody>
+          <a:bodyPr/>
+          <a:lstStyle/>
+          <a:p>
+            <a:r>
+              <a:rPr lang="en-US" dirty="0"/>
+              <a:t>Let’s look at the grammar</a:t>
+            </a:r>
+          </a:p>
+        </p:txBody>
+      </p:sp>
+      <p:sp>
+        <p:nvSpPr>
+          <p:cNvPr id="3" name="TextBox 2">
+            <a:extLst>
+              <a:ext uri="{FF2B5EF4-FFF2-40B4-BE49-F238E27FC236}">
+                <a16:creationId xmlns:a16="http://schemas.microsoft.com/office/drawing/2014/main" id="{47A281E4-6231-B242-A075-00A0A288D10F}"/>
+              </a:ext>
+            </a:extLst>
+          </p:cNvPr>
+          <p:cNvSpPr txBox="1"/>
+          <p:nvPr/>
+        </p:nvSpPr>
+        <p:spPr>
+          <a:xfrm>
+            <a:off x="6764866" y="1585480"/>
+            <a:ext cx="2668808" cy="369332"/>
+          </a:xfrm>
+          <a:prstGeom prst="rect">
+            <a:avLst/>
+          </a:prstGeom>
+          <a:noFill/>
+        </p:spPr>
+        <p:txBody>
+          <a:bodyPr wrap="none" rtlCol="0">
+            <a:spAutoFit/>
+          </a:bodyPr>
+          <a:lstStyle/>
+          <a:p>
+            <a:r>
+              <a:rPr lang="en-US" i="1" dirty="0"/>
+              <a:t>How do we parse an Expr?</a:t>
+            </a:r>
+          </a:p>
+        </p:txBody>
+      </p:sp>
+      <p:sp>
+        <p:nvSpPr>
+          <p:cNvPr id="5" name="Rectangle 4">
+            <a:extLst>
+              <a:ext uri="{FF2B5EF4-FFF2-40B4-BE49-F238E27FC236}">
+                <a16:creationId xmlns:a16="http://schemas.microsoft.com/office/drawing/2014/main" id="{829B6BAF-6944-CE4E-BE10-9856E223EC13}"/>
+              </a:ext>
+            </a:extLst>
+          </p:cNvPr>
+          <p:cNvSpPr/>
+          <p:nvPr/>
+        </p:nvSpPr>
+        <p:spPr>
+          <a:xfrm>
+            <a:off x="838200" y="1507736"/>
+            <a:ext cx="3911601" cy="2031325"/>
+          </a:xfrm>
+          <a:prstGeom prst="rect">
+            <a:avLst/>
+          </a:prstGeom>
+        </p:spPr>
+        <p:txBody>
+          <a:bodyPr wrap="square">
+            <a:spAutoFit/>
+          </a:bodyPr>
+          <a:lstStyle/>
+          <a:p>
+            <a:r>
+              <a:rPr lang="en-US" dirty="0">
+                <a:highlight>
+                  <a:srgbClr val="FFFF00"/>
+                </a:highlight>
+                <a:latin typeface="Courier" pitchFamily="2" charset="0"/>
+              </a:rPr>
+              <a:t>1: Expr  ::= Unit Expr2</a:t>
+            </a:r>
+          </a:p>
+          <a:p>
+            <a:r>
+              <a:rPr lang="en-US" dirty="0">
+                <a:latin typeface="Courier" pitchFamily="2" charset="0"/>
+              </a:rPr>
+              <a:t>2: Expr2 ::= Op Unit Expr2</a:t>
+            </a:r>
+          </a:p>
+          <a:p>
+            <a:r>
+              <a:rPr lang="en-US" dirty="0">
+                <a:latin typeface="Courier" pitchFamily="2" charset="0"/>
+              </a:rPr>
+              <a:t>3:       | “”</a:t>
+            </a:r>
+            <a:br>
+              <a:rPr lang="en-US" dirty="0">
+                <a:latin typeface="Courier" pitchFamily="2" charset="0"/>
+              </a:rPr>
+            </a:br>
+            <a:r>
+              <a:rPr lang="en-US" dirty="0">
+                <a:latin typeface="Courier" pitchFamily="2" charset="0"/>
+              </a:rPr>
+              <a:t>4: Unit  ::= ‘(‘ Expr ‘)’</a:t>
+            </a:r>
+          </a:p>
+          <a:p>
+            <a:r>
+              <a:rPr lang="en-US" dirty="0">
+                <a:latin typeface="Courier" pitchFamily="2" charset="0"/>
+              </a:rPr>
+              <a:t>5:       |    ID</a:t>
+            </a:r>
+          </a:p>
+          <a:p>
+            <a:r>
+              <a:rPr lang="en-US" dirty="0">
+                <a:latin typeface="Courier" pitchFamily="2" charset="0"/>
+              </a:rPr>
+              <a:t>6: Op    ::= ‘+’</a:t>
+            </a:r>
+          </a:p>
+          <a:p>
+            <a:r>
+              <a:rPr lang="en-US" dirty="0">
+                <a:latin typeface="Courier" pitchFamily="2" charset="0"/>
+              </a:rPr>
+              <a:t>7:       |   ‘*’</a:t>
+            </a:r>
+          </a:p>
+        </p:txBody>
+      </p:sp>
+    </p:spTree>
+    <p:extLst>
+      <p:ext uri="{BB962C8B-B14F-4D97-AF65-F5344CB8AC3E}">
+        <p14:creationId xmlns:p14="http://schemas.microsoft.com/office/powerpoint/2010/main" val="1432626646"/>
+      </p:ext>
+    </p:extLst>
+  </p:cSld>
+  <p:clrMapOvr>
+    <a:masterClrMapping/>
+  </p:clrMapOvr>
+</p:sld>
+</file>
+
+<file path=ppt/slides/slide69.xml><?xml version="1.0" encoding="utf-8"?>
+<p:sld xmlns:a="http://schemas.openxmlformats.org/drawingml/2006/main" xmlns:r="http://schemas.openxmlformats.org/officeDocument/2006/relationships" xmlns:p="http://schemas.openxmlformats.org/presentationml/2006/main">
+  <p:cSld>
+    <p:spTree>
+      <p:nvGrpSpPr>
+        <p:cNvPr id="1" name=""/>
+        <p:cNvGrpSpPr/>
+        <p:nvPr/>
+      </p:nvGrpSpPr>
+      <p:grpSpPr>
+        <a:xfrm>
+          <a:off x="0" y="0"/>
+          <a:ext cx="0" cy="0"/>
+          <a:chOff x="0" y="0"/>
+          <a:chExt cx="0" cy="0"/>
+        </a:xfrm>
+      </p:grpSpPr>
+      <p:sp>
+        <p:nvSpPr>
+          <p:cNvPr id="2" name="Title 1">
+            <a:extLst>
+              <a:ext uri="{FF2B5EF4-FFF2-40B4-BE49-F238E27FC236}">
+                <a16:creationId xmlns:a16="http://schemas.microsoft.com/office/drawing/2014/main" id="{8E411F96-7461-874D-8EA3-B6DFAA688889}"/>
+              </a:ext>
+            </a:extLst>
+          </p:cNvPr>
+          <p:cNvSpPr>
+            <a:spLocks noGrp="1"/>
+          </p:cNvSpPr>
+          <p:nvPr>
+            <p:ph type="title"/>
+          </p:nvPr>
+        </p:nvSpPr>
+        <p:spPr/>
+        <p:txBody>
+          <a:bodyPr/>
+          <a:lstStyle/>
+          <a:p>
+            <a:r>
+              <a:rPr lang="en-US" dirty="0"/>
+              <a:t>Let’s look at the grammar</a:t>
+            </a:r>
+          </a:p>
+        </p:txBody>
+      </p:sp>
+      <p:sp>
+        <p:nvSpPr>
+          <p:cNvPr id="3" name="TextBox 2">
+            <a:extLst>
+              <a:ext uri="{FF2B5EF4-FFF2-40B4-BE49-F238E27FC236}">
+                <a16:creationId xmlns:a16="http://schemas.microsoft.com/office/drawing/2014/main" id="{47A281E4-6231-B242-A075-00A0A288D10F}"/>
+              </a:ext>
+            </a:extLst>
+          </p:cNvPr>
+          <p:cNvSpPr txBox="1"/>
+          <p:nvPr/>
+        </p:nvSpPr>
+        <p:spPr>
+          <a:xfrm>
+            <a:off x="6764866" y="1585480"/>
+            <a:ext cx="3679277" cy="646331"/>
+          </a:xfrm>
+          <a:prstGeom prst="rect">
+            <a:avLst/>
+          </a:prstGeom>
+          <a:noFill/>
+        </p:spPr>
+        <p:txBody>
+          <a:bodyPr wrap="none" rtlCol="0">
+            <a:spAutoFit/>
+          </a:bodyPr>
+          <a:lstStyle/>
+          <a:p>
+            <a:r>
+              <a:rPr lang="en-US" i="1" dirty="0"/>
+              <a:t>How do we parse an Expr? </a:t>
+            </a:r>
+          </a:p>
+          <a:p>
+            <a:r>
+              <a:rPr lang="en-US" i="1" dirty="0"/>
+              <a:t>We parse a Unit followed by an Expr2</a:t>
+            </a:r>
+          </a:p>
+        </p:txBody>
+      </p:sp>
+      <p:sp>
+        <p:nvSpPr>
+          <p:cNvPr id="5" name="Rectangle 4">
+            <a:extLst>
+              <a:ext uri="{FF2B5EF4-FFF2-40B4-BE49-F238E27FC236}">
+                <a16:creationId xmlns:a16="http://schemas.microsoft.com/office/drawing/2014/main" id="{AF97C993-0880-7440-AC56-90CDB9F6C996}"/>
+              </a:ext>
+            </a:extLst>
+          </p:cNvPr>
+          <p:cNvSpPr/>
+          <p:nvPr/>
+        </p:nvSpPr>
+        <p:spPr>
+          <a:xfrm>
+            <a:off x="838200" y="1507736"/>
+            <a:ext cx="3911601" cy="2031325"/>
+          </a:xfrm>
+          <a:prstGeom prst="rect">
+            <a:avLst/>
+          </a:prstGeom>
+        </p:spPr>
+        <p:txBody>
+          <a:bodyPr wrap="square">
+            <a:spAutoFit/>
+          </a:bodyPr>
+          <a:lstStyle/>
+          <a:p>
+            <a:r>
+              <a:rPr lang="en-US" dirty="0">
+                <a:highlight>
+                  <a:srgbClr val="FFFF00"/>
+                </a:highlight>
+                <a:latin typeface="Courier" pitchFamily="2" charset="0"/>
+              </a:rPr>
+              <a:t>1: Expr  ::= Unit Expr2</a:t>
+            </a:r>
+          </a:p>
+          <a:p>
+            <a:r>
+              <a:rPr lang="en-US" dirty="0">
+                <a:latin typeface="Courier" pitchFamily="2" charset="0"/>
+              </a:rPr>
+              <a:t>2: Expr2 ::= Op Unit Expr2</a:t>
+            </a:r>
+          </a:p>
+          <a:p>
+            <a:r>
+              <a:rPr lang="en-US" dirty="0">
+                <a:latin typeface="Courier" pitchFamily="2" charset="0"/>
+              </a:rPr>
+              <a:t>3:       | “”</a:t>
+            </a:r>
+            <a:br>
+              <a:rPr lang="en-US" dirty="0">
+                <a:latin typeface="Courier" pitchFamily="2" charset="0"/>
+              </a:rPr>
+            </a:br>
+            <a:r>
+              <a:rPr lang="en-US" dirty="0">
+                <a:latin typeface="Courier" pitchFamily="2" charset="0"/>
+              </a:rPr>
+              <a:t>4: Unit  ::= ‘(‘ Expr ‘)’</a:t>
+            </a:r>
+          </a:p>
+          <a:p>
+            <a:r>
+              <a:rPr lang="en-US" dirty="0">
+                <a:latin typeface="Courier" pitchFamily="2" charset="0"/>
+              </a:rPr>
+              <a:t>5:       |    ID</a:t>
+            </a:r>
+          </a:p>
+          <a:p>
+            <a:r>
+              <a:rPr lang="en-US" dirty="0">
+                <a:latin typeface="Courier" pitchFamily="2" charset="0"/>
+              </a:rPr>
+              <a:t>6: Op    ::= ‘+’</a:t>
+            </a:r>
+          </a:p>
+          <a:p>
+            <a:r>
+              <a:rPr lang="en-US" dirty="0">
+                <a:latin typeface="Courier" pitchFamily="2" charset="0"/>
+              </a:rPr>
+              <a:t>7:       |   ‘*’</a:t>
+            </a:r>
+          </a:p>
+        </p:txBody>
+      </p:sp>
+    </p:spTree>
+    <p:extLst>
+      <p:ext uri="{BB962C8B-B14F-4D97-AF65-F5344CB8AC3E}">
+        <p14:creationId xmlns:p14="http://schemas.microsoft.com/office/powerpoint/2010/main" val="2043169205"/>
+      </p:ext>
+    </p:extLst>
+  </p:cSld>
+  <p:clrMapOvr>
+    <a:masterClrMapping/>
+  </p:clrMapOvr>
+</p:sld>
+</file>
+
 <file path=ppt/slides/slide7.xml><?xml version="1.0" encoding="utf-8"?>
 <p:sld xmlns:a="http://schemas.openxmlformats.org/drawingml/2006/main" xmlns:r="http://schemas.openxmlformats.org/officeDocument/2006/relationships" xmlns:p="http://schemas.openxmlformats.org/presentationml/2006/main">
   <p:cSld>
@@ -38740,6 +39324,6313 @@
     <p:extLst>
       <p:ext uri="{BB962C8B-B14F-4D97-AF65-F5344CB8AC3E}">
         <p14:creationId xmlns:p14="http://schemas.microsoft.com/office/powerpoint/2010/main" val="129134857"/>
+      </p:ext>
+    </p:extLst>
+  </p:cSld>
+  <p:clrMapOvr>
+    <a:masterClrMapping/>
+  </p:clrMapOvr>
+</p:sld>
+</file>
+
+<file path=ppt/slides/slide70.xml><?xml version="1.0" encoding="utf-8"?>
+<p:sld xmlns:a="http://schemas.openxmlformats.org/drawingml/2006/main" xmlns:r="http://schemas.openxmlformats.org/officeDocument/2006/relationships" xmlns:p="http://schemas.openxmlformats.org/presentationml/2006/main">
+  <p:cSld>
+    <p:spTree>
+      <p:nvGrpSpPr>
+        <p:cNvPr id="1" name=""/>
+        <p:cNvGrpSpPr/>
+        <p:nvPr/>
+      </p:nvGrpSpPr>
+      <p:grpSpPr>
+        <a:xfrm>
+          <a:off x="0" y="0"/>
+          <a:ext cx="0" cy="0"/>
+          <a:chOff x="0" y="0"/>
+          <a:chExt cx="0" cy="0"/>
+        </a:xfrm>
+      </p:grpSpPr>
+      <p:sp>
+        <p:nvSpPr>
+          <p:cNvPr id="2" name="Title 1">
+            <a:extLst>
+              <a:ext uri="{FF2B5EF4-FFF2-40B4-BE49-F238E27FC236}">
+                <a16:creationId xmlns:a16="http://schemas.microsoft.com/office/drawing/2014/main" id="{8E411F96-7461-874D-8EA3-B6DFAA688889}"/>
+              </a:ext>
+            </a:extLst>
+          </p:cNvPr>
+          <p:cNvSpPr>
+            <a:spLocks noGrp="1"/>
+          </p:cNvSpPr>
+          <p:nvPr>
+            <p:ph type="title"/>
+          </p:nvPr>
+        </p:nvSpPr>
+        <p:spPr/>
+        <p:txBody>
+          <a:bodyPr/>
+          <a:lstStyle/>
+          <a:p>
+            <a:r>
+              <a:rPr lang="en-US" dirty="0"/>
+              <a:t>Let’s look at the grammar</a:t>
+            </a:r>
+          </a:p>
+        </p:txBody>
+      </p:sp>
+      <p:sp>
+        <p:nvSpPr>
+          <p:cNvPr id="7" name="TextBox 6">
+            <a:extLst>
+              <a:ext uri="{FF2B5EF4-FFF2-40B4-BE49-F238E27FC236}">
+                <a16:creationId xmlns:a16="http://schemas.microsoft.com/office/drawing/2014/main" id="{4829D35E-DBDD-6144-A7D9-5D93088C5744}"/>
+              </a:ext>
+            </a:extLst>
+          </p:cNvPr>
+          <p:cNvSpPr txBox="1"/>
+          <p:nvPr/>
+        </p:nvSpPr>
+        <p:spPr>
+          <a:xfrm>
+            <a:off x="5886325" y="2674894"/>
+            <a:ext cx="3967625" cy="461665"/>
+          </a:xfrm>
+          <a:prstGeom prst="rect">
+            <a:avLst/>
+          </a:prstGeom>
+          <a:noFill/>
+        </p:spPr>
+        <p:txBody>
+          <a:bodyPr wrap="none" rtlCol="0">
+            <a:spAutoFit/>
+          </a:bodyPr>
+          <a:lstStyle/>
+          <a:p>
+            <a:r>
+              <a:rPr lang="en-US" sz="2400" dirty="0"/>
+              <a:t>We can just write exactly that!</a:t>
+            </a:r>
+          </a:p>
+        </p:txBody>
+      </p:sp>
+      <p:sp>
+        <p:nvSpPr>
+          <p:cNvPr id="8" name="TextBox 7">
+            <a:extLst>
+              <a:ext uri="{FF2B5EF4-FFF2-40B4-BE49-F238E27FC236}">
+                <a16:creationId xmlns:a16="http://schemas.microsoft.com/office/drawing/2014/main" id="{436689AF-BA26-3347-BA19-B7CDF8BA594D}"/>
+              </a:ext>
+            </a:extLst>
+          </p:cNvPr>
+          <p:cNvSpPr txBox="1"/>
+          <p:nvPr/>
+        </p:nvSpPr>
+        <p:spPr>
+          <a:xfrm>
+            <a:off x="6764866" y="1585480"/>
+            <a:ext cx="3679277" cy="646331"/>
+          </a:xfrm>
+          <a:prstGeom prst="rect">
+            <a:avLst/>
+          </a:prstGeom>
+          <a:noFill/>
+        </p:spPr>
+        <p:txBody>
+          <a:bodyPr wrap="none" rtlCol="0">
+            <a:spAutoFit/>
+          </a:bodyPr>
+          <a:lstStyle/>
+          <a:p>
+            <a:r>
+              <a:rPr lang="en-US" i="1" dirty="0"/>
+              <a:t>How do we parse an Expr? </a:t>
+            </a:r>
+          </a:p>
+          <a:p>
+            <a:r>
+              <a:rPr lang="en-US" i="1" dirty="0"/>
+              <a:t>We parse a Unit followed by an Expr2</a:t>
+            </a:r>
+          </a:p>
+        </p:txBody>
+      </p:sp>
+      <p:sp>
+        <p:nvSpPr>
+          <p:cNvPr id="9" name="Rectangle 8">
+            <a:extLst>
+              <a:ext uri="{FF2B5EF4-FFF2-40B4-BE49-F238E27FC236}">
+                <a16:creationId xmlns:a16="http://schemas.microsoft.com/office/drawing/2014/main" id="{0166F378-5647-AF40-9B86-498B4156AD4E}"/>
+              </a:ext>
+            </a:extLst>
+          </p:cNvPr>
+          <p:cNvSpPr/>
+          <p:nvPr/>
+        </p:nvSpPr>
+        <p:spPr>
+          <a:xfrm>
+            <a:off x="838200" y="1507736"/>
+            <a:ext cx="3911601" cy="2031325"/>
+          </a:xfrm>
+          <a:prstGeom prst="rect">
+            <a:avLst/>
+          </a:prstGeom>
+        </p:spPr>
+        <p:txBody>
+          <a:bodyPr wrap="square">
+            <a:spAutoFit/>
+          </a:bodyPr>
+          <a:lstStyle/>
+          <a:p>
+            <a:r>
+              <a:rPr lang="en-US" dirty="0">
+                <a:highlight>
+                  <a:srgbClr val="FFFF00"/>
+                </a:highlight>
+                <a:latin typeface="Courier" pitchFamily="2" charset="0"/>
+              </a:rPr>
+              <a:t>1: Expr  ::= Unit Expr2</a:t>
+            </a:r>
+          </a:p>
+          <a:p>
+            <a:r>
+              <a:rPr lang="en-US" dirty="0">
+                <a:latin typeface="Courier" pitchFamily="2" charset="0"/>
+              </a:rPr>
+              <a:t>2: Expr2 ::= Op Unit Expr2</a:t>
+            </a:r>
+          </a:p>
+          <a:p>
+            <a:r>
+              <a:rPr lang="en-US" dirty="0">
+                <a:latin typeface="Courier" pitchFamily="2" charset="0"/>
+              </a:rPr>
+              <a:t>3:       | “”</a:t>
+            </a:r>
+            <a:br>
+              <a:rPr lang="en-US" dirty="0">
+                <a:latin typeface="Courier" pitchFamily="2" charset="0"/>
+              </a:rPr>
+            </a:br>
+            <a:r>
+              <a:rPr lang="en-US" dirty="0">
+                <a:latin typeface="Courier" pitchFamily="2" charset="0"/>
+              </a:rPr>
+              <a:t>4: Unit  ::= ‘(‘ Expr ‘)’</a:t>
+            </a:r>
+          </a:p>
+          <a:p>
+            <a:r>
+              <a:rPr lang="en-US" dirty="0">
+                <a:latin typeface="Courier" pitchFamily="2" charset="0"/>
+              </a:rPr>
+              <a:t>5:       |    ID</a:t>
+            </a:r>
+          </a:p>
+          <a:p>
+            <a:r>
+              <a:rPr lang="en-US" dirty="0">
+                <a:latin typeface="Courier" pitchFamily="2" charset="0"/>
+              </a:rPr>
+              <a:t>6: Op    ::= ‘+’</a:t>
+            </a:r>
+          </a:p>
+          <a:p>
+            <a:r>
+              <a:rPr lang="en-US" dirty="0">
+                <a:latin typeface="Courier" pitchFamily="2" charset="0"/>
+              </a:rPr>
+              <a:t>7:       |   ‘*’</a:t>
+            </a:r>
+          </a:p>
+        </p:txBody>
+      </p:sp>
+      <p:sp>
+        <p:nvSpPr>
+          <p:cNvPr id="10" name="Rectangle 9">
+            <a:extLst>
+              <a:ext uri="{FF2B5EF4-FFF2-40B4-BE49-F238E27FC236}">
+                <a16:creationId xmlns:a16="http://schemas.microsoft.com/office/drawing/2014/main" id="{9D67A2B4-768D-7A4A-B20F-620EAF5DDB35}"/>
+              </a:ext>
+            </a:extLst>
+          </p:cNvPr>
+          <p:cNvSpPr/>
+          <p:nvPr/>
+        </p:nvSpPr>
+        <p:spPr>
+          <a:xfrm>
+            <a:off x="6576607" y="3335867"/>
+            <a:ext cx="4461933" cy="1815882"/>
+          </a:xfrm>
+          <a:prstGeom prst="rect">
+            <a:avLst/>
+          </a:prstGeom>
+        </p:spPr>
+        <p:txBody>
+          <a:bodyPr wrap="square">
+            <a:spAutoFit/>
+          </a:bodyPr>
+          <a:lstStyle/>
+          <a:p>
+            <a:r>
+              <a:rPr lang="en-US" sz="2800" b="1" dirty="0">
+                <a:solidFill>
+                  <a:srgbClr val="2EAEBB"/>
+                </a:solidFill>
+                <a:latin typeface="Menlo" panose="020B0609030804020204" pitchFamily="49" charset="0"/>
+              </a:rPr>
+              <a:t>def</a:t>
+            </a:r>
+            <a:r>
+              <a:rPr lang="en-US" sz="2800" dirty="0">
+                <a:solidFill>
+                  <a:srgbClr val="000000"/>
+                </a:solidFill>
+                <a:latin typeface="Menlo" panose="020B0609030804020204" pitchFamily="49" charset="0"/>
+              </a:rPr>
+              <a:t> </a:t>
+            </a:r>
+            <a:r>
+              <a:rPr lang="en-US" sz="2800" b="1" dirty="0" err="1">
+                <a:solidFill>
+                  <a:srgbClr val="400BD9"/>
+                </a:solidFill>
+                <a:latin typeface="Menlo" panose="020B0609030804020204" pitchFamily="49" charset="0"/>
+              </a:rPr>
+              <a:t>parse_Expr</a:t>
+            </a:r>
+            <a:r>
+              <a:rPr lang="en-US" sz="2800" dirty="0">
+                <a:solidFill>
+                  <a:srgbClr val="000000"/>
+                </a:solidFill>
+                <a:latin typeface="Menlo" panose="020B0609030804020204" pitchFamily="49" charset="0"/>
+              </a:rPr>
+              <a:t>(</a:t>
+            </a:r>
+            <a:r>
+              <a:rPr lang="en-US" sz="2800" b="1" dirty="0">
+                <a:solidFill>
+                  <a:srgbClr val="2EAEBB"/>
+                </a:solidFill>
+                <a:latin typeface="Menlo" panose="020B0609030804020204" pitchFamily="49" charset="0"/>
+              </a:rPr>
+              <a:t>self</a:t>
+            </a:r>
+            <a:r>
+              <a:rPr lang="en-US" sz="2800" dirty="0">
+                <a:solidFill>
+                  <a:srgbClr val="000000"/>
+                </a:solidFill>
+                <a:latin typeface="Menlo" panose="020B0609030804020204" pitchFamily="49" charset="0"/>
+              </a:rPr>
+              <a:t>):</a:t>
+            </a:r>
+            <a:endParaRPr lang="en-US" sz="2800" dirty="0">
+              <a:solidFill>
+                <a:srgbClr val="400BD9"/>
+              </a:solidFill>
+              <a:latin typeface="Menlo" panose="020B0609030804020204" pitchFamily="49" charset="0"/>
+            </a:endParaRPr>
+          </a:p>
+          <a:p>
+            <a:r>
+              <a:rPr lang="en-US" sz="2800" dirty="0">
+                <a:solidFill>
+                  <a:srgbClr val="000000"/>
+                </a:solidFill>
+                <a:latin typeface="Menlo" panose="020B0609030804020204" pitchFamily="49" charset="0"/>
+              </a:rPr>
+              <a:t>        </a:t>
+            </a:r>
+            <a:r>
+              <a:rPr lang="en-US" sz="2800" b="1" dirty="0" err="1">
+                <a:solidFill>
+                  <a:srgbClr val="2EAEBB"/>
+                </a:solidFill>
+                <a:latin typeface="Menlo" panose="020B0609030804020204" pitchFamily="49" charset="0"/>
+              </a:rPr>
+              <a:t>self</a:t>
+            </a:r>
+            <a:r>
+              <a:rPr lang="en-US" sz="2800" dirty="0" err="1">
+                <a:solidFill>
+                  <a:srgbClr val="000000"/>
+                </a:solidFill>
+                <a:latin typeface="Menlo" panose="020B0609030804020204" pitchFamily="49" charset="0"/>
+              </a:rPr>
+              <a:t>.parse_Unit</a:t>
+            </a:r>
+            <a:r>
+              <a:rPr lang="en-US" sz="2800" dirty="0">
+                <a:solidFill>
+                  <a:srgbClr val="000000"/>
+                </a:solidFill>
+                <a:latin typeface="Menlo" panose="020B0609030804020204" pitchFamily="49" charset="0"/>
+              </a:rPr>
+              <a:t>();</a:t>
+            </a:r>
+          </a:p>
+          <a:p>
+            <a:r>
+              <a:rPr lang="en-US" sz="2800" dirty="0">
+                <a:solidFill>
+                  <a:srgbClr val="000000"/>
+                </a:solidFill>
+                <a:latin typeface="Menlo" panose="020B0609030804020204" pitchFamily="49" charset="0"/>
+              </a:rPr>
+              <a:t>        </a:t>
+            </a:r>
+            <a:r>
+              <a:rPr lang="en-US" sz="2800" b="1" dirty="0">
+                <a:solidFill>
+                  <a:srgbClr val="2EAEBB"/>
+                </a:solidFill>
+                <a:latin typeface="Menlo" panose="020B0609030804020204" pitchFamily="49" charset="0"/>
+              </a:rPr>
+              <a:t>self</a:t>
+            </a:r>
+            <a:r>
+              <a:rPr lang="en-US" sz="2800" dirty="0">
+                <a:solidFill>
+                  <a:srgbClr val="000000"/>
+                </a:solidFill>
+                <a:latin typeface="Menlo" panose="020B0609030804020204" pitchFamily="49" charset="0"/>
+              </a:rPr>
+              <a:t>.parse_Expr2();</a:t>
+            </a:r>
+          </a:p>
+          <a:p>
+            <a:r>
+              <a:rPr lang="en-US" sz="2800" dirty="0">
+                <a:solidFill>
+                  <a:srgbClr val="000000"/>
+                </a:solidFill>
+                <a:latin typeface="Menlo" panose="020B0609030804020204" pitchFamily="49" charset="0"/>
+              </a:rPr>
+              <a:t>        </a:t>
+            </a:r>
+            <a:r>
+              <a:rPr lang="en-US" sz="2800" b="1" dirty="0">
+                <a:solidFill>
+                  <a:srgbClr val="2EAEBB"/>
+                </a:solidFill>
+                <a:latin typeface="Menlo" panose="020B0609030804020204" pitchFamily="49" charset="0"/>
+              </a:rPr>
+              <a:t>return</a:t>
+            </a:r>
+            <a:endParaRPr lang="en-US" sz="2800" dirty="0">
+              <a:solidFill>
+                <a:srgbClr val="000000"/>
+              </a:solidFill>
+              <a:effectLst/>
+              <a:latin typeface="Menlo" panose="020B0609030804020204" pitchFamily="49" charset="0"/>
+            </a:endParaRPr>
+          </a:p>
+        </p:txBody>
+      </p:sp>
+    </p:spTree>
+    <p:extLst>
+      <p:ext uri="{BB962C8B-B14F-4D97-AF65-F5344CB8AC3E}">
+        <p14:creationId xmlns:p14="http://schemas.microsoft.com/office/powerpoint/2010/main" val="1274463873"/>
+      </p:ext>
+    </p:extLst>
+  </p:cSld>
+  <p:clrMapOvr>
+    <a:masterClrMapping/>
+  </p:clrMapOvr>
+</p:sld>
+</file>
+
+<file path=ppt/slides/slide71.xml><?xml version="1.0" encoding="utf-8"?>
+<p:sld xmlns:a="http://schemas.openxmlformats.org/drawingml/2006/main" xmlns:r="http://schemas.openxmlformats.org/officeDocument/2006/relationships" xmlns:p="http://schemas.openxmlformats.org/presentationml/2006/main">
+  <p:cSld>
+    <p:spTree>
+      <p:nvGrpSpPr>
+        <p:cNvPr id="1" name=""/>
+        <p:cNvGrpSpPr/>
+        <p:nvPr/>
+      </p:nvGrpSpPr>
+      <p:grpSpPr>
+        <a:xfrm>
+          <a:off x="0" y="0"/>
+          <a:ext cx="0" cy="0"/>
+          <a:chOff x="0" y="0"/>
+          <a:chExt cx="0" cy="0"/>
+        </a:xfrm>
+      </p:grpSpPr>
+      <p:sp>
+        <p:nvSpPr>
+          <p:cNvPr id="2" name="Title 1">
+            <a:extLst>
+              <a:ext uri="{FF2B5EF4-FFF2-40B4-BE49-F238E27FC236}">
+                <a16:creationId xmlns:a16="http://schemas.microsoft.com/office/drawing/2014/main" id="{8E411F96-7461-874D-8EA3-B6DFAA688889}"/>
+              </a:ext>
+            </a:extLst>
+          </p:cNvPr>
+          <p:cNvSpPr>
+            <a:spLocks noGrp="1"/>
+          </p:cNvSpPr>
+          <p:nvPr>
+            <p:ph type="title"/>
+          </p:nvPr>
+        </p:nvSpPr>
+        <p:spPr/>
+        <p:txBody>
+          <a:bodyPr/>
+          <a:lstStyle/>
+          <a:p>
+            <a:r>
+              <a:rPr lang="en-US" dirty="0"/>
+              <a:t>Let’s look at the grammar</a:t>
+            </a:r>
+          </a:p>
+        </p:txBody>
+      </p:sp>
+      <p:sp>
+        <p:nvSpPr>
+          <p:cNvPr id="8" name="TextBox 7">
+            <a:extLst>
+              <a:ext uri="{FF2B5EF4-FFF2-40B4-BE49-F238E27FC236}">
+                <a16:creationId xmlns:a16="http://schemas.microsoft.com/office/drawing/2014/main" id="{436689AF-BA26-3347-BA19-B7CDF8BA594D}"/>
+              </a:ext>
+            </a:extLst>
+          </p:cNvPr>
+          <p:cNvSpPr txBox="1"/>
+          <p:nvPr/>
+        </p:nvSpPr>
+        <p:spPr>
+          <a:xfrm>
+            <a:off x="6764866" y="1585480"/>
+            <a:ext cx="2828467" cy="369332"/>
+          </a:xfrm>
+          <a:prstGeom prst="rect">
+            <a:avLst/>
+          </a:prstGeom>
+          <a:noFill/>
+        </p:spPr>
+        <p:txBody>
+          <a:bodyPr wrap="none" rtlCol="0">
+            <a:spAutoFit/>
+          </a:bodyPr>
+          <a:lstStyle/>
+          <a:p>
+            <a:r>
+              <a:rPr lang="en-US" i="1" dirty="0"/>
+              <a:t>How do we parse an Expr2? </a:t>
+            </a:r>
+          </a:p>
+        </p:txBody>
+      </p:sp>
+      <p:sp>
+        <p:nvSpPr>
+          <p:cNvPr id="9" name="Rectangle 8">
+            <a:extLst>
+              <a:ext uri="{FF2B5EF4-FFF2-40B4-BE49-F238E27FC236}">
+                <a16:creationId xmlns:a16="http://schemas.microsoft.com/office/drawing/2014/main" id="{10957C6A-893E-694F-B916-8039152D7645}"/>
+              </a:ext>
+            </a:extLst>
+          </p:cNvPr>
+          <p:cNvSpPr/>
+          <p:nvPr/>
+        </p:nvSpPr>
+        <p:spPr>
+          <a:xfrm>
+            <a:off x="838200" y="1507736"/>
+            <a:ext cx="3911601" cy="2031325"/>
+          </a:xfrm>
+          <a:prstGeom prst="rect">
+            <a:avLst/>
+          </a:prstGeom>
+        </p:spPr>
+        <p:txBody>
+          <a:bodyPr wrap="square">
+            <a:spAutoFit/>
+          </a:bodyPr>
+          <a:lstStyle/>
+          <a:p>
+            <a:r>
+              <a:rPr lang="en-US" dirty="0">
+                <a:latin typeface="Courier" pitchFamily="2" charset="0"/>
+              </a:rPr>
+              <a:t>1: Expr  ::= Unit Expr2</a:t>
+            </a:r>
+          </a:p>
+          <a:p>
+            <a:r>
+              <a:rPr lang="en-US" dirty="0">
+                <a:highlight>
+                  <a:srgbClr val="FFFF00"/>
+                </a:highlight>
+                <a:latin typeface="Courier" pitchFamily="2" charset="0"/>
+              </a:rPr>
+              <a:t>2: Expr2 ::= Op Unit Expr2</a:t>
+            </a:r>
+          </a:p>
+          <a:p>
+            <a:r>
+              <a:rPr lang="en-US" dirty="0">
+                <a:highlight>
+                  <a:srgbClr val="FFFF00"/>
+                </a:highlight>
+                <a:latin typeface="Courier" pitchFamily="2" charset="0"/>
+              </a:rPr>
+              <a:t>3:       | “”</a:t>
+            </a:r>
+            <a:br>
+              <a:rPr lang="en-US" dirty="0">
+                <a:latin typeface="Courier" pitchFamily="2" charset="0"/>
+              </a:rPr>
+            </a:br>
+            <a:r>
+              <a:rPr lang="en-US" dirty="0">
+                <a:latin typeface="Courier" pitchFamily="2" charset="0"/>
+              </a:rPr>
+              <a:t>4: Unit  ::= ‘(‘ Expr ‘)’</a:t>
+            </a:r>
+          </a:p>
+          <a:p>
+            <a:r>
+              <a:rPr lang="en-US" dirty="0">
+                <a:latin typeface="Courier" pitchFamily="2" charset="0"/>
+              </a:rPr>
+              <a:t>5:       |    ID</a:t>
+            </a:r>
+          </a:p>
+          <a:p>
+            <a:r>
+              <a:rPr lang="en-US" dirty="0">
+                <a:latin typeface="Courier" pitchFamily="2" charset="0"/>
+              </a:rPr>
+              <a:t>6: Op    ::= ‘+’</a:t>
+            </a:r>
+          </a:p>
+          <a:p>
+            <a:r>
+              <a:rPr lang="en-US" dirty="0">
+                <a:latin typeface="Courier" pitchFamily="2" charset="0"/>
+              </a:rPr>
+              <a:t>7:       |   ‘*’</a:t>
+            </a:r>
+          </a:p>
+        </p:txBody>
+      </p:sp>
+    </p:spTree>
+    <p:extLst>
+      <p:ext uri="{BB962C8B-B14F-4D97-AF65-F5344CB8AC3E}">
+        <p14:creationId xmlns:p14="http://schemas.microsoft.com/office/powerpoint/2010/main" val="3437154383"/>
+      </p:ext>
+    </p:extLst>
+  </p:cSld>
+  <p:clrMapOvr>
+    <a:masterClrMapping/>
+  </p:clrMapOvr>
+</p:sld>
+</file>
+
+<file path=ppt/slides/slide72.xml><?xml version="1.0" encoding="utf-8"?>
+<p:sld xmlns:a="http://schemas.openxmlformats.org/drawingml/2006/main" xmlns:r="http://schemas.openxmlformats.org/officeDocument/2006/relationships" xmlns:p="http://schemas.openxmlformats.org/presentationml/2006/main">
+  <p:cSld>
+    <p:spTree>
+      <p:nvGrpSpPr>
+        <p:cNvPr id="1" name=""/>
+        <p:cNvGrpSpPr/>
+        <p:nvPr/>
+      </p:nvGrpSpPr>
+      <p:grpSpPr>
+        <a:xfrm>
+          <a:off x="0" y="0"/>
+          <a:ext cx="0" cy="0"/>
+          <a:chOff x="0" y="0"/>
+          <a:chExt cx="0" cy="0"/>
+        </a:xfrm>
+      </p:grpSpPr>
+      <p:sp>
+        <p:nvSpPr>
+          <p:cNvPr id="2" name="Title 1">
+            <a:extLst>
+              <a:ext uri="{FF2B5EF4-FFF2-40B4-BE49-F238E27FC236}">
+                <a16:creationId xmlns:a16="http://schemas.microsoft.com/office/drawing/2014/main" id="{8E411F96-7461-874D-8EA3-B6DFAA688889}"/>
+              </a:ext>
+            </a:extLst>
+          </p:cNvPr>
+          <p:cNvSpPr>
+            <a:spLocks noGrp="1"/>
+          </p:cNvSpPr>
+          <p:nvPr>
+            <p:ph type="title"/>
+          </p:nvPr>
+        </p:nvSpPr>
+        <p:spPr/>
+        <p:txBody>
+          <a:bodyPr/>
+          <a:lstStyle/>
+          <a:p>
+            <a:r>
+              <a:rPr lang="en-US" dirty="0"/>
+              <a:t>Let’s look at the grammar</a:t>
+            </a:r>
+          </a:p>
+        </p:txBody>
+      </p:sp>
+      <p:sp>
+        <p:nvSpPr>
+          <p:cNvPr id="4" name="Rectangle 3">
+            <a:extLst>
+              <a:ext uri="{FF2B5EF4-FFF2-40B4-BE49-F238E27FC236}">
+                <a16:creationId xmlns:a16="http://schemas.microsoft.com/office/drawing/2014/main" id="{C95AD811-DA94-934C-A22D-0CC1576CD299}"/>
+              </a:ext>
+            </a:extLst>
+          </p:cNvPr>
+          <p:cNvSpPr/>
+          <p:nvPr/>
+        </p:nvSpPr>
+        <p:spPr>
+          <a:xfrm>
+            <a:off x="838200" y="1507736"/>
+            <a:ext cx="3911601" cy="2031325"/>
+          </a:xfrm>
+          <a:prstGeom prst="rect">
+            <a:avLst/>
+          </a:prstGeom>
+        </p:spPr>
+        <p:txBody>
+          <a:bodyPr wrap="square">
+            <a:spAutoFit/>
+          </a:bodyPr>
+          <a:lstStyle/>
+          <a:p>
+            <a:r>
+              <a:rPr lang="en-US" dirty="0">
+                <a:latin typeface="Courier" pitchFamily="2" charset="0"/>
+              </a:rPr>
+              <a:t>1: Expr  ::= Unit Expr2</a:t>
+            </a:r>
+          </a:p>
+          <a:p>
+            <a:r>
+              <a:rPr lang="en-US" dirty="0">
+                <a:highlight>
+                  <a:srgbClr val="FFFF00"/>
+                </a:highlight>
+                <a:latin typeface="Courier" pitchFamily="2" charset="0"/>
+              </a:rPr>
+              <a:t>2: Expr2 ::= Op Unit Expr2</a:t>
+            </a:r>
+          </a:p>
+          <a:p>
+            <a:r>
+              <a:rPr lang="en-US" dirty="0">
+                <a:highlight>
+                  <a:srgbClr val="FFFF00"/>
+                </a:highlight>
+                <a:latin typeface="Courier" pitchFamily="2" charset="0"/>
+              </a:rPr>
+              <a:t>3:       | “”</a:t>
+            </a:r>
+            <a:br>
+              <a:rPr lang="en-US" dirty="0">
+                <a:latin typeface="Courier" pitchFamily="2" charset="0"/>
+              </a:rPr>
+            </a:br>
+            <a:r>
+              <a:rPr lang="en-US" dirty="0">
+                <a:latin typeface="Courier" pitchFamily="2" charset="0"/>
+              </a:rPr>
+              <a:t>4: Unit  ::= ‘(‘ Expr ‘)’</a:t>
+            </a:r>
+          </a:p>
+          <a:p>
+            <a:r>
+              <a:rPr lang="en-US" dirty="0">
+                <a:latin typeface="Courier" pitchFamily="2" charset="0"/>
+              </a:rPr>
+              <a:t>5:       |    ID</a:t>
+            </a:r>
+          </a:p>
+          <a:p>
+            <a:r>
+              <a:rPr lang="en-US" dirty="0">
+                <a:latin typeface="Courier" pitchFamily="2" charset="0"/>
+              </a:rPr>
+              <a:t>6: Op    ::= ‘+’</a:t>
+            </a:r>
+          </a:p>
+          <a:p>
+            <a:r>
+              <a:rPr lang="en-US" dirty="0">
+                <a:latin typeface="Courier" pitchFamily="2" charset="0"/>
+              </a:rPr>
+              <a:t>7:       |   ‘*’</a:t>
+            </a:r>
+          </a:p>
+        </p:txBody>
+      </p:sp>
+      <p:sp>
+        <p:nvSpPr>
+          <p:cNvPr id="8" name="TextBox 7">
+            <a:extLst>
+              <a:ext uri="{FF2B5EF4-FFF2-40B4-BE49-F238E27FC236}">
+                <a16:creationId xmlns:a16="http://schemas.microsoft.com/office/drawing/2014/main" id="{436689AF-BA26-3347-BA19-B7CDF8BA594D}"/>
+              </a:ext>
+            </a:extLst>
+          </p:cNvPr>
+          <p:cNvSpPr txBox="1"/>
+          <p:nvPr/>
+        </p:nvSpPr>
+        <p:spPr>
+          <a:xfrm>
+            <a:off x="6764866" y="1585480"/>
+            <a:ext cx="2828467" cy="369332"/>
+          </a:xfrm>
+          <a:prstGeom prst="rect">
+            <a:avLst/>
+          </a:prstGeom>
+          <a:noFill/>
+        </p:spPr>
+        <p:txBody>
+          <a:bodyPr wrap="none" rtlCol="0">
+            <a:spAutoFit/>
+          </a:bodyPr>
+          <a:lstStyle/>
+          <a:p>
+            <a:r>
+              <a:rPr lang="en-US" i="1" dirty="0"/>
+              <a:t>How do we parse an Expr2? </a:t>
+            </a:r>
+          </a:p>
+        </p:txBody>
+      </p:sp>
+      <p:sp>
+        <p:nvSpPr>
+          <p:cNvPr id="5" name="Rectangle 4">
+            <a:extLst>
+              <a:ext uri="{FF2B5EF4-FFF2-40B4-BE49-F238E27FC236}">
+                <a16:creationId xmlns:a16="http://schemas.microsoft.com/office/drawing/2014/main" id="{8C35DCA6-16D2-F54F-A22A-3EFA1E6D8A47}"/>
+              </a:ext>
+            </a:extLst>
+          </p:cNvPr>
+          <p:cNvSpPr/>
+          <p:nvPr/>
+        </p:nvSpPr>
+        <p:spPr>
+          <a:xfrm>
+            <a:off x="838200" y="4184551"/>
+            <a:ext cx="2275544" cy="2308324"/>
+          </a:xfrm>
+          <a:prstGeom prst="rect">
+            <a:avLst/>
+          </a:prstGeom>
+        </p:spPr>
+        <p:txBody>
+          <a:bodyPr wrap="square">
+            <a:spAutoFit/>
+          </a:bodyPr>
+          <a:lstStyle/>
+          <a:p>
+            <a:r>
+              <a:rPr lang="en-US" dirty="0">
+                <a:latin typeface="Courier" pitchFamily="2" charset="0"/>
+              </a:rPr>
+              <a:t>First+ sets:</a:t>
+            </a:r>
+            <a:br>
+              <a:rPr lang="en-US" dirty="0">
+                <a:latin typeface="Courier" pitchFamily="2" charset="0"/>
+              </a:rPr>
+            </a:br>
+            <a:r>
+              <a:rPr lang="en-US" dirty="0">
+                <a:latin typeface="Courier" pitchFamily="2" charset="0"/>
+              </a:rPr>
+              <a:t>1: {‘(‘, ID}</a:t>
+            </a:r>
+          </a:p>
+          <a:p>
+            <a:r>
+              <a:rPr lang="en-US" dirty="0">
+                <a:latin typeface="Courier" pitchFamily="2" charset="0"/>
+              </a:rPr>
+              <a:t>2: {‘+’, ‘*’}</a:t>
+            </a:r>
+          </a:p>
+          <a:p>
+            <a:r>
+              <a:rPr lang="en-US" dirty="0">
+                <a:latin typeface="Courier" pitchFamily="2" charset="0"/>
+              </a:rPr>
+              <a:t>3: {None, ’)’}</a:t>
+            </a:r>
+            <a:br>
+              <a:rPr lang="en-US" dirty="0">
+                <a:latin typeface="Courier" pitchFamily="2" charset="0"/>
+              </a:rPr>
+            </a:br>
+            <a:r>
+              <a:rPr lang="en-US" dirty="0">
+                <a:latin typeface="Courier" pitchFamily="2" charset="0"/>
+              </a:rPr>
+              <a:t>4: {‘(‘}</a:t>
+            </a:r>
+          </a:p>
+          <a:p>
+            <a:r>
+              <a:rPr lang="en-US" dirty="0">
+                <a:latin typeface="Courier" pitchFamily="2" charset="0"/>
+              </a:rPr>
+              <a:t>5: {ID}</a:t>
+            </a:r>
+          </a:p>
+          <a:p>
+            <a:r>
+              <a:rPr lang="en-US" dirty="0">
+                <a:latin typeface="Courier" pitchFamily="2" charset="0"/>
+              </a:rPr>
+              <a:t>6: {‘+’}</a:t>
+            </a:r>
+          </a:p>
+          <a:p>
+            <a:r>
+              <a:rPr lang="en-US" dirty="0">
+                <a:latin typeface="Courier" pitchFamily="2" charset="0"/>
+              </a:rPr>
+              <a:t>7: {‘*’}</a:t>
+            </a:r>
+          </a:p>
+        </p:txBody>
+      </p:sp>
+    </p:spTree>
+    <p:extLst>
+      <p:ext uri="{BB962C8B-B14F-4D97-AF65-F5344CB8AC3E}">
+        <p14:creationId xmlns:p14="http://schemas.microsoft.com/office/powerpoint/2010/main" val="2467940779"/>
+      </p:ext>
+    </p:extLst>
+  </p:cSld>
+  <p:clrMapOvr>
+    <a:masterClrMapping/>
+  </p:clrMapOvr>
+</p:sld>
+</file>
+
+<file path=ppt/slides/slide73.xml><?xml version="1.0" encoding="utf-8"?>
+<p:sld xmlns:a="http://schemas.openxmlformats.org/drawingml/2006/main" xmlns:r="http://schemas.openxmlformats.org/officeDocument/2006/relationships" xmlns:p="http://schemas.openxmlformats.org/presentationml/2006/main">
+  <p:cSld>
+    <p:spTree>
+      <p:nvGrpSpPr>
+        <p:cNvPr id="1" name=""/>
+        <p:cNvGrpSpPr/>
+        <p:nvPr/>
+      </p:nvGrpSpPr>
+      <p:grpSpPr>
+        <a:xfrm>
+          <a:off x="0" y="0"/>
+          <a:ext cx="0" cy="0"/>
+          <a:chOff x="0" y="0"/>
+          <a:chExt cx="0" cy="0"/>
+        </a:xfrm>
+      </p:grpSpPr>
+      <p:sp>
+        <p:nvSpPr>
+          <p:cNvPr id="2" name="Title 1">
+            <a:extLst>
+              <a:ext uri="{FF2B5EF4-FFF2-40B4-BE49-F238E27FC236}">
+                <a16:creationId xmlns:a16="http://schemas.microsoft.com/office/drawing/2014/main" id="{8E411F96-7461-874D-8EA3-B6DFAA688889}"/>
+              </a:ext>
+            </a:extLst>
+          </p:cNvPr>
+          <p:cNvSpPr>
+            <a:spLocks noGrp="1"/>
+          </p:cNvSpPr>
+          <p:nvPr>
+            <p:ph type="title"/>
+          </p:nvPr>
+        </p:nvSpPr>
+        <p:spPr/>
+        <p:txBody>
+          <a:bodyPr/>
+          <a:lstStyle/>
+          <a:p>
+            <a:r>
+              <a:rPr lang="en-US" dirty="0"/>
+              <a:t>Let’s look at the grammar</a:t>
+            </a:r>
+          </a:p>
+        </p:txBody>
+      </p:sp>
+      <p:sp>
+        <p:nvSpPr>
+          <p:cNvPr id="4" name="Rectangle 3">
+            <a:extLst>
+              <a:ext uri="{FF2B5EF4-FFF2-40B4-BE49-F238E27FC236}">
+                <a16:creationId xmlns:a16="http://schemas.microsoft.com/office/drawing/2014/main" id="{C95AD811-DA94-934C-A22D-0CC1576CD299}"/>
+              </a:ext>
+            </a:extLst>
+          </p:cNvPr>
+          <p:cNvSpPr/>
+          <p:nvPr/>
+        </p:nvSpPr>
+        <p:spPr>
+          <a:xfrm>
+            <a:off x="838200" y="1507736"/>
+            <a:ext cx="3911601" cy="2031325"/>
+          </a:xfrm>
+          <a:prstGeom prst="rect">
+            <a:avLst/>
+          </a:prstGeom>
+        </p:spPr>
+        <p:txBody>
+          <a:bodyPr wrap="square">
+            <a:spAutoFit/>
+          </a:bodyPr>
+          <a:lstStyle/>
+          <a:p>
+            <a:r>
+              <a:rPr lang="en-US" dirty="0">
+                <a:latin typeface="Courier" pitchFamily="2" charset="0"/>
+              </a:rPr>
+              <a:t>1: Expr  ::= Unit Expr2</a:t>
+            </a:r>
+          </a:p>
+          <a:p>
+            <a:r>
+              <a:rPr lang="en-US" dirty="0">
+                <a:highlight>
+                  <a:srgbClr val="FFFF00"/>
+                </a:highlight>
+                <a:latin typeface="Courier" pitchFamily="2" charset="0"/>
+              </a:rPr>
+              <a:t>2: Expr2 ::= Op Unit Expr2</a:t>
+            </a:r>
+          </a:p>
+          <a:p>
+            <a:r>
+              <a:rPr lang="en-US" dirty="0">
+                <a:highlight>
+                  <a:srgbClr val="FFFF00"/>
+                </a:highlight>
+                <a:latin typeface="Courier" pitchFamily="2" charset="0"/>
+              </a:rPr>
+              <a:t>3:       | “”</a:t>
+            </a:r>
+            <a:br>
+              <a:rPr lang="en-US" dirty="0">
+                <a:latin typeface="Courier" pitchFamily="2" charset="0"/>
+              </a:rPr>
+            </a:br>
+            <a:r>
+              <a:rPr lang="en-US" dirty="0">
+                <a:latin typeface="Courier" pitchFamily="2" charset="0"/>
+              </a:rPr>
+              <a:t>4: Unit  ::= ‘(‘ Expr ‘)’</a:t>
+            </a:r>
+          </a:p>
+          <a:p>
+            <a:r>
+              <a:rPr lang="en-US" dirty="0">
+                <a:latin typeface="Courier" pitchFamily="2" charset="0"/>
+              </a:rPr>
+              <a:t>5:       |    ID</a:t>
+            </a:r>
+          </a:p>
+          <a:p>
+            <a:r>
+              <a:rPr lang="en-US" dirty="0">
+                <a:latin typeface="Courier" pitchFamily="2" charset="0"/>
+              </a:rPr>
+              <a:t>6: Op    ::= ‘+’</a:t>
+            </a:r>
+          </a:p>
+          <a:p>
+            <a:r>
+              <a:rPr lang="en-US" dirty="0">
+                <a:latin typeface="Courier" pitchFamily="2" charset="0"/>
+              </a:rPr>
+              <a:t>7:       |   ‘*’</a:t>
+            </a:r>
+          </a:p>
+        </p:txBody>
+      </p:sp>
+      <p:sp>
+        <p:nvSpPr>
+          <p:cNvPr id="8" name="TextBox 7">
+            <a:extLst>
+              <a:ext uri="{FF2B5EF4-FFF2-40B4-BE49-F238E27FC236}">
+                <a16:creationId xmlns:a16="http://schemas.microsoft.com/office/drawing/2014/main" id="{436689AF-BA26-3347-BA19-B7CDF8BA594D}"/>
+              </a:ext>
+            </a:extLst>
+          </p:cNvPr>
+          <p:cNvSpPr txBox="1"/>
+          <p:nvPr/>
+        </p:nvSpPr>
+        <p:spPr>
+          <a:xfrm>
+            <a:off x="6764866" y="1585480"/>
+            <a:ext cx="2828467" cy="369332"/>
+          </a:xfrm>
+          <a:prstGeom prst="rect">
+            <a:avLst/>
+          </a:prstGeom>
+          <a:noFill/>
+        </p:spPr>
+        <p:txBody>
+          <a:bodyPr wrap="none" rtlCol="0">
+            <a:spAutoFit/>
+          </a:bodyPr>
+          <a:lstStyle/>
+          <a:p>
+            <a:r>
+              <a:rPr lang="en-US" i="1" dirty="0"/>
+              <a:t>How do we parse an Expr2? </a:t>
+            </a:r>
+          </a:p>
+        </p:txBody>
+      </p:sp>
+      <p:sp>
+        <p:nvSpPr>
+          <p:cNvPr id="5" name="Rectangle 4">
+            <a:extLst>
+              <a:ext uri="{FF2B5EF4-FFF2-40B4-BE49-F238E27FC236}">
+                <a16:creationId xmlns:a16="http://schemas.microsoft.com/office/drawing/2014/main" id="{8C35DCA6-16D2-F54F-A22A-3EFA1E6D8A47}"/>
+              </a:ext>
+            </a:extLst>
+          </p:cNvPr>
+          <p:cNvSpPr/>
+          <p:nvPr/>
+        </p:nvSpPr>
+        <p:spPr>
+          <a:xfrm>
+            <a:off x="838200" y="4184551"/>
+            <a:ext cx="2275544" cy="2308324"/>
+          </a:xfrm>
+          <a:prstGeom prst="rect">
+            <a:avLst/>
+          </a:prstGeom>
+        </p:spPr>
+        <p:txBody>
+          <a:bodyPr wrap="square">
+            <a:spAutoFit/>
+          </a:bodyPr>
+          <a:lstStyle/>
+          <a:p>
+            <a:r>
+              <a:rPr lang="en-US" dirty="0">
+                <a:latin typeface="Courier" pitchFamily="2" charset="0"/>
+              </a:rPr>
+              <a:t>First+ sets:</a:t>
+            </a:r>
+            <a:br>
+              <a:rPr lang="en-US" dirty="0">
+                <a:latin typeface="Courier" pitchFamily="2" charset="0"/>
+              </a:rPr>
+            </a:br>
+            <a:r>
+              <a:rPr lang="en-US" dirty="0">
+                <a:latin typeface="Courier" pitchFamily="2" charset="0"/>
+              </a:rPr>
+              <a:t>1: {‘(‘, ID}</a:t>
+            </a:r>
+          </a:p>
+          <a:p>
+            <a:r>
+              <a:rPr lang="en-US" dirty="0">
+                <a:latin typeface="Courier" pitchFamily="2" charset="0"/>
+              </a:rPr>
+              <a:t>2: {‘+’, ‘*’}</a:t>
+            </a:r>
+          </a:p>
+          <a:p>
+            <a:r>
+              <a:rPr lang="en-US" dirty="0">
+                <a:latin typeface="Courier" pitchFamily="2" charset="0"/>
+              </a:rPr>
+              <a:t>3: {None, ’)’}</a:t>
+            </a:r>
+            <a:br>
+              <a:rPr lang="en-US" dirty="0">
+                <a:latin typeface="Courier" pitchFamily="2" charset="0"/>
+              </a:rPr>
+            </a:br>
+            <a:r>
+              <a:rPr lang="en-US" dirty="0">
+                <a:latin typeface="Courier" pitchFamily="2" charset="0"/>
+              </a:rPr>
+              <a:t>4: {‘(‘}</a:t>
+            </a:r>
+          </a:p>
+          <a:p>
+            <a:r>
+              <a:rPr lang="en-US" dirty="0">
+                <a:latin typeface="Courier" pitchFamily="2" charset="0"/>
+              </a:rPr>
+              <a:t>5: {ID}</a:t>
+            </a:r>
+          </a:p>
+          <a:p>
+            <a:r>
+              <a:rPr lang="en-US" dirty="0">
+                <a:latin typeface="Courier" pitchFamily="2" charset="0"/>
+              </a:rPr>
+              <a:t>6: {‘+’}</a:t>
+            </a:r>
+          </a:p>
+          <a:p>
+            <a:r>
+              <a:rPr lang="en-US" dirty="0">
+                <a:latin typeface="Courier" pitchFamily="2" charset="0"/>
+              </a:rPr>
+              <a:t>7: {‘*’}</a:t>
+            </a:r>
+          </a:p>
+        </p:txBody>
+      </p:sp>
+      <p:sp>
+        <p:nvSpPr>
+          <p:cNvPr id="3" name="Rectangle 2">
+            <a:extLst>
+              <a:ext uri="{FF2B5EF4-FFF2-40B4-BE49-F238E27FC236}">
+                <a16:creationId xmlns:a16="http://schemas.microsoft.com/office/drawing/2014/main" id="{818E83A0-ADF9-E849-B701-B2AE97232197}"/>
+              </a:ext>
+            </a:extLst>
+          </p:cNvPr>
+          <p:cNvSpPr/>
+          <p:nvPr/>
+        </p:nvSpPr>
+        <p:spPr>
+          <a:xfrm>
+            <a:off x="4486837" y="2316531"/>
+            <a:ext cx="6064622" cy="3970318"/>
+          </a:xfrm>
+          <a:prstGeom prst="rect">
+            <a:avLst/>
+          </a:prstGeom>
+        </p:spPr>
+        <p:txBody>
+          <a:bodyPr wrap="square">
+            <a:spAutoFit/>
+          </a:bodyPr>
+          <a:lstStyle/>
+          <a:p>
+            <a:r>
+              <a:rPr lang="en-US" sz="1400" dirty="0">
+                <a:solidFill>
+                  <a:srgbClr val="000000"/>
+                </a:solidFill>
+                <a:latin typeface="Menlo" panose="020B0609030804020204" pitchFamily="49" charset="0"/>
+              </a:rPr>
+              <a:t>    </a:t>
+            </a:r>
+            <a:r>
+              <a:rPr lang="en-US" sz="1400" b="1" dirty="0">
+                <a:solidFill>
+                  <a:srgbClr val="2EAEBB"/>
+                </a:solidFill>
+                <a:latin typeface="Menlo" panose="020B0609030804020204" pitchFamily="49" charset="0"/>
+              </a:rPr>
+              <a:t>def</a:t>
+            </a:r>
+            <a:r>
+              <a:rPr lang="en-US" sz="1400" dirty="0">
+                <a:solidFill>
+                  <a:srgbClr val="000000"/>
+                </a:solidFill>
+                <a:latin typeface="Menlo" panose="020B0609030804020204" pitchFamily="49" charset="0"/>
+              </a:rPr>
+              <a:t> </a:t>
+            </a:r>
+            <a:r>
+              <a:rPr lang="en-US" sz="1400" b="1" dirty="0">
+                <a:solidFill>
+                  <a:srgbClr val="400BD9"/>
+                </a:solidFill>
+                <a:latin typeface="Menlo" panose="020B0609030804020204" pitchFamily="49" charset="0"/>
+              </a:rPr>
+              <a:t>parse_Expr2</a:t>
+            </a:r>
+            <a:r>
+              <a:rPr lang="en-US" sz="1400" dirty="0">
+                <a:solidFill>
+                  <a:srgbClr val="000000"/>
+                </a:solidFill>
+                <a:latin typeface="Menlo" panose="020B0609030804020204" pitchFamily="49" charset="0"/>
+              </a:rPr>
+              <a:t>(</a:t>
+            </a:r>
+            <a:r>
+              <a:rPr lang="en-US" sz="1400" b="1" dirty="0">
+                <a:solidFill>
+                  <a:srgbClr val="2EAEBB"/>
+                </a:solidFill>
+                <a:latin typeface="Menlo" panose="020B0609030804020204" pitchFamily="49" charset="0"/>
+              </a:rPr>
+              <a:t>self</a:t>
+            </a:r>
+            <a:r>
+              <a:rPr lang="en-US" sz="1400" dirty="0">
+                <a:solidFill>
+                  <a:srgbClr val="000000"/>
+                </a:solidFill>
+                <a:latin typeface="Menlo" panose="020B0609030804020204" pitchFamily="49" charset="0"/>
+              </a:rPr>
+              <a:t>):</a:t>
+            </a:r>
+            <a:br>
+              <a:rPr lang="en-US" sz="1400" dirty="0">
+                <a:solidFill>
+                  <a:srgbClr val="000000"/>
+                </a:solidFill>
+                <a:latin typeface="Menlo" panose="020B0609030804020204" pitchFamily="49" charset="0"/>
+              </a:rPr>
+            </a:br>
+            <a:endParaRPr lang="en-US" sz="1400" dirty="0">
+              <a:solidFill>
+                <a:srgbClr val="000000"/>
+              </a:solidFill>
+              <a:latin typeface="Menlo" panose="020B0609030804020204" pitchFamily="49" charset="0"/>
+            </a:endParaRPr>
+          </a:p>
+          <a:p>
+            <a:r>
+              <a:rPr lang="en-US" sz="1400" dirty="0">
+                <a:solidFill>
+                  <a:srgbClr val="000000"/>
+                </a:solidFill>
+                <a:latin typeface="Menlo" panose="020B0609030804020204" pitchFamily="49" charset="0"/>
+              </a:rPr>
+              <a:t>        </a:t>
+            </a:r>
+            <a:r>
+              <a:rPr lang="en-US" sz="1400" dirty="0" err="1">
+                <a:solidFill>
+                  <a:srgbClr val="9FA01C"/>
+                </a:solidFill>
+                <a:latin typeface="Menlo" panose="020B0609030804020204" pitchFamily="49" charset="0"/>
+              </a:rPr>
+              <a:t>token_id</a:t>
+            </a:r>
+            <a:r>
+              <a:rPr lang="en-US" sz="1400" dirty="0">
+                <a:solidFill>
+                  <a:srgbClr val="000000"/>
+                </a:solidFill>
+                <a:latin typeface="Menlo" panose="020B0609030804020204" pitchFamily="49" charset="0"/>
+              </a:rPr>
+              <a:t> = </a:t>
+            </a:r>
+            <a:r>
+              <a:rPr lang="en-US" sz="1400" dirty="0" err="1">
+                <a:solidFill>
+                  <a:srgbClr val="000000"/>
+                </a:solidFill>
+                <a:latin typeface="Menlo" panose="020B0609030804020204" pitchFamily="49" charset="0"/>
+              </a:rPr>
+              <a:t>get_token_id</a:t>
+            </a:r>
+            <a:r>
+              <a:rPr lang="en-US" sz="1400" dirty="0">
+                <a:solidFill>
+                  <a:srgbClr val="000000"/>
+                </a:solidFill>
+                <a:latin typeface="Menlo" panose="020B0609030804020204" pitchFamily="49" charset="0"/>
+              </a:rPr>
+              <a:t>(</a:t>
+            </a:r>
+            <a:r>
+              <a:rPr lang="en-US" sz="1400" b="1" dirty="0" err="1">
+                <a:solidFill>
+                  <a:srgbClr val="2EAEBB"/>
+                </a:solidFill>
+                <a:latin typeface="Menlo" panose="020B0609030804020204" pitchFamily="49" charset="0"/>
+              </a:rPr>
+              <a:t>self</a:t>
+            </a:r>
+            <a:r>
+              <a:rPr lang="en-US" sz="1400" dirty="0" err="1">
+                <a:solidFill>
+                  <a:srgbClr val="000000"/>
+                </a:solidFill>
+                <a:latin typeface="Menlo" panose="020B0609030804020204" pitchFamily="49" charset="0"/>
+              </a:rPr>
+              <a:t>.to_match</a:t>
+            </a:r>
+            <a:r>
+              <a:rPr lang="en-US" sz="1400" dirty="0">
+                <a:solidFill>
+                  <a:srgbClr val="000000"/>
+                </a:solidFill>
+                <a:latin typeface="Menlo" panose="020B0609030804020204" pitchFamily="49" charset="0"/>
+              </a:rPr>
+              <a:t>)</a:t>
+            </a:r>
+          </a:p>
+          <a:p>
+            <a:endParaRPr lang="en-US" sz="1400" dirty="0">
+              <a:solidFill>
+                <a:srgbClr val="000000"/>
+              </a:solidFill>
+              <a:latin typeface="Menlo" panose="020B0609030804020204" pitchFamily="49" charset="0"/>
+            </a:endParaRPr>
+          </a:p>
+          <a:p>
+            <a:r>
+              <a:rPr lang="en-US" sz="1400" dirty="0">
+                <a:solidFill>
+                  <a:srgbClr val="000000"/>
+                </a:solidFill>
+                <a:latin typeface="Menlo" panose="020B0609030804020204" pitchFamily="49" charset="0"/>
+              </a:rPr>
+              <a:t>        </a:t>
+            </a:r>
+            <a:r>
+              <a:rPr lang="en-US" sz="1400" dirty="0">
+                <a:solidFill>
+                  <a:srgbClr val="B42419"/>
+                </a:solidFill>
+                <a:latin typeface="Menlo" panose="020B0609030804020204" pitchFamily="49" charset="0"/>
+              </a:rPr>
+              <a:t># Expr2 ::= Op Unit Expr2</a:t>
+            </a:r>
+            <a:endParaRPr lang="en-US" sz="1400" dirty="0">
+              <a:solidFill>
+                <a:srgbClr val="000000"/>
+              </a:solidFill>
+              <a:latin typeface="Menlo" panose="020B0609030804020204" pitchFamily="49" charset="0"/>
+            </a:endParaRPr>
+          </a:p>
+          <a:p>
+            <a:r>
+              <a:rPr lang="en-US" sz="1400" dirty="0">
+                <a:solidFill>
+                  <a:srgbClr val="000000"/>
+                </a:solidFill>
+                <a:latin typeface="Menlo" panose="020B0609030804020204" pitchFamily="49" charset="0"/>
+              </a:rPr>
+              <a:t>        </a:t>
+            </a:r>
+            <a:r>
+              <a:rPr lang="en-US" sz="1400" b="1" dirty="0">
+                <a:solidFill>
+                  <a:srgbClr val="2EAEBB"/>
+                </a:solidFill>
+                <a:latin typeface="Menlo" panose="020B0609030804020204" pitchFamily="49" charset="0"/>
+              </a:rPr>
+              <a:t>if</a:t>
+            </a:r>
+            <a:r>
+              <a:rPr lang="en-US" sz="1400" dirty="0">
+                <a:solidFill>
+                  <a:srgbClr val="000000"/>
+                </a:solidFill>
+                <a:latin typeface="Menlo" panose="020B0609030804020204" pitchFamily="49" charset="0"/>
+              </a:rPr>
+              <a:t> </a:t>
+            </a:r>
+            <a:r>
+              <a:rPr lang="en-US" sz="1400" dirty="0" err="1">
+                <a:solidFill>
+                  <a:srgbClr val="000000"/>
+                </a:solidFill>
+                <a:latin typeface="Menlo" panose="020B0609030804020204" pitchFamily="49" charset="0"/>
+              </a:rPr>
+              <a:t>token_id</a:t>
+            </a:r>
+            <a:r>
+              <a:rPr lang="en-US" sz="1400" dirty="0">
+                <a:solidFill>
+                  <a:srgbClr val="000000"/>
+                </a:solidFill>
+                <a:latin typeface="Menlo" panose="020B0609030804020204" pitchFamily="49" charset="0"/>
+              </a:rPr>
+              <a:t> </a:t>
+            </a:r>
+            <a:r>
+              <a:rPr lang="en-US" sz="1400" b="1" dirty="0">
+                <a:solidFill>
+                  <a:srgbClr val="2EAEBB"/>
+                </a:solidFill>
+                <a:latin typeface="Menlo" panose="020B0609030804020204" pitchFamily="49" charset="0"/>
+              </a:rPr>
+              <a:t>in</a:t>
+            </a:r>
+            <a:r>
+              <a:rPr lang="en-US" sz="1400" dirty="0">
+                <a:solidFill>
+                  <a:srgbClr val="000000"/>
+                </a:solidFill>
+                <a:latin typeface="Menlo" panose="020B0609030804020204" pitchFamily="49" charset="0"/>
+              </a:rPr>
+              <a:t> [</a:t>
+            </a:r>
+            <a:r>
+              <a:rPr lang="en-US" sz="1400" dirty="0">
+                <a:solidFill>
+                  <a:srgbClr val="2FB41D"/>
+                </a:solidFill>
+                <a:latin typeface="Menlo" panose="020B0609030804020204" pitchFamily="49" charset="0"/>
+              </a:rPr>
+              <a:t>"PLUS"</a:t>
+            </a:r>
+            <a:r>
+              <a:rPr lang="en-US" sz="1400" dirty="0">
+                <a:solidFill>
+                  <a:srgbClr val="000000"/>
+                </a:solidFill>
+                <a:latin typeface="Menlo" panose="020B0609030804020204" pitchFamily="49" charset="0"/>
+              </a:rPr>
+              <a:t>, </a:t>
+            </a:r>
+            <a:r>
+              <a:rPr lang="en-US" sz="1400" dirty="0">
+                <a:solidFill>
+                  <a:srgbClr val="2FB41D"/>
+                </a:solidFill>
+                <a:latin typeface="Menlo" panose="020B0609030804020204" pitchFamily="49" charset="0"/>
+              </a:rPr>
+              <a:t>"MULT"</a:t>
+            </a:r>
+            <a:r>
+              <a:rPr lang="en-US" sz="1400" dirty="0">
+                <a:solidFill>
+                  <a:srgbClr val="000000"/>
+                </a:solidFill>
+                <a:latin typeface="Menlo" panose="020B0609030804020204" pitchFamily="49" charset="0"/>
+              </a:rPr>
+              <a:t>]:</a:t>
+            </a:r>
+          </a:p>
+          <a:p>
+            <a:r>
+              <a:rPr lang="en-US" sz="1400" dirty="0">
+                <a:solidFill>
+                  <a:srgbClr val="000000"/>
+                </a:solidFill>
+                <a:latin typeface="Menlo" panose="020B0609030804020204" pitchFamily="49" charset="0"/>
+              </a:rPr>
+              <a:t>            </a:t>
+            </a:r>
+            <a:r>
+              <a:rPr lang="en-US" sz="1400" b="1" dirty="0" err="1">
+                <a:solidFill>
+                  <a:srgbClr val="2EAEBB"/>
+                </a:solidFill>
+                <a:latin typeface="Menlo" panose="020B0609030804020204" pitchFamily="49" charset="0"/>
+              </a:rPr>
+              <a:t>self</a:t>
+            </a:r>
+            <a:r>
+              <a:rPr lang="en-US" sz="1400" dirty="0" err="1">
+                <a:solidFill>
+                  <a:srgbClr val="000000"/>
+                </a:solidFill>
+                <a:latin typeface="Menlo" panose="020B0609030804020204" pitchFamily="49" charset="0"/>
+              </a:rPr>
+              <a:t>.parse_Op</a:t>
+            </a:r>
+            <a:r>
+              <a:rPr lang="en-US" sz="1400" dirty="0">
+                <a:solidFill>
+                  <a:srgbClr val="000000"/>
+                </a:solidFill>
+                <a:latin typeface="Menlo" panose="020B0609030804020204" pitchFamily="49" charset="0"/>
+              </a:rPr>
+              <a:t>()</a:t>
+            </a:r>
+          </a:p>
+          <a:p>
+            <a:r>
+              <a:rPr lang="en-US" sz="1400" dirty="0">
+                <a:solidFill>
+                  <a:srgbClr val="000000"/>
+                </a:solidFill>
+                <a:latin typeface="Menlo" panose="020B0609030804020204" pitchFamily="49" charset="0"/>
+              </a:rPr>
+              <a:t>            </a:t>
+            </a:r>
+            <a:r>
+              <a:rPr lang="en-US" sz="1400" b="1" dirty="0" err="1">
+                <a:solidFill>
+                  <a:srgbClr val="2EAEBB"/>
+                </a:solidFill>
+                <a:latin typeface="Menlo" panose="020B0609030804020204" pitchFamily="49" charset="0"/>
+              </a:rPr>
+              <a:t>self</a:t>
+            </a:r>
+            <a:r>
+              <a:rPr lang="en-US" sz="1400" dirty="0" err="1">
+                <a:solidFill>
+                  <a:srgbClr val="000000"/>
+                </a:solidFill>
+                <a:latin typeface="Menlo" panose="020B0609030804020204" pitchFamily="49" charset="0"/>
+              </a:rPr>
+              <a:t>.parse_Unit</a:t>
+            </a:r>
+            <a:r>
+              <a:rPr lang="en-US" sz="1400" dirty="0">
+                <a:solidFill>
+                  <a:srgbClr val="000000"/>
+                </a:solidFill>
+                <a:latin typeface="Menlo" panose="020B0609030804020204" pitchFamily="49" charset="0"/>
+              </a:rPr>
+              <a:t>()</a:t>
+            </a:r>
+          </a:p>
+          <a:p>
+            <a:r>
+              <a:rPr lang="en-US" sz="1400" dirty="0">
+                <a:solidFill>
+                  <a:srgbClr val="000000"/>
+                </a:solidFill>
+                <a:latin typeface="Menlo" panose="020B0609030804020204" pitchFamily="49" charset="0"/>
+              </a:rPr>
+              <a:t>            </a:t>
+            </a:r>
+            <a:r>
+              <a:rPr lang="en-US" sz="1400" b="1" dirty="0">
+                <a:solidFill>
+                  <a:srgbClr val="2EAEBB"/>
+                </a:solidFill>
+                <a:latin typeface="Menlo" panose="020B0609030804020204" pitchFamily="49" charset="0"/>
+              </a:rPr>
+              <a:t>self</a:t>
+            </a:r>
+            <a:r>
+              <a:rPr lang="en-US" sz="1400" dirty="0">
+                <a:solidFill>
+                  <a:srgbClr val="000000"/>
+                </a:solidFill>
+                <a:latin typeface="Menlo" panose="020B0609030804020204" pitchFamily="49" charset="0"/>
+              </a:rPr>
+              <a:t>.parse_Expr2()</a:t>
+            </a:r>
+          </a:p>
+          <a:p>
+            <a:r>
+              <a:rPr lang="en-US" sz="1400" dirty="0">
+                <a:solidFill>
+                  <a:srgbClr val="000000"/>
+                </a:solidFill>
+                <a:latin typeface="Menlo" panose="020B0609030804020204" pitchFamily="49" charset="0"/>
+              </a:rPr>
+              <a:t>            </a:t>
+            </a:r>
+            <a:r>
+              <a:rPr lang="en-US" sz="1400" b="1" dirty="0">
+                <a:solidFill>
+                  <a:srgbClr val="2EAEBB"/>
+                </a:solidFill>
+                <a:latin typeface="Menlo" panose="020B0609030804020204" pitchFamily="49" charset="0"/>
+              </a:rPr>
+              <a:t>return</a:t>
+            </a:r>
+            <a:endParaRPr lang="en-US" sz="1400" dirty="0">
+              <a:solidFill>
+                <a:srgbClr val="000000"/>
+              </a:solidFill>
+              <a:latin typeface="Menlo" panose="020B0609030804020204" pitchFamily="49" charset="0"/>
+            </a:endParaRPr>
+          </a:p>
+          <a:p>
+            <a:endParaRPr lang="en-US" sz="1400" dirty="0">
+              <a:solidFill>
+                <a:srgbClr val="000000"/>
+              </a:solidFill>
+              <a:latin typeface="Menlo" panose="020B0609030804020204" pitchFamily="49" charset="0"/>
+            </a:endParaRPr>
+          </a:p>
+          <a:p>
+            <a:r>
+              <a:rPr lang="en-US" sz="1400" dirty="0">
+                <a:solidFill>
+                  <a:srgbClr val="000000"/>
+                </a:solidFill>
+                <a:latin typeface="Menlo" panose="020B0609030804020204" pitchFamily="49" charset="0"/>
+              </a:rPr>
+              <a:t>        </a:t>
+            </a:r>
+            <a:r>
+              <a:rPr lang="en-US" sz="1400" dirty="0">
+                <a:solidFill>
+                  <a:srgbClr val="B42419"/>
+                </a:solidFill>
+                <a:latin typeface="Menlo" panose="020B0609030804020204" pitchFamily="49" charset="0"/>
+              </a:rPr>
+              <a:t># Expr2 ::= "" </a:t>
+            </a:r>
+            <a:r>
+              <a:rPr lang="en-US" sz="1400" dirty="0">
+                <a:solidFill>
+                  <a:srgbClr val="000000"/>
+                </a:solidFill>
+                <a:latin typeface="Menlo" panose="020B0609030804020204" pitchFamily="49" charset="0"/>
+              </a:rPr>
+              <a:t>   </a:t>
+            </a:r>
+          </a:p>
+          <a:p>
+            <a:r>
+              <a:rPr lang="en-US" sz="1400" dirty="0">
+                <a:solidFill>
+                  <a:srgbClr val="000000"/>
+                </a:solidFill>
+                <a:latin typeface="Menlo" panose="020B0609030804020204" pitchFamily="49" charset="0"/>
+              </a:rPr>
+              <a:t>        </a:t>
+            </a:r>
+            <a:r>
+              <a:rPr lang="en-US" sz="1400" b="1" dirty="0">
+                <a:solidFill>
+                  <a:srgbClr val="2EAEBB"/>
+                </a:solidFill>
+                <a:latin typeface="Menlo" panose="020B0609030804020204" pitchFamily="49" charset="0"/>
+              </a:rPr>
+              <a:t>if</a:t>
+            </a:r>
+            <a:r>
+              <a:rPr lang="en-US" sz="1400" dirty="0">
+                <a:solidFill>
+                  <a:srgbClr val="000000"/>
+                </a:solidFill>
+                <a:latin typeface="Menlo" panose="020B0609030804020204" pitchFamily="49" charset="0"/>
+              </a:rPr>
+              <a:t> </a:t>
+            </a:r>
+            <a:r>
+              <a:rPr lang="en-US" sz="1400" dirty="0" err="1">
+                <a:solidFill>
+                  <a:srgbClr val="000000"/>
+                </a:solidFill>
+                <a:latin typeface="Menlo" panose="020B0609030804020204" pitchFamily="49" charset="0"/>
+              </a:rPr>
+              <a:t>token_id</a:t>
+            </a:r>
+            <a:r>
+              <a:rPr lang="en-US" sz="1400" dirty="0">
+                <a:solidFill>
+                  <a:srgbClr val="000000"/>
+                </a:solidFill>
+                <a:latin typeface="Menlo" panose="020B0609030804020204" pitchFamily="49" charset="0"/>
+              </a:rPr>
+              <a:t> </a:t>
+            </a:r>
+            <a:r>
+              <a:rPr lang="en-US" sz="1400" b="1" dirty="0">
+                <a:solidFill>
+                  <a:srgbClr val="2EAEBB"/>
+                </a:solidFill>
+                <a:latin typeface="Menlo" panose="020B0609030804020204" pitchFamily="49" charset="0"/>
+              </a:rPr>
+              <a:t>in</a:t>
+            </a:r>
+            <a:r>
+              <a:rPr lang="en-US" sz="1400" dirty="0">
+                <a:solidFill>
+                  <a:srgbClr val="000000"/>
+                </a:solidFill>
+                <a:latin typeface="Menlo" panose="020B0609030804020204" pitchFamily="49" charset="0"/>
+              </a:rPr>
+              <a:t> [</a:t>
+            </a:r>
+            <a:r>
+              <a:rPr lang="en-US" sz="1400" dirty="0">
+                <a:solidFill>
+                  <a:srgbClr val="C814C9"/>
+                </a:solidFill>
+                <a:latin typeface="Menlo" panose="020B0609030804020204" pitchFamily="49" charset="0"/>
+              </a:rPr>
+              <a:t>None</a:t>
+            </a:r>
+            <a:r>
+              <a:rPr lang="en-US" sz="1400" dirty="0">
+                <a:solidFill>
+                  <a:srgbClr val="000000"/>
+                </a:solidFill>
+                <a:latin typeface="Menlo" panose="020B0609030804020204" pitchFamily="49" charset="0"/>
+              </a:rPr>
+              <a:t>, </a:t>
+            </a:r>
+            <a:r>
+              <a:rPr lang="en-US" sz="1400" dirty="0">
+                <a:solidFill>
+                  <a:srgbClr val="2FB41D"/>
+                </a:solidFill>
+                <a:latin typeface="Menlo" panose="020B0609030804020204" pitchFamily="49" charset="0"/>
+              </a:rPr>
+              <a:t>”RPAR"</a:t>
+            </a:r>
+            <a:r>
+              <a:rPr lang="en-US" sz="1400" dirty="0">
+                <a:solidFill>
+                  <a:srgbClr val="000000"/>
+                </a:solidFill>
+                <a:latin typeface="Menlo" panose="020B0609030804020204" pitchFamily="49" charset="0"/>
+              </a:rPr>
+              <a:t>]:</a:t>
+            </a:r>
+          </a:p>
+          <a:p>
+            <a:r>
+              <a:rPr lang="en-US" sz="1400" dirty="0">
+                <a:solidFill>
+                  <a:srgbClr val="000000"/>
+                </a:solidFill>
+                <a:latin typeface="Menlo" panose="020B0609030804020204" pitchFamily="49" charset="0"/>
+              </a:rPr>
+              <a:t>            </a:t>
+            </a:r>
+            <a:r>
+              <a:rPr lang="en-US" sz="1400" b="1" dirty="0">
+                <a:solidFill>
+                  <a:srgbClr val="2EAEBB"/>
+                </a:solidFill>
+                <a:latin typeface="Menlo" panose="020B0609030804020204" pitchFamily="49" charset="0"/>
+              </a:rPr>
+              <a:t>return</a:t>
+            </a:r>
+          </a:p>
+          <a:p>
+            <a:r>
+              <a:rPr lang="en-US" sz="1400" dirty="0">
+                <a:solidFill>
+                  <a:srgbClr val="000000"/>
+                </a:solidFill>
+                <a:latin typeface="Menlo" panose="020B0609030804020204" pitchFamily="49" charset="0"/>
+              </a:rPr>
+              <a:t>        else:</a:t>
+            </a:r>
+          </a:p>
+          <a:p>
+            <a:r>
+              <a:rPr lang="en-US" sz="1400" dirty="0">
+                <a:solidFill>
+                  <a:srgbClr val="000000"/>
+                </a:solidFill>
+                <a:latin typeface="Menlo" panose="020B0609030804020204" pitchFamily="49" charset="0"/>
+              </a:rPr>
+              <a:t>             </a:t>
+            </a:r>
+            <a:r>
+              <a:rPr lang="en-US" sz="1400" b="1" dirty="0">
+                <a:solidFill>
+                  <a:srgbClr val="2EAEBB"/>
+                </a:solidFill>
+                <a:latin typeface="Menlo" panose="020B0609030804020204" pitchFamily="49" charset="0"/>
+              </a:rPr>
+              <a:t>raise</a:t>
+            </a:r>
+            <a:r>
+              <a:rPr lang="en-US" sz="1400" dirty="0">
+                <a:solidFill>
+                  <a:srgbClr val="000000"/>
+                </a:solidFill>
+                <a:latin typeface="Menlo" panose="020B0609030804020204" pitchFamily="49" charset="0"/>
+              </a:rPr>
+              <a:t> </a:t>
+            </a:r>
+            <a:r>
+              <a:rPr lang="en-US" sz="1400" dirty="0" err="1">
+                <a:solidFill>
+                  <a:srgbClr val="000000"/>
+                </a:solidFill>
+                <a:latin typeface="Menlo" panose="020B0609030804020204" pitchFamily="49" charset="0"/>
+              </a:rPr>
+              <a:t>ParserException</a:t>
+            </a:r>
+            <a:r>
+              <a:rPr lang="en-US" sz="1400" dirty="0">
+                <a:solidFill>
+                  <a:srgbClr val="000000"/>
+                </a:solidFill>
+                <a:latin typeface="Menlo" panose="020B0609030804020204" pitchFamily="49" charset="0"/>
+              </a:rPr>
+              <a:t>(</a:t>
+            </a:r>
+            <a:r>
+              <a:rPr lang="en-US" sz="1400" dirty="0" err="1">
+                <a:solidFill>
+                  <a:srgbClr val="000000"/>
+                </a:solidFill>
+                <a:latin typeface="Menlo" panose="020B0609030804020204" pitchFamily="49" charset="0"/>
+              </a:rPr>
+              <a:t>self.linennumber</a:t>
+            </a:r>
+            <a:r>
+              <a:rPr lang="en-US" sz="1400" dirty="0">
+                <a:solidFill>
+                  <a:srgbClr val="000000"/>
+                </a:solidFill>
+                <a:latin typeface="Menlo" panose="020B0609030804020204" pitchFamily="49" charset="0"/>
+              </a:rPr>
+              <a:t>    </a:t>
+            </a:r>
+            <a:r>
+              <a:rPr lang="en-US" sz="1400" dirty="0">
+                <a:solidFill>
+                  <a:srgbClr val="B42419"/>
+                </a:solidFill>
+                <a:latin typeface="Menlo" panose="020B0609030804020204" pitchFamily="49" charset="0"/>
+              </a:rPr>
+              <a:t># line number (for you to do)</a:t>
+            </a:r>
+            <a:endParaRPr lang="en-US" sz="1400" dirty="0">
+              <a:solidFill>
+                <a:srgbClr val="000000"/>
+              </a:solidFill>
+              <a:latin typeface="Menlo" panose="020B0609030804020204" pitchFamily="49" charset="0"/>
+            </a:endParaRPr>
+          </a:p>
+          <a:p>
+            <a:r>
+              <a:rPr lang="en-US" sz="1400" dirty="0">
+                <a:solidFill>
+                  <a:srgbClr val="000000"/>
+                </a:solidFill>
+                <a:latin typeface="Menlo" panose="020B0609030804020204" pitchFamily="49" charset="0"/>
+              </a:rPr>
+              <a:t>                              </a:t>
+            </a:r>
+            <a:r>
+              <a:rPr lang="en-US" sz="1400" b="1" dirty="0" err="1">
+                <a:solidFill>
+                  <a:srgbClr val="2EAEBB"/>
+                </a:solidFill>
+                <a:latin typeface="Menlo" panose="020B0609030804020204" pitchFamily="49" charset="0"/>
+              </a:rPr>
+              <a:t>self</a:t>
+            </a:r>
+            <a:r>
+              <a:rPr lang="en-US" sz="1400" dirty="0" err="1">
+                <a:solidFill>
+                  <a:srgbClr val="000000"/>
+                </a:solidFill>
+                <a:latin typeface="Menlo" panose="020B0609030804020204" pitchFamily="49" charset="0"/>
+              </a:rPr>
+              <a:t>.to_match</a:t>
+            </a:r>
+            <a:r>
+              <a:rPr lang="en-US" sz="1400" dirty="0">
+                <a:solidFill>
+                  <a:srgbClr val="000000"/>
+                </a:solidFill>
+                <a:latin typeface="Menlo" panose="020B0609030804020204" pitchFamily="49" charset="0"/>
+              </a:rPr>
+              <a:t>,              	       </a:t>
+            </a:r>
+            <a:r>
+              <a:rPr lang="en-US" sz="1400" dirty="0">
+                <a:solidFill>
+                  <a:srgbClr val="B42419"/>
+                </a:solidFill>
+                <a:latin typeface="Menlo" panose="020B0609030804020204" pitchFamily="49" charset="0"/>
+              </a:rPr>
+              <a:t># observed token</a:t>
+            </a:r>
+          </a:p>
+          <a:p>
+            <a:r>
+              <a:rPr lang="en-US" sz="1400" dirty="0">
+                <a:solidFill>
+                  <a:srgbClr val="000000"/>
+                </a:solidFill>
+                <a:latin typeface="Menlo" panose="020B0609030804020204" pitchFamily="49" charset="0"/>
+              </a:rPr>
+              <a:t>                              [</a:t>
+            </a:r>
+            <a:r>
+              <a:rPr lang="en-US" sz="1400" dirty="0">
+                <a:solidFill>
+                  <a:srgbClr val="2FB41D"/>
+                </a:solidFill>
+                <a:latin typeface="Menlo" panose="020B0609030804020204" pitchFamily="49" charset="0"/>
+              </a:rPr>
+              <a:t>"PLUS"</a:t>
+            </a:r>
+            <a:r>
+              <a:rPr lang="en-US" sz="1400" dirty="0">
+                <a:solidFill>
+                  <a:srgbClr val="000000"/>
+                </a:solidFill>
+                <a:latin typeface="Menlo" panose="020B0609030804020204" pitchFamily="49" charset="0"/>
+              </a:rPr>
+              <a:t>, </a:t>
+            </a:r>
+            <a:r>
+              <a:rPr lang="en-US" sz="1400" dirty="0">
+                <a:solidFill>
+                  <a:srgbClr val="2FB41D"/>
+                </a:solidFill>
+                <a:latin typeface="Menlo" panose="020B0609030804020204" pitchFamily="49" charset="0"/>
+              </a:rPr>
+              <a:t>"MULT"</a:t>
+            </a:r>
+            <a:r>
+              <a:rPr lang="en-US" sz="1400" dirty="0">
+                <a:solidFill>
+                  <a:srgbClr val="000000"/>
+                </a:solidFill>
+                <a:latin typeface="Menlo" panose="020B0609030804020204" pitchFamily="49" charset="0"/>
+              </a:rPr>
+              <a:t>, </a:t>
+            </a:r>
+            <a:r>
+              <a:rPr lang="en-US" sz="1400" dirty="0">
+                <a:solidFill>
+                  <a:srgbClr val="2FB41D"/>
+                </a:solidFill>
+                <a:latin typeface="Menlo" panose="020B0609030804020204" pitchFamily="49" charset="0"/>
+              </a:rPr>
+              <a:t>”RPAR"</a:t>
+            </a:r>
+            <a:r>
+              <a:rPr lang="en-US" sz="1400" dirty="0">
+                <a:solidFill>
+                  <a:srgbClr val="000000"/>
+                </a:solidFill>
+                <a:latin typeface="Menlo" panose="020B0609030804020204" pitchFamily="49" charset="0"/>
+              </a:rPr>
+              <a:t>])         </a:t>
+            </a:r>
+            <a:r>
+              <a:rPr lang="en-US" sz="1400" dirty="0">
+                <a:solidFill>
+                  <a:srgbClr val="B42419"/>
+                </a:solidFill>
+                <a:latin typeface="Menlo" panose="020B0609030804020204" pitchFamily="49" charset="0"/>
+              </a:rPr>
+              <a:t># expected token </a:t>
+            </a:r>
+            <a:endParaRPr lang="en-US" sz="1400" dirty="0">
+              <a:solidFill>
+                <a:srgbClr val="000000"/>
+              </a:solidFill>
+              <a:effectLst/>
+              <a:latin typeface="Menlo" panose="020B0609030804020204" pitchFamily="49" charset="0"/>
+            </a:endParaRPr>
+          </a:p>
+        </p:txBody>
+      </p:sp>
+    </p:spTree>
+    <p:extLst>
+      <p:ext uri="{BB962C8B-B14F-4D97-AF65-F5344CB8AC3E}">
+        <p14:creationId xmlns:p14="http://schemas.microsoft.com/office/powerpoint/2010/main" val="953954236"/>
+      </p:ext>
+    </p:extLst>
+  </p:cSld>
+  <p:clrMapOvr>
+    <a:masterClrMapping/>
+  </p:clrMapOvr>
+</p:sld>
+</file>
+
+<file path=ppt/slides/slide74.xml><?xml version="1.0" encoding="utf-8"?>
+<p:sld xmlns:a="http://schemas.openxmlformats.org/drawingml/2006/main" xmlns:r="http://schemas.openxmlformats.org/officeDocument/2006/relationships" xmlns:p="http://schemas.openxmlformats.org/presentationml/2006/main">
+  <p:cSld>
+    <p:spTree>
+      <p:nvGrpSpPr>
+        <p:cNvPr id="1" name=""/>
+        <p:cNvGrpSpPr/>
+        <p:nvPr/>
+      </p:nvGrpSpPr>
+      <p:grpSpPr>
+        <a:xfrm>
+          <a:off x="0" y="0"/>
+          <a:ext cx="0" cy="0"/>
+          <a:chOff x="0" y="0"/>
+          <a:chExt cx="0" cy="0"/>
+        </a:xfrm>
+      </p:grpSpPr>
+      <p:sp>
+        <p:nvSpPr>
+          <p:cNvPr id="2" name="Title 1">
+            <a:extLst>
+              <a:ext uri="{FF2B5EF4-FFF2-40B4-BE49-F238E27FC236}">
+                <a16:creationId xmlns:a16="http://schemas.microsoft.com/office/drawing/2014/main" id="{8E411F96-7461-874D-8EA3-B6DFAA688889}"/>
+              </a:ext>
+            </a:extLst>
+          </p:cNvPr>
+          <p:cNvSpPr>
+            <a:spLocks noGrp="1"/>
+          </p:cNvSpPr>
+          <p:nvPr>
+            <p:ph type="title"/>
+          </p:nvPr>
+        </p:nvSpPr>
+        <p:spPr/>
+        <p:txBody>
+          <a:bodyPr/>
+          <a:lstStyle/>
+          <a:p>
+            <a:r>
+              <a:rPr lang="en-US" dirty="0"/>
+              <a:t>Let’s look at the grammar</a:t>
+            </a:r>
+          </a:p>
+        </p:txBody>
+      </p:sp>
+      <p:sp>
+        <p:nvSpPr>
+          <p:cNvPr id="4" name="Rectangle 3">
+            <a:extLst>
+              <a:ext uri="{FF2B5EF4-FFF2-40B4-BE49-F238E27FC236}">
+                <a16:creationId xmlns:a16="http://schemas.microsoft.com/office/drawing/2014/main" id="{C95AD811-DA94-934C-A22D-0CC1576CD299}"/>
+              </a:ext>
+            </a:extLst>
+          </p:cNvPr>
+          <p:cNvSpPr/>
+          <p:nvPr/>
+        </p:nvSpPr>
+        <p:spPr>
+          <a:xfrm>
+            <a:off x="838200" y="1507736"/>
+            <a:ext cx="3911601" cy="2031325"/>
+          </a:xfrm>
+          <a:prstGeom prst="rect">
+            <a:avLst/>
+          </a:prstGeom>
+        </p:spPr>
+        <p:txBody>
+          <a:bodyPr wrap="square">
+            <a:spAutoFit/>
+          </a:bodyPr>
+          <a:lstStyle/>
+          <a:p>
+            <a:r>
+              <a:rPr lang="en-US" dirty="0">
+                <a:latin typeface="Courier" pitchFamily="2" charset="0"/>
+              </a:rPr>
+              <a:t>1: Expr  ::= Unit Expr2</a:t>
+            </a:r>
+          </a:p>
+          <a:p>
+            <a:r>
+              <a:rPr lang="en-US" dirty="0">
+                <a:latin typeface="Courier" pitchFamily="2" charset="0"/>
+              </a:rPr>
+              <a:t>2: Expr2 ::= Op Unit Expr2</a:t>
+            </a:r>
+          </a:p>
+          <a:p>
+            <a:r>
+              <a:rPr lang="en-US" dirty="0">
+                <a:latin typeface="Courier" pitchFamily="2" charset="0"/>
+              </a:rPr>
+              <a:t>3:       | “”</a:t>
+            </a:r>
+            <a:br>
+              <a:rPr lang="en-US" dirty="0">
+                <a:latin typeface="Courier" pitchFamily="2" charset="0"/>
+              </a:rPr>
+            </a:br>
+            <a:r>
+              <a:rPr lang="en-US" dirty="0">
+                <a:highlight>
+                  <a:srgbClr val="FFFF00"/>
+                </a:highlight>
+                <a:latin typeface="Courier" pitchFamily="2" charset="0"/>
+              </a:rPr>
+              <a:t>4: Unit  ::= ‘(‘ Expr ‘)’</a:t>
+            </a:r>
+          </a:p>
+          <a:p>
+            <a:r>
+              <a:rPr lang="en-US" dirty="0">
+                <a:highlight>
+                  <a:srgbClr val="FFFF00"/>
+                </a:highlight>
+                <a:latin typeface="Courier" pitchFamily="2" charset="0"/>
+              </a:rPr>
+              <a:t>5:       |    ID</a:t>
+            </a:r>
+          </a:p>
+          <a:p>
+            <a:r>
+              <a:rPr lang="en-US" dirty="0">
+                <a:latin typeface="Courier" pitchFamily="2" charset="0"/>
+              </a:rPr>
+              <a:t>6: Op    ::= ‘+’</a:t>
+            </a:r>
+          </a:p>
+          <a:p>
+            <a:r>
+              <a:rPr lang="en-US" dirty="0">
+                <a:latin typeface="Courier" pitchFamily="2" charset="0"/>
+              </a:rPr>
+              <a:t>7:       |   ‘*’</a:t>
+            </a:r>
+          </a:p>
+        </p:txBody>
+      </p:sp>
+      <p:sp>
+        <p:nvSpPr>
+          <p:cNvPr id="8" name="TextBox 7">
+            <a:extLst>
+              <a:ext uri="{FF2B5EF4-FFF2-40B4-BE49-F238E27FC236}">
+                <a16:creationId xmlns:a16="http://schemas.microsoft.com/office/drawing/2014/main" id="{436689AF-BA26-3347-BA19-B7CDF8BA594D}"/>
+              </a:ext>
+            </a:extLst>
+          </p:cNvPr>
+          <p:cNvSpPr txBox="1"/>
+          <p:nvPr/>
+        </p:nvSpPr>
+        <p:spPr>
+          <a:xfrm>
+            <a:off x="6764866" y="1585480"/>
+            <a:ext cx="2580002" cy="369332"/>
+          </a:xfrm>
+          <a:prstGeom prst="rect">
+            <a:avLst/>
+          </a:prstGeom>
+          <a:noFill/>
+        </p:spPr>
+        <p:txBody>
+          <a:bodyPr wrap="none" rtlCol="0">
+            <a:spAutoFit/>
+          </a:bodyPr>
+          <a:lstStyle/>
+          <a:p>
+            <a:r>
+              <a:rPr lang="en-US" i="1" dirty="0"/>
+              <a:t>How do we parse a Unit? </a:t>
+            </a:r>
+          </a:p>
+        </p:txBody>
+      </p:sp>
+      <p:sp>
+        <p:nvSpPr>
+          <p:cNvPr id="5" name="Rectangle 4">
+            <a:extLst>
+              <a:ext uri="{FF2B5EF4-FFF2-40B4-BE49-F238E27FC236}">
+                <a16:creationId xmlns:a16="http://schemas.microsoft.com/office/drawing/2014/main" id="{8C35DCA6-16D2-F54F-A22A-3EFA1E6D8A47}"/>
+              </a:ext>
+            </a:extLst>
+          </p:cNvPr>
+          <p:cNvSpPr/>
+          <p:nvPr/>
+        </p:nvSpPr>
+        <p:spPr>
+          <a:xfrm>
+            <a:off x="838200" y="4184551"/>
+            <a:ext cx="2275544" cy="2308324"/>
+          </a:xfrm>
+          <a:prstGeom prst="rect">
+            <a:avLst/>
+          </a:prstGeom>
+        </p:spPr>
+        <p:txBody>
+          <a:bodyPr wrap="square">
+            <a:spAutoFit/>
+          </a:bodyPr>
+          <a:lstStyle/>
+          <a:p>
+            <a:r>
+              <a:rPr lang="en-US" dirty="0">
+                <a:latin typeface="Courier" pitchFamily="2" charset="0"/>
+              </a:rPr>
+              <a:t>First+ sets:</a:t>
+            </a:r>
+            <a:br>
+              <a:rPr lang="en-US" dirty="0">
+                <a:latin typeface="Courier" pitchFamily="2" charset="0"/>
+              </a:rPr>
+            </a:br>
+            <a:r>
+              <a:rPr lang="en-US" dirty="0">
+                <a:latin typeface="Courier" pitchFamily="2" charset="0"/>
+              </a:rPr>
+              <a:t>1: {‘(‘, ID}</a:t>
+            </a:r>
+          </a:p>
+          <a:p>
+            <a:r>
+              <a:rPr lang="en-US" dirty="0">
+                <a:latin typeface="Courier" pitchFamily="2" charset="0"/>
+              </a:rPr>
+              <a:t>2: {‘+’, ‘*’}</a:t>
+            </a:r>
+          </a:p>
+          <a:p>
+            <a:r>
+              <a:rPr lang="en-US" dirty="0">
+                <a:latin typeface="Courier" pitchFamily="2" charset="0"/>
+              </a:rPr>
+              <a:t>3: {None, ’)’}</a:t>
+            </a:r>
+            <a:br>
+              <a:rPr lang="en-US" dirty="0">
+                <a:latin typeface="Courier" pitchFamily="2" charset="0"/>
+              </a:rPr>
+            </a:br>
+            <a:r>
+              <a:rPr lang="en-US" dirty="0">
+                <a:latin typeface="Courier" pitchFamily="2" charset="0"/>
+              </a:rPr>
+              <a:t>4: {‘(‘}</a:t>
+            </a:r>
+          </a:p>
+          <a:p>
+            <a:r>
+              <a:rPr lang="en-US" dirty="0">
+                <a:latin typeface="Courier" pitchFamily="2" charset="0"/>
+              </a:rPr>
+              <a:t>5: {ID}</a:t>
+            </a:r>
+          </a:p>
+          <a:p>
+            <a:r>
+              <a:rPr lang="en-US" dirty="0">
+                <a:latin typeface="Courier" pitchFamily="2" charset="0"/>
+              </a:rPr>
+              <a:t>6: {‘+’}</a:t>
+            </a:r>
+          </a:p>
+          <a:p>
+            <a:r>
+              <a:rPr lang="en-US" dirty="0">
+                <a:latin typeface="Courier" pitchFamily="2" charset="0"/>
+              </a:rPr>
+              <a:t>7: {‘*’}</a:t>
+            </a:r>
+          </a:p>
+        </p:txBody>
+      </p:sp>
+    </p:spTree>
+    <p:extLst>
+      <p:ext uri="{BB962C8B-B14F-4D97-AF65-F5344CB8AC3E}">
+        <p14:creationId xmlns:p14="http://schemas.microsoft.com/office/powerpoint/2010/main" val="2708247622"/>
+      </p:ext>
+    </p:extLst>
+  </p:cSld>
+  <p:clrMapOvr>
+    <a:masterClrMapping/>
+  </p:clrMapOvr>
+</p:sld>
+</file>
+
+<file path=ppt/slides/slide75.xml><?xml version="1.0" encoding="utf-8"?>
+<p:sld xmlns:a="http://schemas.openxmlformats.org/drawingml/2006/main" xmlns:r="http://schemas.openxmlformats.org/officeDocument/2006/relationships" xmlns:p="http://schemas.openxmlformats.org/presentationml/2006/main">
+  <p:cSld>
+    <p:spTree>
+      <p:nvGrpSpPr>
+        <p:cNvPr id="1" name=""/>
+        <p:cNvGrpSpPr/>
+        <p:nvPr/>
+      </p:nvGrpSpPr>
+      <p:grpSpPr>
+        <a:xfrm>
+          <a:off x="0" y="0"/>
+          <a:ext cx="0" cy="0"/>
+          <a:chOff x="0" y="0"/>
+          <a:chExt cx="0" cy="0"/>
+        </a:xfrm>
+      </p:grpSpPr>
+      <p:sp>
+        <p:nvSpPr>
+          <p:cNvPr id="2" name="Title 1">
+            <a:extLst>
+              <a:ext uri="{FF2B5EF4-FFF2-40B4-BE49-F238E27FC236}">
+                <a16:creationId xmlns:a16="http://schemas.microsoft.com/office/drawing/2014/main" id="{8E411F96-7461-874D-8EA3-B6DFAA688889}"/>
+              </a:ext>
+            </a:extLst>
+          </p:cNvPr>
+          <p:cNvSpPr>
+            <a:spLocks noGrp="1"/>
+          </p:cNvSpPr>
+          <p:nvPr>
+            <p:ph type="title"/>
+          </p:nvPr>
+        </p:nvSpPr>
+        <p:spPr/>
+        <p:txBody>
+          <a:bodyPr/>
+          <a:lstStyle/>
+          <a:p>
+            <a:r>
+              <a:rPr lang="en-US" dirty="0"/>
+              <a:t>Let’s look at the grammar</a:t>
+            </a:r>
+          </a:p>
+        </p:txBody>
+      </p:sp>
+      <p:sp>
+        <p:nvSpPr>
+          <p:cNvPr id="4" name="Rectangle 3">
+            <a:extLst>
+              <a:ext uri="{FF2B5EF4-FFF2-40B4-BE49-F238E27FC236}">
+                <a16:creationId xmlns:a16="http://schemas.microsoft.com/office/drawing/2014/main" id="{C95AD811-DA94-934C-A22D-0CC1576CD299}"/>
+              </a:ext>
+            </a:extLst>
+          </p:cNvPr>
+          <p:cNvSpPr/>
+          <p:nvPr/>
+        </p:nvSpPr>
+        <p:spPr>
+          <a:xfrm>
+            <a:off x="838200" y="1507736"/>
+            <a:ext cx="3911601" cy="2031325"/>
+          </a:xfrm>
+          <a:prstGeom prst="rect">
+            <a:avLst/>
+          </a:prstGeom>
+        </p:spPr>
+        <p:txBody>
+          <a:bodyPr wrap="square">
+            <a:spAutoFit/>
+          </a:bodyPr>
+          <a:lstStyle/>
+          <a:p>
+            <a:r>
+              <a:rPr lang="en-US" dirty="0">
+                <a:latin typeface="Courier" pitchFamily="2" charset="0"/>
+              </a:rPr>
+              <a:t>1: Expr  ::= Unit Expr2</a:t>
+            </a:r>
+          </a:p>
+          <a:p>
+            <a:r>
+              <a:rPr lang="en-US" dirty="0">
+                <a:latin typeface="Courier" pitchFamily="2" charset="0"/>
+              </a:rPr>
+              <a:t>2: Expr2 ::= Op Unit Expr2</a:t>
+            </a:r>
+          </a:p>
+          <a:p>
+            <a:r>
+              <a:rPr lang="en-US" dirty="0">
+                <a:latin typeface="Courier" pitchFamily="2" charset="0"/>
+              </a:rPr>
+              <a:t>3:       | “”</a:t>
+            </a:r>
+            <a:br>
+              <a:rPr lang="en-US" dirty="0">
+                <a:latin typeface="Courier" pitchFamily="2" charset="0"/>
+              </a:rPr>
+            </a:br>
+            <a:r>
+              <a:rPr lang="en-US" dirty="0">
+                <a:highlight>
+                  <a:srgbClr val="FFFF00"/>
+                </a:highlight>
+                <a:latin typeface="Courier" pitchFamily="2" charset="0"/>
+              </a:rPr>
+              <a:t>4: Unit  ::= ‘(‘ Expr ‘)’</a:t>
+            </a:r>
+          </a:p>
+          <a:p>
+            <a:r>
+              <a:rPr lang="en-US" dirty="0">
+                <a:highlight>
+                  <a:srgbClr val="FFFF00"/>
+                </a:highlight>
+                <a:latin typeface="Courier" pitchFamily="2" charset="0"/>
+              </a:rPr>
+              <a:t>5:       |    ID</a:t>
+            </a:r>
+          </a:p>
+          <a:p>
+            <a:r>
+              <a:rPr lang="en-US" dirty="0">
+                <a:latin typeface="Courier" pitchFamily="2" charset="0"/>
+              </a:rPr>
+              <a:t>6: Op    ::= ‘+’</a:t>
+            </a:r>
+          </a:p>
+          <a:p>
+            <a:r>
+              <a:rPr lang="en-US" dirty="0">
+                <a:latin typeface="Courier" pitchFamily="2" charset="0"/>
+              </a:rPr>
+              <a:t>7:       |   ‘*’</a:t>
+            </a:r>
+          </a:p>
+        </p:txBody>
+      </p:sp>
+      <p:sp>
+        <p:nvSpPr>
+          <p:cNvPr id="8" name="TextBox 7">
+            <a:extLst>
+              <a:ext uri="{FF2B5EF4-FFF2-40B4-BE49-F238E27FC236}">
+                <a16:creationId xmlns:a16="http://schemas.microsoft.com/office/drawing/2014/main" id="{436689AF-BA26-3347-BA19-B7CDF8BA594D}"/>
+              </a:ext>
+            </a:extLst>
+          </p:cNvPr>
+          <p:cNvSpPr txBox="1"/>
+          <p:nvPr/>
+        </p:nvSpPr>
+        <p:spPr>
+          <a:xfrm>
+            <a:off x="6764866" y="1585480"/>
+            <a:ext cx="2580002" cy="369332"/>
+          </a:xfrm>
+          <a:prstGeom prst="rect">
+            <a:avLst/>
+          </a:prstGeom>
+          <a:noFill/>
+        </p:spPr>
+        <p:txBody>
+          <a:bodyPr wrap="none" rtlCol="0">
+            <a:spAutoFit/>
+          </a:bodyPr>
+          <a:lstStyle/>
+          <a:p>
+            <a:r>
+              <a:rPr lang="en-US" i="1" dirty="0"/>
+              <a:t>How do we parse a Unit? </a:t>
+            </a:r>
+          </a:p>
+        </p:txBody>
+      </p:sp>
+      <p:sp>
+        <p:nvSpPr>
+          <p:cNvPr id="5" name="Rectangle 4">
+            <a:extLst>
+              <a:ext uri="{FF2B5EF4-FFF2-40B4-BE49-F238E27FC236}">
+                <a16:creationId xmlns:a16="http://schemas.microsoft.com/office/drawing/2014/main" id="{8C35DCA6-16D2-F54F-A22A-3EFA1E6D8A47}"/>
+              </a:ext>
+            </a:extLst>
+          </p:cNvPr>
+          <p:cNvSpPr/>
+          <p:nvPr/>
+        </p:nvSpPr>
+        <p:spPr>
+          <a:xfrm>
+            <a:off x="838200" y="4184551"/>
+            <a:ext cx="2275544" cy="2308324"/>
+          </a:xfrm>
+          <a:prstGeom prst="rect">
+            <a:avLst/>
+          </a:prstGeom>
+        </p:spPr>
+        <p:txBody>
+          <a:bodyPr wrap="square">
+            <a:spAutoFit/>
+          </a:bodyPr>
+          <a:lstStyle/>
+          <a:p>
+            <a:r>
+              <a:rPr lang="en-US" dirty="0">
+                <a:latin typeface="Courier" pitchFamily="2" charset="0"/>
+              </a:rPr>
+              <a:t>First+ sets:</a:t>
+            </a:r>
+            <a:br>
+              <a:rPr lang="en-US" dirty="0">
+                <a:latin typeface="Courier" pitchFamily="2" charset="0"/>
+              </a:rPr>
+            </a:br>
+            <a:r>
+              <a:rPr lang="en-US" dirty="0">
+                <a:latin typeface="Courier" pitchFamily="2" charset="0"/>
+              </a:rPr>
+              <a:t>1: {‘(‘, ID}</a:t>
+            </a:r>
+          </a:p>
+          <a:p>
+            <a:r>
+              <a:rPr lang="en-US" dirty="0">
+                <a:latin typeface="Courier" pitchFamily="2" charset="0"/>
+              </a:rPr>
+              <a:t>2: {‘+’, ‘*’}</a:t>
+            </a:r>
+          </a:p>
+          <a:p>
+            <a:r>
+              <a:rPr lang="en-US" dirty="0">
+                <a:latin typeface="Courier" pitchFamily="2" charset="0"/>
+              </a:rPr>
+              <a:t>3: {None, ’)’}</a:t>
+            </a:r>
+            <a:br>
+              <a:rPr lang="en-US" dirty="0">
+                <a:latin typeface="Courier" pitchFamily="2" charset="0"/>
+              </a:rPr>
+            </a:br>
+            <a:r>
+              <a:rPr lang="en-US" dirty="0">
+                <a:latin typeface="Courier" pitchFamily="2" charset="0"/>
+              </a:rPr>
+              <a:t>4: {‘(‘}</a:t>
+            </a:r>
+          </a:p>
+          <a:p>
+            <a:r>
+              <a:rPr lang="en-US" dirty="0">
+                <a:latin typeface="Courier" pitchFamily="2" charset="0"/>
+              </a:rPr>
+              <a:t>5: {ID}</a:t>
+            </a:r>
+          </a:p>
+          <a:p>
+            <a:r>
+              <a:rPr lang="en-US" dirty="0">
+                <a:latin typeface="Courier" pitchFamily="2" charset="0"/>
+              </a:rPr>
+              <a:t>6: {‘+’}</a:t>
+            </a:r>
+          </a:p>
+          <a:p>
+            <a:r>
+              <a:rPr lang="en-US" dirty="0">
+                <a:latin typeface="Courier" pitchFamily="2" charset="0"/>
+              </a:rPr>
+              <a:t>7: {‘*’}</a:t>
+            </a:r>
+          </a:p>
+        </p:txBody>
+      </p:sp>
+      <p:sp>
+        <p:nvSpPr>
+          <p:cNvPr id="3" name="Rectangle 2">
+            <a:extLst>
+              <a:ext uri="{FF2B5EF4-FFF2-40B4-BE49-F238E27FC236}">
+                <a16:creationId xmlns:a16="http://schemas.microsoft.com/office/drawing/2014/main" id="{B8016679-012E-6C4D-A40D-A3A31CC3C26D}"/>
+              </a:ext>
+            </a:extLst>
+          </p:cNvPr>
+          <p:cNvSpPr/>
+          <p:nvPr/>
+        </p:nvSpPr>
+        <p:spPr>
+          <a:xfrm>
+            <a:off x="3432987" y="2871836"/>
+            <a:ext cx="4145722" cy="3785652"/>
+          </a:xfrm>
+          <a:prstGeom prst="rect">
+            <a:avLst/>
+          </a:prstGeom>
+        </p:spPr>
+        <p:txBody>
+          <a:bodyPr wrap="square">
+            <a:spAutoFit/>
+          </a:bodyPr>
+          <a:lstStyle/>
+          <a:p>
+            <a:r>
+              <a:rPr lang="en-US" sz="1200" dirty="0">
+                <a:solidFill>
+                  <a:srgbClr val="000000"/>
+                </a:solidFill>
+                <a:latin typeface="Menlo" panose="020B0609030804020204" pitchFamily="49" charset="0"/>
+              </a:rPr>
+              <a:t>    </a:t>
+            </a:r>
+            <a:r>
+              <a:rPr lang="en-US" sz="1600" b="1" dirty="0">
+                <a:solidFill>
+                  <a:srgbClr val="2EAEBB"/>
+                </a:solidFill>
+                <a:latin typeface="Menlo" panose="020B0609030804020204" pitchFamily="49" charset="0"/>
+              </a:rPr>
+              <a:t>def</a:t>
+            </a:r>
+            <a:r>
+              <a:rPr lang="en-US" sz="1600" dirty="0">
+                <a:solidFill>
+                  <a:srgbClr val="000000"/>
+                </a:solidFill>
+                <a:latin typeface="Menlo" panose="020B0609030804020204" pitchFamily="49" charset="0"/>
+              </a:rPr>
+              <a:t> </a:t>
+            </a:r>
+            <a:r>
+              <a:rPr lang="en-US" sz="1600" b="1" dirty="0" err="1">
+                <a:solidFill>
+                  <a:srgbClr val="400BD9"/>
+                </a:solidFill>
+                <a:latin typeface="Menlo" panose="020B0609030804020204" pitchFamily="49" charset="0"/>
+              </a:rPr>
+              <a:t>parse_Unit</a:t>
+            </a:r>
+            <a:r>
+              <a:rPr lang="en-US" sz="1600" dirty="0">
+                <a:solidFill>
+                  <a:srgbClr val="000000"/>
+                </a:solidFill>
+                <a:latin typeface="Menlo" panose="020B0609030804020204" pitchFamily="49" charset="0"/>
+              </a:rPr>
+              <a:t>(</a:t>
+            </a:r>
+            <a:r>
+              <a:rPr lang="en-US" sz="1600" b="1" dirty="0">
+                <a:solidFill>
+                  <a:srgbClr val="2EAEBB"/>
+                </a:solidFill>
+                <a:latin typeface="Menlo" panose="020B0609030804020204" pitchFamily="49" charset="0"/>
+              </a:rPr>
+              <a:t>self</a:t>
+            </a:r>
+            <a:r>
+              <a:rPr lang="en-US" sz="1600" dirty="0">
+                <a:solidFill>
+                  <a:srgbClr val="000000"/>
+                </a:solidFill>
+                <a:latin typeface="Menlo" panose="020B0609030804020204" pitchFamily="49" charset="0"/>
+              </a:rPr>
+              <a:t>):</a:t>
+            </a:r>
+            <a:endParaRPr lang="en-US" sz="1600" dirty="0">
+              <a:solidFill>
+                <a:srgbClr val="400BD9"/>
+              </a:solidFill>
+              <a:latin typeface="Menlo" panose="020B0609030804020204" pitchFamily="49" charset="0"/>
+            </a:endParaRPr>
+          </a:p>
+          <a:p>
+            <a:endParaRPr lang="en-US" sz="1600" dirty="0">
+              <a:solidFill>
+                <a:srgbClr val="000000"/>
+              </a:solidFill>
+              <a:latin typeface="Menlo" panose="020B0609030804020204" pitchFamily="49" charset="0"/>
+            </a:endParaRPr>
+          </a:p>
+          <a:p>
+            <a:r>
+              <a:rPr lang="en-US" sz="1600" dirty="0">
+                <a:solidFill>
+                  <a:srgbClr val="9FA01C"/>
+                </a:solidFill>
+                <a:latin typeface="Menlo" panose="020B0609030804020204" pitchFamily="49" charset="0"/>
+              </a:rPr>
+              <a:t>        </a:t>
+            </a:r>
+            <a:r>
+              <a:rPr lang="en-US" sz="1600" dirty="0" err="1">
+                <a:solidFill>
+                  <a:srgbClr val="9FA01C"/>
+                </a:solidFill>
+                <a:latin typeface="Menlo" panose="020B0609030804020204" pitchFamily="49" charset="0"/>
+              </a:rPr>
+              <a:t>token_id</a:t>
+            </a:r>
+            <a:r>
+              <a:rPr lang="en-US" sz="1600" dirty="0">
+                <a:solidFill>
+                  <a:srgbClr val="000000"/>
+                </a:solidFill>
+                <a:latin typeface="Menlo" panose="020B0609030804020204" pitchFamily="49" charset="0"/>
+              </a:rPr>
+              <a:t> = </a:t>
+            </a:r>
+            <a:r>
+              <a:rPr lang="en-US" sz="1600" dirty="0" err="1">
+                <a:solidFill>
+                  <a:srgbClr val="000000"/>
+                </a:solidFill>
+                <a:latin typeface="Menlo" panose="020B0609030804020204" pitchFamily="49" charset="0"/>
+              </a:rPr>
+              <a:t>get_token_id</a:t>
+            </a:r>
+            <a:r>
+              <a:rPr lang="en-US" sz="1600" dirty="0">
+                <a:solidFill>
+                  <a:srgbClr val="000000"/>
+                </a:solidFill>
+                <a:latin typeface="Menlo" panose="020B0609030804020204" pitchFamily="49" charset="0"/>
+              </a:rPr>
+              <a:t>(</a:t>
+            </a:r>
+            <a:r>
+              <a:rPr lang="en-US" sz="1600" b="1" dirty="0" err="1">
+                <a:solidFill>
+                  <a:srgbClr val="2EAEBB"/>
+                </a:solidFill>
+                <a:latin typeface="Menlo" panose="020B0609030804020204" pitchFamily="49" charset="0"/>
+              </a:rPr>
+              <a:t>self</a:t>
+            </a:r>
+            <a:r>
+              <a:rPr lang="en-US" sz="1600" dirty="0" err="1">
+                <a:solidFill>
+                  <a:srgbClr val="000000"/>
+                </a:solidFill>
+                <a:latin typeface="Menlo" panose="020B0609030804020204" pitchFamily="49" charset="0"/>
+              </a:rPr>
+              <a:t>.to_match</a:t>
+            </a:r>
+            <a:r>
+              <a:rPr lang="en-US" sz="1600" dirty="0">
+                <a:solidFill>
+                  <a:srgbClr val="000000"/>
+                </a:solidFill>
+                <a:latin typeface="Menlo" panose="020B0609030804020204" pitchFamily="49" charset="0"/>
+              </a:rPr>
+              <a:t>)</a:t>
+            </a:r>
+            <a:br>
+              <a:rPr lang="en-US" sz="1600" dirty="0">
+                <a:solidFill>
+                  <a:srgbClr val="000000"/>
+                </a:solidFill>
+                <a:latin typeface="Menlo" panose="020B0609030804020204" pitchFamily="49" charset="0"/>
+              </a:rPr>
+            </a:br>
+            <a:endParaRPr lang="en-US" sz="1600" dirty="0">
+              <a:solidFill>
+                <a:srgbClr val="000000"/>
+              </a:solidFill>
+              <a:latin typeface="Menlo" panose="020B0609030804020204" pitchFamily="49" charset="0"/>
+            </a:endParaRPr>
+          </a:p>
+          <a:p>
+            <a:r>
+              <a:rPr lang="en-US" sz="1600" dirty="0">
+                <a:solidFill>
+                  <a:srgbClr val="000000"/>
+                </a:solidFill>
+                <a:latin typeface="Menlo" panose="020B0609030804020204" pitchFamily="49" charset="0"/>
+              </a:rPr>
+              <a:t>        </a:t>
+            </a:r>
+            <a:r>
+              <a:rPr lang="en-US" sz="1600" dirty="0">
+                <a:solidFill>
+                  <a:srgbClr val="B42419"/>
+                </a:solidFill>
+                <a:latin typeface="Menlo" panose="020B0609030804020204" pitchFamily="49" charset="0"/>
+              </a:rPr>
+              <a:t># Unit  ::= ‘(‘ Expr ‘)’ </a:t>
+            </a:r>
+            <a:r>
+              <a:rPr lang="en-US" sz="1600" dirty="0">
+                <a:solidFill>
+                  <a:srgbClr val="000000"/>
+                </a:solidFill>
+                <a:latin typeface="Menlo" panose="020B0609030804020204" pitchFamily="49" charset="0"/>
+              </a:rPr>
+              <a:t>                       </a:t>
+            </a:r>
+          </a:p>
+          <a:p>
+            <a:r>
+              <a:rPr lang="en-US" sz="1600" dirty="0">
+                <a:solidFill>
+                  <a:srgbClr val="000000"/>
+                </a:solidFill>
+                <a:latin typeface="Menlo" panose="020B0609030804020204" pitchFamily="49" charset="0"/>
+              </a:rPr>
+              <a:t>        </a:t>
+            </a:r>
+            <a:r>
+              <a:rPr lang="en-US" sz="1600" b="1" dirty="0">
+                <a:solidFill>
+                  <a:srgbClr val="2EAEBB"/>
+                </a:solidFill>
+                <a:latin typeface="Menlo" panose="020B0609030804020204" pitchFamily="49" charset="0"/>
+              </a:rPr>
+              <a:t>if</a:t>
+            </a:r>
+            <a:r>
+              <a:rPr lang="en-US" sz="1600" dirty="0">
+                <a:solidFill>
+                  <a:srgbClr val="000000"/>
+                </a:solidFill>
+                <a:latin typeface="Menlo" panose="020B0609030804020204" pitchFamily="49" charset="0"/>
+              </a:rPr>
+              <a:t> </a:t>
+            </a:r>
+            <a:r>
+              <a:rPr lang="en-US" sz="1600" dirty="0" err="1">
+                <a:solidFill>
+                  <a:srgbClr val="000000"/>
+                </a:solidFill>
+                <a:latin typeface="Menlo" panose="020B0609030804020204" pitchFamily="49" charset="0"/>
+              </a:rPr>
+              <a:t>token_id</a:t>
+            </a:r>
+            <a:r>
+              <a:rPr lang="en-US" sz="1600" dirty="0">
+                <a:solidFill>
+                  <a:srgbClr val="000000"/>
+                </a:solidFill>
+                <a:latin typeface="Menlo" panose="020B0609030804020204" pitchFamily="49" charset="0"/>
+              </a:rPr>
+              <a:t> == </a:t>
+            </a:r>
+            <a:r>
+              <a:rPr lang="en-US" sz="1600" dirty="0">
+                <a:solidFill>
+                  <a:srgbClr val="2FB41D"/>
+                </a:solidFill>
+                <a:latin typeface="Menlo" panose="020B0609030804020204" pitchFamily="49" charset="0"/>
+              </a:rPr>
+              <a:t>"LPAR"</a:t>
+            </a:r>
+            <a:r>
+              <a:rPr lang="en-US" sz="1600" dirty="0">
+                <a:solidFill>
+                  <a:srgbClr val="000000"/>
+                </a:solidFill>
+                <a:latin typeface="Menlo" panose="020B0609030804020204" pitchFamily="49" charset="0"/>
+              </a:rPr>
+              <a:t>:</a:t>
+            </a:r>
+          </a:p>
+          <a:p>
+            <a:r>
+              <a:rPr lang="en-US" sz="1600" dirty="0">
+                <a:solidFill>
+                  <a:srgbClr val="000000"/>
+                </a:solidFill>
+                <a:latin typeface="Menlo" panose="020B0609030804020204" pitchFamily="49" charset="0"/>
+              </a:rPr>
+              <a:t>            </a:t>
+            </a:r>
+            <a:r>
+              <a:rPr lang="en-US" sz="1600" b="1" dirty="0" err="1">
+                <a:solidFill>
+                  <a:srgbClr val="2EAEBB"/>
+                </a:solidFill>
+                <a:latin typeface="Menlo" panose="020B0609030804020204" pitchFamily="49" charset="0"/>
+              </a:rPr>
+              <a:t>self</a:t>
+            </a:r>
+            <a:r>
+              <a:rPr lang="en-US" sz="1600" dirty="0" err="1">
+                <a:solidFill>
+                  <a:srgbClr val="000000"/>
+                </a:solidFill>
+                <a:latin typeface="Menlo" panose="020B0609030804020204" pitchFamily="49" charset="0"/>
+              </a:rPr>
+              <a:t>.eat</a:t>
+            </a:r>
+            <a:r>
+              <a:rPr lang="en-US" sz="1600" dirty="0">
+                <a:solidFill>
+                  <a:srgbClr val="000000"/>
+                </a:solidFill>
+                <a:latin typeface="Menlo" panose="020B0609030804020204" pitchFamily="49" charset="0"/>
+              </a:rPr>
+              <a:t>(</a:t>
+            </a:r>
+            <a:r>
+              <a:rPr lang="en-US" sz="1600" dirty="0">
+                <a:solidFill>
+                  <a:srgbClr val="2FB41D"/>
+                </a:solidFill>
+                <a:latin typeface="Menlo" panose="020B0609030804020204" pitchFamily="49" charset="0"/>
+              </a:rPr>
+              <a:t>"LPAR"</a:t>
+            </a:r>
+            <a:r>
+              <a:rPr lang="en-US" sz="1600" dirty="0">
+                <a:solidFill>
+                  <a:srgbClr val="000000"/>
+                </a:solidFill>
+                <a:latin typeface="Menlo" panose="020B0609030804020204" pitchFamily="49" charset="0"/>
+              </a:rPr>
+              <a:t>)</a:t>
+            </a:r>
+          </a:p>
+          <a:p>
+            <a:r>
+              <a:rPr lang="en-US" sz="1600" dirty="0">
+                <a:solidFill>
+                  <a:srgbClr val="000000"/>
+                </a:solidFill>
+                <a:latin typeface="Menlo" panose="020B0609030804020204" pitchFamily="49" charset="0"/>
+              </a:rPr>
+              <a:t>            </a:t>
+            </a:r>
+            <a:r>
+              <a:rPr lang="en-US" sz="1600" b="1" dirty="0" err="1">
+                <a:solidFill>
+                  <a:srgbClr val="2EAEBB"/>
+                </a:solidFill>
+                <a:latin typeface="Menlo" panose="020B0609030804020204" pitchFamily="49" charset="0"/>
+              </a:rPr>
+              <a:t>self</a:t>
+            </a:r>
+            <a:r>
+              <a:rPr lang="en-US" sz="1600" dirty="0" err="1">
+                <a:solidFill>
+                  <a:srgbClr val="000000"/>
+                </a:solidFill>
+                <a:latin typeface="Menlo" panose="020B0609030804020204" pitchFamily="49" charset="0"/>
+              </a:rPr>
+              <a:t>.parse_Expr</a:t>
+            </a:r>
+            <a:r>
+              <a:rPr lang="en-US" sz="1600" dirty="0">
+                <a:solidFill>
+                  <a:srgbClr val="000000"/>
+                </a:solidFill>
+                <a:latin typeface="Menlo" panose="020B0609030804020204" pitchFamily="49" charset="0"/>
+              </a:rPr>
+              <a:t>()</a:t>
+            </a:r>
+          </a:p>
+          <a:p>
+            <a:r>
+              <a:rPr lang="en-US" sz="1600" dirty="0">
+                <a:solidFill>
+                  <a:srgbClr val="000000"/>
+                </a:solidFill>
+                <a:latin typeface="Menlo" panose="020B0609030804020204" pitchFamily="49" charset="0"/>
+              </a:rPr>
+              <a:t>            </a:t>
+            </a:r>
+            <a:r>
+              <a:rPr lang="en-US" sz="1600" b="1" dirty="0" err="1">
+                <a:solidFill>
+                  <a:srgbClr val="2EAEBB"/>
+                </a:solidFill>
+                <a:latin typeface="Menlo" panose="020B0609030804020204" pitchFamily="49" charset="0"/>
+              </a:rPr>
+              <a:t>self</a:t>
+            </a:r>
+            <a:r>
+              <a:rPr lang="en-US" sz="1600" dirty="0" err="1">
+                <a:solidFill>
+                  <a:srgbClr val="000000"/>
+                </a:solidFill>
+                <a:latin typeface="Menlo" panose="020B0609030804020204" pitchFamily="49" charset="0"/>
+              </a:rPr>
+              <a:t>.eat</a:t>
+            </a:r>
+            <a:r>
+              <a:rPr lang="en-US" sz="1600" dirty="0">
+                <a:solidFill>
+                  <a:srgbClr val="000000"/>
+                </a:solidFill>
+                <a:latin typeface="Menlo" panose="020B0609030804020204" pitchFamily="49" charset="0"/>
+              </a:rPr>
+              <a:t>(</a:t>
+            </a:r>
+            <a:r>
+              <a:rPr lang="en-US" sz="1600" dirty="0">
+                <a:solidFill>
+                  <a:srgbClr val="2FB41D"/>
+                </a:solidFill>
+                <a:latin typeface="Menlo" panose="020B0609030804020204" pitchFamily="49" charset="0"/>
+              </a:rPr>
+              <a:t>"RPAR"</a:t>
+            </a:r>
+            <a:r>
+              <a:rPr lang="en-US" sz="1600" dirty="0">
+                <a:solidFill>
+                  <a:srgbClr val="000000"/>
+                </a:solidFill>
+                <a:latin typeface="Menlo" panose="020B0609030804020204" pitchFamily="49" charset="0"/>
+              </a:rPr>
+              <a:t>)</a:t>
+            </a:r>
+          </a:p>
+          <a:p>
+            <a:r>
+              <a:rPr lang="en-US" sz="1600" dirty="0">
+                <a:solidFill>
+                  <a:srgbClr val="000000"/>
+                </a:solidFill>
+                <a:latin typeface="Menlo" panose="020B0609030804020204" pitchFamily="49" charset="0"/>
+              </a:rPr>
+              <a:t>            </a:t>
+            </a:r>
+            <a:r>
+              <a:rPr lang="en-US" sz="1600" b="1" dirty="0">
+                <a:solidFill>
+                  <a:srgbClr val="2EAEBB"/>
+                </a:solidFill>
+                <a:latin typeface="Menlo" panose="020B0609030804020204" pitchFamily="49" charset="0"/>
+              </a:rPr>
+              <a:t>return</a:t>
+            </a:r>
+            <a:br>
+              <a:rPr lang="en-US" sz="1600" dirty="0">
+                <a:solidFill>
+                  <a:srgbClr val="000000"/>
+                </a:solidFill>
+                <a:latin typeface="Menlo" panose="020B0609030804020204" pitchFamily="49" charset="0"/>
+              </a:rPr>
+            </a:br>
+            <a:endParaRPr lang="en-US" sz="1600" dirty="0">
+              <a:solidFill>
+                <a:srgbClr val="000000"/>
+              </a:solidFill>
+              <a:latin typeface="Menlo" panose="020B0609030804020204" pitchFamily="49" charset="0"/>
+            </a:endParaRPr>
+          </a:p>
+          <a:p>
+            <a:r>
+              <a:rPr lang="en-US" sz="1600" dirty="0">
+                <a:solidFill>
+                  <a:srgbClr val="B42419"/>
+                </a:solidFill>
+                <a:latin typeface="Menlo" panose="020B0609030804020204" pitchFamily="49" charset="0"/>
+              </a:rPr>
+              <a:t>        # Unit :: = ID</a:t>
+            </a:r>
+            <a:endParaRPr lang="en-US" sz="1600" dirty="0">
+              <a:solidFill>
+                <a:srgbClr val="000000"/>
+              </a:solidFill>
+              <a:latin typeface="Menlo" panose="020B0609030804020204" pitchFamily="49" charset="0"/>
+            </a:endParaRPr>
+          </a:p>
+          <a:p>
+            <a:r>
+              <a:rPr lang="en-US" sz="1600" dirty="0">
+                <a:solidFill>
+                  <a:srgbClr val="000000"/>
+                </a:solidFill>
+                <a:latin typeface="Menlo" panose="020B0609030804020204" pitchFamily="49" charset="0"/>
+              </a:rPr>
+              <a:t>        </a:t>
+            </a:r>
+            <a:r>
+              <a:rPr lang="en-US" sz="1600" b="1" dirty="0">
+                <a:solidFill>
+                  <a:srgbClr val="2EAEBB"/>
+                </a:solidFill>
+                <a:latin typeface="Menlo" panose="020B0609030804020204" pitchFamily="49" charset="0"/>
+              </a:rPr>
+              <a:t>if</a:t>
+            </a:r>
+            <a:r>
+              <a:rPr lang="en-US" sz="1600" dirty="0">
+                <a:solidFill>
+                  <a:srgbClr val="000000"/>
+                </a:solidFill>
+                <a:latin typeface="Menlo" panose="020B0609030804020204" pitchFamily="49" charset="0"/>
+              </a:rPr>
+              <a:t> </a:t>
+            </a:r>
+            <a:r>
+              <a:rPr lang="en-US" sz="1600" dirty="0" err="1">
+                <a:solidFill>
+                  <a:srgbClr val="000000"/>
+                </a:solidFill>
+                <a:latin typeface="Menlo" panose="020B0609030804020204" pitchFamily="49" charset="0"/>
+              </a:rPr>
+              <a:t>token_id</a:t>
+            </a:r>
+            <a:r>
+              <a:rPr lang="en-US" sz="1600" dirty="0">
+                <a:solidFill>
+                  <a:srgbClr val="000000"/>
+                </a:solidFill>
+                <a:latin typeface="Menlo" panose="020B0609030804020204" pitchFamily="49" charset="0"/>
+              </a:rPr>
+              <a:t> == </a:t>
+            </a:r>
+            <a:r>
+              <a:rPr lang="en-US" sz="1600" dirty="0">
+                <a:solidFill>
+                  <a:srgbClr val="2FB41D"/>
+                </a:solidFill>
+                <a:latin typeface="Menlo" panose="020B0609030804020204" pitchFamily="49" charset="0"/>
+              </a:rPr>
+              <a:t>"ID"</a:t>
+            </a:r>
+            <a:r>
+              <a:rPr lang="en-US" sz="1600" dirty="0">
+                <a:solidFill>
+                  <a:srgbClr val="000000"/>
+                </a:solidFill>
+                <a:latin typeface="Menlo" panose="020B0609030804020204" pitchFamily="49" charset="0"/>
+              </a:rPr>
+              <a:t>:</a:t>
+            </a:r>
+          </a:p>
+          <a:p>
+            <a:r>
+              <a:rPr lang="en-US" sz="1600" dirty="0">
+                <a:solidFill>
+                  <a:srgbClr val="000000"/>
+                </a:solidFill>
+                <a:latin typeface="Menlo" panose="020B0609030804020204" pitchFamily="49" charset="0"/>
+              </a:rPr>
+              <a:t>            </a:t>
+            </a:r>
+            <a:r>
+              <a:rPr lang="en-US" sz="1600" b="1" dirty="0" err="1">
+                <a:solidFill>
+                  <a:srgbClr val="2EAEBB"/>
+                </a:solidFill>
+                <a:latin typeface="Menlo" panose="020B0609030804020204" pitchFamily="49" charset="0"/>
+              </a:rPr>
+              <a:t>self</a:t>
+            </a:r>
+            <a:r>
+              <a:rPr lang="en-US" sz="1600" dirty="0" err="1">
+                <a:solidFill>
+                  <a:srgbClr val="000000"/>
+                </a:solidFill>
+                <a:latin typeface="Menlo" panose="020B0609030804020204" pitchFamily="49" charset="0"/>
+              </a:rPr>
+              <a:t>.eat</a:t>
+            </a:r>
+            <a:r>
+              <a:rPr lang="en-US" sz="1600" dirty="0">
+                <a:solidFill>
+                  <a:srgbClr val="000000"/>
+                </a:solidFill>
+                <a:latin typeface="Menlo" panose="020B0609030804020204" pitchFamily="49" charset="0"/>
+              </a:rPr>
+              <a:t>(</a:t>
+            </a:r>
+            <a:r>
+              <a:rPr lang="en-US" sz="1600" dirty="0">
+                <a:solidFill>
+                  <a:srgbClr val="2FB41D"/>
+                </a:solidFill>
+                <a:latin typeface="Menlo" panose="020B0609030804020204" pitchFamily="49" charset="0"/>
+              </a:rPr>
+              <a:t>"ID"</a:t>
+            </a:r>
+            <a:r>
+              <a:rPr lang="en-US" sz="1600" dirty="0">
+                <a:solidFill>
+                  <a:srgbClr val="000000"/>
+                </a:solidFill>
+                <a:latin typeface="Menlo" panose="020B0609030804020204" pitchFamily="49" charset="0"/>
+              </a:rPr>
+              <a:t>)</a:t>
+            </a:r>
+          </a:p>
+          <a:p>
+            <a:r>
+              <a:rPr lang="en-US" sz="1600" dirty="0">
+                <a:solidFill>
+                  <a:srgbClr val="000000"/>
+                </a:solidFill>
+                <a:latin typeface="Menlo" panose="020B0609030804020204" pitchFamily="49" charset="0"/>
+              </a:rPr>
+              <a:t>            </a:t>
+            </a:r>
+            <a:r>
+              <a:rPr lang="en-US" sz="1600" b="1" dirty="0">
+                <a:solidFill>
+                  <a:srgbClr val="2EAEBB"/>
+                </a:solidFill>
+                <a:latin typeface="Menlo" panose="020B0609030804020204" pitchFamily="49" charset="0"/>
+              </a:rPr>
+              <a:t>return</a:t>
+            </a:r>
+            <a:endParaRPr lang="en-US" sz="1600" dirty="0">
+              <a:solidFill>
+                <a:srgbClr val="000000"/>
+              </a:solidFill>
+              <a:latin typeface="Menlo" panose="020B0609030804020204" pitchFamily="49" charset="0"/>
+            </a:endParaRPr>
+          </a:p>
+        </p:txBody>
+      </p:sp>
+      <p:sp>
+        <p:nvSpPr>
+          <p:cNvPr id="7" name="TextBox 6">
+            <a:extLst>
+              <a:ext uri="{FF2B5EF4-FFF2-40B4-BE49-F238E27FC236}">
+                <a16:creationId xmlns:a16="http://schemas.microsoft.com/office/drawing/2014/main" id="{B9996DFA-6A6C-FF36-576C-8920DDB6F895}"/>
+              </a:ext>
+            </a:extLst>
+          </p:cNvPr>
+          <p:cNvSpPr txBox="1"/>
+          <p:nvPr/>
+        </p:nvSpPr>
+        <p:spPr>
+          <a:xfrm>
+            <a:off x="7578709" y="2368669"/>
+            <a:ext cx="4122269" cy="1815882"/>
+          </a:xfrm>
+          <a:prstGeom prst="rect">
+            <a:avLst/>
+          </a:prstGeom>
+          <a:noFill/>
+        </p:spPr>
+        <p:txBody>
+          <a:bodyPr wrap="square">
+            <a:spAutoFit/>
+          </a:bodyPr>
+          <a:lstStyle/>
+          <a:p>
+            <a:r>
+              <a:rPr lang="en-US" sz="1400" dirty="0">
+                <a:highlight>
+                  <a:srgbClr val="FFFF00"/>
+                </a:highlight>
+              </a:rPr>
+              <a:t>def eat(self, </a:t>
+            </a:r>
+            <a:r>
+              <a:rPr lang="en-US" sz="1400" dirty="0" err="1">
+                <a:highlight>
+                  <a:srgbClr val="FFFF00"/>
+                </a:highlight>
+              </a:rPr>
+              <a:t>expected_token</a:t>
+            </a:r>
+            <a:r>
+              <a:rPr lang="en-US" sz="1400" dirty="0">
+                <a:highlight>
+                  <a:srgbClr val="FFFF00"/>
+                </a:highlight>
+              </a:rPr>
+              <a:t>):</a:t>
+            </a:r>
+          </a:p>
+          <a:p>
+            <a:r>
+              <a:rPr lang="en-US" sz="1400" dirty="0"/>
+              <a:t>    if </a:t>
+            </a:r>
+            <a:r>
+              <a:rPr lang="en-US" sz="1400" dirty="0" err="1"/>
+              <a:t>self.to_match</a:t>
+            </a:r>
+            <a:r>
+              <a:rPr lang="en-US" sz="1400" dirty="0"/>
+              <a:t> == </a:t>
+            </a:r>
+            <a:r>
+              <a:rPr lang="en-US" sz="1400" dirty="0" err="1"/>
+              <a:t>expected_token</a:t>
+            </a:r>
+            <a:r>
+              <a:rPr lang="en-US" sz="1400" dirty="0"/>
+              <a:t>:</a:t>
+            </a:r>
+          </a:p>
+          <a:p>
+            <a:r>
+              <a:rPr lang="en-US" sz="1400" dirty="0"/>
+              <a:t>        </a:t>
+            </a:r>
+            <a:r>
+              <a:rPr lang="en-US" sz="1400" dirty="0" err="1"/>
+              <a:t>self.advance</a:t>
+            </a:r>
+            <a:r>
+              <a:rPr lang="en-US" sz="1400" dirty="0"/>
+              <a:t>()  # move to the next token</a:t>
+            </a:r>
+          </a:p>
+          <a:p>
+            <a:r>
+              <a:rPr lang="en-US" sz="1400" dirty="0"/>
+              <a:t>    else:</a:t>
+            </a:r>
+          </a:p>
+          <a:p>
+            <a:r>
+              <a:rPr lang="en-US" sz="1400" dirty="0"/>
+              <a:t>        raise </a:t>
+            </a:r>
+            <a:r>
+              <a:rPr lang="en-US" sz="1400" dirty="0" err="1"/>
+              <a:t>ParserException</a:t>
+            </a:r>
+            <a:r>
+              <a:rPr lang="en-US" sz="1400" dirty="0"/>
+              <a:t>(</a:t>
+            </a:r>
+          </a:p>
+          <a:p>
+            <a:r>
+              <a:rPr lang="en-US" sz="1400" dirty="0"/>
+              <a:t>                   </a:t>
+            </a:r>
+            <a:r>
+              <a:rPr lang="en-US" sz="1400" dirty="0" err="1"/>
+              <a:t>self.current_line</a:t>
+            </a:r>
+            <a:r>
+              <a:rPr lang="en-US" sz="1400" dirty="0"/>
+              <a:t>,     </a:t>
+            </a:r>
+            <a:r>
+              <a:rPr lang="en-US" sz="1400" dirty="0">
+                <a:solidFill>
+                  <a:srgbClr val="FF0000"/>
+                </a:solidFill>
+              </a:rPr>
+              <a:t># line# (for you to do)</a:t>
+            </a:r>
+          </a:p>
+          <a:p>
+            <a:r>
+              <a:rPr lang="en-US" sz="1400" dirty="0"/>
+              <a:t>                   </a:t>
+            </a:r>
+            <a:r>
+              <a:rPr lang="en-US" sz="1400" dirty="0" err="1"/>
+              <a:t>self.to_match</a:t>
+            </a:r>
+            <a:r>
+              <a:rPr lang="en-US" sz="1400" dirty="0"/>
+              <a:t>,          </a:t>
+            </a:r>
+            <a:r>
+              <a:rPr lang="en-US" sz="1400" dirty="0">
+                <a:solidFill>
+                  <a:srgbClr val="FF0000"/>
+                </a:solidFill>
+              </a:rPr>
+              <a:t># observed token</a:t>
+            </a:r>
+          </a:p>
+          <a:p>
+            <a:r>
+              <a:rPr lang="en-US" sz="1400" dirty="0"/>
+              <a:t>                   [</a:t>
+            </a:r>
+            <a:r>
+              <a:rPr lang="en-US" sz="1400" dirty="0" err="1"/>
+              <a:t>expected_token</a:t>
+            </a:r>
+            <a:r>
+              <a:rPr lang="en-US" sz="1400" dirty="0"/>
+              <a:t>])   </a:t>
+            </a:r>
+            <a:r>
+              <a:rPr lang="en-US" sz="1400" dirty="0">
+                <a:solidFill>
+                  <a:srgbClr val="FF0000"/>
+                </a:solidFill>
+              </a:rPr>
+              <a:t>#   i.e. PAR or RPAR</a:t>
+            </a:r>
+          </a:p>
+        </p:txBody>
+      </p:sp>
+    </p:spTree>
+    <p:extLst>
+      <p:ext uri="{BB962C8B-B14F-4D97-AF65-F5344CB8AC3E}">
+        <p14:creationId xmlns:p14="http://schemas.microsoft.com/office/powerpoint/2010/main" val="778745497"/>
+      </p:ext>
+    </p:extLst>
+  </p:cSld>
+  <p:clrMapOvr>
+    <a:masterClrMapping/>
+  </p:clrMapOvr>
+</p:sld>
+</file>
+
+<file path=ppt/slides/slide76.xml><?xml version="1.0" encoding="utf-8"?>
+<p:sld xmlns:a="http://schemas.openxmlformats.org/drawingml/2006/main" xmlns:r="http://schemas.openxmlformats.org/officeDocument/2006/relationships" xmlns:p="http://schemas.openxmlformats.org/presentationml/2006/main">
+  <p:cSld>
+    <p:spTree>
+      <p:nvGrpSpPr>
+        <p:cNvPr id="1" name=""/>
+        <p:cNvGrpSpPr/>
+        <p:nvPr/>
+      </p:nvGrpSpPr>
+      <p:grpSpPr>
+        <a:xfrm>
+          <a:off x="0" y="0"/>
+          <a:ext cx="0" cy="0"/>
+          <a:chOff x="0" y="0"/>
+          <a:chExt cx="0" cy="0"/>
+        </a:xfrm>
+      </p:grpSpPr>
+      <p:sp>
+        <p:nvSpPr>
+          <p:cNvPr id="2" name="Title 1">
+            <a:extLst>
+              <a:ext uri="{FF2B5EF4-FFF2-40B4-BE49-F238E27FC236}">
+                <a16:creationId xmlns:a16="http://schemas.microsoft.com/office/drawing/2014/main" id="{8E411F96-7461-874D-8EA3-B6DFAA688889}"/>
+              </a:ext>
+            </a:extLst>
+          </p:cNvPr>
+          <p:cNvSpPr>
+            <a:spLocks noGrp="1"/>
+          </p:cNvSpPr>
+          <p:nvPr>
+            <p:ph type="title"/>
+          </p:nvPr>
+        </p:nvSpPr>
+        <p:spPr/>
+        <p:txBody>
+          <a:bodyPr/>
+          <a:lstStyle/>
+          <a:p>
+            <a:r>
+              <a:rPr lang="en-US" dirty="0"/>
+              <a:t>Let’s look at the grammar</a:t>
+            </a:r>
+          </a:p>
+        </p:txBody>
+      </p:sp>
+      <p:sp>
+        <p:nvSpPr>
+          <p:cNvPr id="4" name="Rectangle 3">
+            <a:extLst>
+              <a:ext uri="{FF2B5EF4-FFF2-40B4-BE49-F238E27FC236}">
+                <a16:creationId xmlns:a16="http://schemas.microsoft.com/office/drawing/2014/main" id="{C95AD811-DA94-934C-A22D-0CC1576CD299}"/>
+              </a:ext>
+            </a:extLst>
+          </p:cNvPr>
+          <p:cNvSpPr/>
+          <p:nvPr/>
+        </p:nvSpPr>
+        <p:spPr>
+          <a:xfrm>
+            <a:off x="838200" y="1507736"/>
+            <a:ext cx="3911601" cy="2031325"/>
+          </a:xfrm>
+          <a:prstGeom prst="rect">
+            <a:avLst/>
+          </a:prstGeom>
+        </p:spPr>
+        <p:txBody>
+          <a:bodyPr wrap="square">
+            <a:spAutoFit/>
+          </a:bodyPr>
+          <a:lstStyle/>
+          <a:p>
+            <a:r>
+              <a:rPr lang="en-US" dirty="0">
+                <a:latin typeface="Courier" pitchFamily="2" charset="0"/>
+              </a:rPr>
+              <a:t>1: Expr  ::= Unit Expr2</a:t>
+            </a:r>
+          </a:p>
+          <a:p>
+            <a:r>
+              <a:rPr lang="en-US" dirty="0">
+                <a:latin typeface="Courier" pitchFamily="2" charset="0"/>
+              </a:rPr>
+              <a:t>2: Expr2 ::= Op Unit Expr2</a:t>
+            </a:r>
+          </a:p>
+          <a:p>
+            <a:r>
+              <a:rPr lang="en-US" dirty="0">
+                <a:latin typeface="Courier" pitchFamily="2" charset="0"/>
+              </a:rPr>
+              <a:t>3:       | “”</a:t>
+            </a:r>
+            <a:br>
+              <a:rPr lang="en-US" dirty="0">
+                <a:latin typeface="Courier" pitchFamily="2" charset="0"/>
+              </a:rPr>
+            </a:br>
+            <a:r>
+              <a:rPr lang="en-US" dirty="0">
+                <a:highlight>
+                  <a:srgbClr val="FFFF00"/>
+                </a:highlight>
+                <a:latin typeface="Courier" pitchFamily="2" charset="0"/>
+              </a:rPr>
+              <a:t>4: Unit  ::= ‘(‘ Expr ‘)’</a:t>
+            </a:r>
+          </a:p>
+          <a:p>
+            <a:r>
+              <a:rPr lang="en-US" dirty="0">
+                <a:highlight>
+                  <a:srgbClr val="FFFF00"/>
+                </a:highlight>
+                <a:latin typeface="Courier" pitchFamily="2" charset="0"/>
+              </a:rPr>
+              <a:t>5:       |    ID</a:t>
+            </a:r>
+          </a:p>
+          <a:p>
+            <a:r>
+              <a:rPr lang="en-US" dirty="0">
+                <a:latin typeface="Courier" pitchFamily="2" charset="0"/>
+              </a:rPr>
+              <a:t>6: Op    ::= ‘+’</a:t>
+            </a:r>
+          </a:p>
+          <a:p>
+            <a:r>
+              <a:rPr lang="en-US" dirty="0">
+                <a:latin typeface="Courier" pitchFamily="2" charset="0"/>
+              </a:rPr>
+              <a:t>7:       |   ‘*’</a:t>
+            </a:r>
+          </a:p>
+        </p:txBody>
+      </p:sp>
+      <p:sp>
+        <p:nvSpPr>
+          <p:cNvPr id="8" name="TextBox 7">
+            <a:extLst>
+              <a:ext uri="{FF2B5EF4-FFF2-40B4-BE49-F238E27FC236}">
+                <a16:creationId xmlns:a16="http://schemas.microsoft.com/office/drawing/2014/main" id="{436689AF-BA26-3347-BA19-B7CDF8BA594D}"/>
+              </a:ext>
+            </a:extLst>
+          </p:cNvPr>
+          <p:cNvSpPr txBox="1"/>
+          <p:nvPr/>
+        </p:nvSpPr>
+        <p:spPr>
+          <a:xfrm>
+            <a:off x="7678215" y="803521"/>
+            <a:ext cx="2953032" cy="369332"/>
+          </a:xfrm>
+          <a:prstGeom prst="rect">
+            <a:avLst/>
+          </a:prstGeom>
+          <a:noFill/>
+        </p:spPr>
+        <p:txBody>
+          <a:bodyPr wrap="square" rtlCol="0">
+            <a:spAutoFit/>
+          </a:bodyPr>
+          <a:lstStyle/>
+          <a:p>
+            <a:r>
+              <a:rPr lang="en-US" i="1" dirty="0"/>
+              <a:t>How do we parse a Unit? </a:t>
+            </a:r>
+          </a:p>
+        </p:txBody>
+      </p:sp>
+      <p:sp>
+        <p:nvSpPr>
+          <p:cNvPr id="5" name="Rectangle 4">
+            <a:extLst>
+              <a:ext uri="{FF2B5EF4-FFF2-40B4-BE49-F238E27FC236}">
+                <a16:creationId xmlns:a16="http://schemas.microsoft.com/office/drawing/2014/main" id="{8C35DCA6-16D2-F54F-A22A-3EFA1E6D8A47}"/>
+              </a:ext>
+            </a:extLst>
+          </p:cNvPr>
+          <p:cNvSpPr/>
+          <p:nvPr/>
+        </p:nvSpPr>
+        <p:spPr>
+          <a:xfrm>
+            <a:off x="838200" y="4184551"/>
+            <a:ext cx="2275544" cy="2308324"/>
+          </a:xfrm>
+          <a:prstGeom prst="rect">
+            <a:avLst/>
+          </a:prstGeom>
+        </p:spPr>
+        <p:txBody>
+          <a:bodyPr wrap="square">
+            <a:spAutoFit/>
+          </a:bodyPr>
+          <a:lstStyle/>
+          <a:p>
+            <a:r>
+              <a:rPr lang="en-US" dirty="0">
+                <a:latin typeface="Courier" pitchFamily="2" charset="0"/>
+              </a:rPr>
+              <a:t>First+ sets:</a:t>
+            </a:r>
+            <a:br>
+              <a:rPr lang="en-US" dirty="0">
+                <a:latin typeface="Courier" pitchFamily="2" charset="0"/>
+              </a:rPr>
+            </a:br>
+            <a:r>
+              <a:rPr lang="en-US" dirty="0">
+                <a:latin typeface="Courier" pitchFamily="2" charset="0"/>
+              </a:rPr>
+              <a:t>1: {‘(‘, ID}</a:t>
+            </a:r>
+          </a:p>
+          <a:p>
+            <a:r>
+              <a:rPr lang="en-US" dirty="0">
+                <a:latin typeface="Courier" pitchFamily="2" charset="0"/>
+              </a:rPr>
+              <a:t>2: {‘+’, ‘*’}</a:t>
+            </a:r>
+          </a:p>
+          <a:p>
+            <a:r>
+              <a:rPr lang="en-US" dirty="0">
+                <a:latin typeface="Courier" pitchFamily="2" charset="0"/>
+              </a:rPr>
+              <a:t>3: {None, ’)’}</a:t>
+            </a:r>
+            <a:br>
+              <a:rPr lang="en-US" dirty="0">
+                <a:latin typeface="Courier" pitchFamily="2" charset="0"/>
+              </a:rPr>
+            </a:br>
+            <a:r>
+              <a:rPr lang="en-US" dirty="0">
+                <a:highlight>
+                  <a:srgbClr val="FFFF00"/>
+                </a:highlight>
+                <a:latin typeface="Courier" pitchFamily="2" charset="0"/>
+              </a:rPr>
+              <a:t>4: {‘(‘}</a:t>
+            </a:r>
+          </a:p>
+          <a:p>
+            <a:r>
+              <a:rPr lang="en-US" dirty="0">
+                <a:latin typeface="Courier" pitchFamily="2" charset="0"/>
+              </a:rPr>
+              <a:t>5: {ID}</a:t>
+            </a:r>
+          </a:p>
+          <a:p>
+            <a:r>
+              <a:rPr lang="en-US" dirty="0">
+                <a:latin typeface="Courier" pitchFamily="2" charset="0"/>
+              </a:rPr>
+              <a:t>6: {‘+’}</a:t>
+            </a:r>
+          </a:p>
+          <a:p>
+            <a:r>
+              <a:rPr lang="en-US" dirty="0">
+                <a:latin typeface="Courier" pitchFamily="2" charset="0"/>
+              </a:rPr>
+              <a:t>7: {‘*’}</a:t>
+            </a:r>
+          </a:p>
+        </p:txBody>
+      </p:sp>
+      <p:sp>
+        <p:nvSpPr>
+          <p:cNvPr id="6" name="TextBox 5">
+            <a:extLst>
+              <a:ext uri="{FF2B5EF4-FFF2-40B4-BE49-F238E27FC236}">
+                <a16:creationId xmlns:a16="http://schemas.microsoft.com/office/drawing/2014/main" id="{B178840E-451F-D943-A095-834E80AE3D30}"/>
+              </a:ext>
+            </a:extLst>
+          </p:cNvPr>
+          <p:cNvSpPr txBox="1"/>
+          <p:nvPr/>
+        </p:nvSpPr>
+        <p:spPr>
+          <a:xfrm>
+            <a:off x="6350544" y="1325274"/>
+            <a:ext cx="5231856" cy="830997"/>
+          </a:xfrm>
+          <a:prstGeom prst="rect">
+            <a:avLst/>
+          </a:prstGeom>
+          <a:noFill/>
+        </p:spPr>
+        <p:txBody>
+          <a:bodyPr wrap="square" rtlCol="0">
+            <a:spAutoFit/>
+          </a:bodyPr>
+          <a:lstStyle/>
+          <a:p>
+            <a:r>
+              <a:rPr lang="en-US" sz="1600" i="1" dirty="0"/>
+              <a:t>Note: function </a:t>
+            </a:r>
+            <a:r>
+              <a:rPr lang="en-US" sz="1600" i="1" dirty="0">
+                <a:highlight>
+                  <a:srgbClr val="FFFF00"/>
+                </a:highlight>
+              </a:rPr>
+              <a:t>eat</a:t>
+            </a:r>
+            <a:r>
+              <a:rPr lang="en-US" sz="1600" i="1" dirty="0"/>
+              <a:t> must ensure that </a:t>
+            </a:r>
+            <a:r>
+              <a:rPr lang="en-US" sz="1600" i="1" dirty="0" err="1"/>
+              <a:t>to_match</a:t>
+            </a:r>
+            <a:r>
+              <a:rPr lang="en-US" sz="1600" i="1" dirty="0"/>
+              <a:t> has the expected  token ID and advances to the next token, i.e. something like this:</a:t>
+            </a:r>
+          </a:p>
+        </p:txBody>
+      </p:sp>
+      <p:sp>
+        <p:nvSpPr>
+          <p:cNvPr id="9" name="Rectangle 8">
+            <a:extLst>
+              <a:ext uri="{FF2B5EF4-FFF2-40B4-BE49-F238E27FC236}">
+                <a16:creationId xmlns:a16="http://schemas.microsoft.com/office/drawing/2014/main" id="{5567D556-71C6-8B18-A379-00B0A8C64F08}"/>
+              </a:ext>
+            </a:extLst>
+          </p:cNvPr>
+          <p:cNvSpPr/>
+          <p:nvPr/>
+        </p:nvSpPr>
+        <p:spPr>
+          <a:xfrm>
+            <a:off x="3146071" y="3208233"/>
+            <a:ext cx="4084915" cy="4031873"/>
+          </a:xfrm>
+          <a:prstGeom prst="rect">
+            <a:avLst/>
+          </a:prstGeom>
+        </p:spPr>
+        <p:txBody>
+          <a:bodyPr wrap="square">
+            <a:spAutoFit/>
+          </a:bodyPr>
+          <a:lstStyle/>
+          <a:p>
+            <a:r>
+              <a:rPr lang="en-US" sz="1600" dirty="0">
+                <a:solidFill>
+                  <a:srgbClr val="000000"/>
+                </a:solidFill>
+                <a:latin typeface="Menlo" panose="020B0609030804020204" pitchFamily="49" charset="0"/>
+              </a:rPr>
+              <a:t>    </a:t>
+            </a:r>
+            <a:r>
+              <a:rPr lang="en-US" sz="1600" b="1" dirty="0">
+                <a:solidFill>
+                  <a:srgbClr val="2EAEBB"/>
+                </a:solidFill>
+                <a:latin typeface="Menlo" panose="020B0609030804020204" pitchFamily="49" charset="0"/>
+              </a:rPr>
+              <a:t>def</a:t>
+            </a:r>
+            <a:r>
+              <a:rPr lang="en-US" sz="1600" dirty="0">
+                <a:solidFill>
+                  <a:srgbClr val="000000"/>
+                </a:solidFill>
+                <a:latin typeface="Menlo" panose="020B0609030804020204" pitchFamily="49" charset="0"/>
+              </a:rPr>
+              <a:t> </a:t>
+            </a:r>
+            <a:r>
+              <a:rPr lang="en-US" sz="1600" b="1" dirty="0" err="1">
+                <a:solidFill>
+                  <a:srgbClr val="400BD9"/>
+                </a:solidFill>
+                <a:latin typeface="Menlo" panose="020B0609030804020204" pitchFamily="49" charset="0"/>
+              </a:rPr>
+              <a:t>parse_Unit</a:t>
+            </a:r>
+            <a:r>
+              <a:rPr lang="en-US" sz="1600" dirty="0">
+                <a:solidFill>
+                  <a:srgbClr val="000000"/>
+                </a:solidFill>
+                <a:latin typeface="Menlo" panose="020B0609030804020204" pitchFamily="49" charset="0"/>
+              </a:rPr>
+              <a:t>(</a:t>
+            </a:r>
+            <a:r>
+              <a:rPr lang="en-US" sz="1600" b="1" dirty="0">
+                <a:solidFill>
+                  <a:srgbClr val="2EAEBB"/>
+                </a:solidFill>
+                <a:latin typeface="Menlo" panose="020B0609030804020204" pitchFamily="49" charset="0"/>
+              </a:rPr>
+              <a:t>self</a:t>
+            </a:r>
+            <a:r>
+              <a:rPr lang="en-US" sz="1600" dirty="0">
+                <a:solidFill>
+                  <a:srgbClr val="000000"/>
+                </a:solidFill>
+                <a:latin typeface="Menlo" panose="020B0609030804020204" pitchFamily="49" charset="0"/>
+              </a:rPr>
+              <a:t>):</a:t>
+            </a:r>
+          </a:p>
+          <a:p>
+            <a:r>
+              <a:rPr lang="en-US" sz="1600" dirty="0">
+                <a:solidFill>
+                  <a:srgbClr val="9FA01C"/>
+                </a:solidFill>
+                <a:latin typeface="Menlo" panose="020B0609030804020204" pitchFamily="49" charset="0"/>
+              </a:rPr>
+              <a:t>        </a:t>
+            </a:r>
+            <a:r>
+              <a:rPr lang="en-US" sz="1600" dirty="0" err="1">
+                <a:solidFill>
+                  <a:srgbClr val="9FA01C"/>
+                </a:solidFill>
+                <a:latin typeface="Menlo" panose="020B0609030804020204" pitchFamily="49" charset="0"/>
+              </a:rPr>
+              <a:t>token_id</a:t>
+            </a:r>
+            <a:r>
+              <a:rPr lang="en-US" sz="1600" dirty="0">
+                <a:solidFill>
+                  <a:srgbClr val="000000"/>
+                </a:solidFill>
+                <a:latin typeface="Menlo" panose="020B0609030804020204" pitchFamily="49" charset="0"/>
+              </a:rPr>
+              <a:t> = </a:t>
+            </a:r>
+            <a:r>
+              <a:rPr lang="en-US" sz="1600" dirty="0" err="1">
+                <a:solidFill>
+                  <a:srgbClr val="000000"/>
+                </a:solidFill>
+                <a:latin typeface="Menlo" panose="020B0609030804020204" pitchFamily="49" charset="0"/>
+              </a:rPr>
+              <a:t>get_token_id</a:t>
+            </a:r>
+            <a:r>
+              <a:rPr lang="en-US" sz="1600" dirty="0">
+                <a:solidFill>
+                  <a:srgbClr val="000000"/>
+                </a:solidFill>
+                <a:latin typeface="Menlo" panose="020B0609030804020204" pitchFamily="49" charset="0"/>
+              </a:rPr>
+              <a:t>(</a:t>
+            </a:r>
+            <a:r>
+              <a:rPr lang="en-US" sz="1600" b="1" dirty="0" err="1">
+                <a:solidFill>
+                  <a:srgbClr val="2EAEBB"/>
+                </a:solidFill>
+                <a:latin typeface="Menlo" panose="020B0609030804020204" pitchFamily="49" charset="0"/>
+              </a:rPr>
+              <a:t>self</a:t>
+            </a:r>
+            <a:r>
+              <a:rPr lang="en-US" sz="1600" dirty="0" err="1">
+                <a:solidFill>
+                  <a:srgbClr val="000000"/>
+                </a:solidFill>
+                <a:latin typeface="Menlo" panose="020B0609030804020204" pitchFamily="49" charset="0"/>
+              </a:rPr>
+              <a:t>.to_match</a:t>
+            </a:r>
+            <a:r>
+              <a:rPr lang="en-US" sz="1600" dirty="0">
+                <a:solidFill>
+                  <a:srgbClr val="000000"/>
+                </a:solidFill>
+                <a:latin typeface="Menlo" panose="020B0609030804020204" pitchFamily="49" charset="0"/>
+              </a:rPr>
+              <a:t>)</a:t>
+            </a:r>
+            <a:br>
+              <a:rPr lang="en-US" sz="1600" dirty="0">
+                <a:solidFill>
+                  <a:srgbClr val="000000"/>
+                </a:solidFill>
+                <a:latin typeface="Menlo" panose="020B0609030804020204" pitchFamily="49" charset="0"/>
+              </a:rPr>
+            </a:br>
+            <a:endParaRPr lang="en-US" sz="1600" dirty="0">
+              <a:solidFill>
+                <a:srgbClr val="000000"/>
+              </a:solidFill>
+              <a:latin typeface="Menlo" panose="020B0609030804020204" pitchFamily="49" charset="0"/>
+            </a:endParaRPr>
+          </a:p>
+          <a:p>
+            <a:r>
+              <a:rPr lang="en-US" sz="1600" dirty="0">
+                <a:solidFill>
+                  <a:srgbClr val="000000"/>
+                </a:solidFill>
+                <a:latin typeface="Menlo" panose="020B0609030804020204" pitchFamily="49" charset="0"/>
+              </a:rPr>
+              <a:t>        </a:t>
+            </a:r>
+            <a:r>
+              <a:rPr lang="en-US" sz="1600" dirty="0">
+                <a:solidFill>
+                  <a:srgbClr val="B42419"/>
+                </a:solidFill>
+                <a:latin typeface="Menlo" panose="020B0609030804020204" pitchFamily="49" charset="0"/>
+              </a:rPr>
+              <a:t># Unit  ::= ‘(‘ Expr ‘)’ </a:t>
+            </a:r>
+            <a:r>
+              <a:rPr lang="en-US" sz="1600" dirty="0">
+                <a:solidFill>
+                  <a:srgbClr val="000000"/>
+                </a:solidFill>
+                <a:latin typeface="Menlo" panose="020B0609030804020204" pitchFamily="49" charset="0"/>
+              </a:rPr>
+              <a:t>                       </a:t>
+            </a:r>
+          </a:p>
+          <a:p>
+            <a:r>
+              <a:rPr lang="en-US" sz="1600" dirty="0">
+                <a:solidFill>
+                  <a:srgbClr val="000000"/>
+                </a:solidFill>
+                <a:latin typeface="Menlo" panose="020B0609030804020204" pitchFamily="49" charset="0"/>
+              </a:rPr>
+              <a:t>        </a:t>
+            </a:r>
+            <a:r>
+              <a:rPr lang="en-US" sz="1600" b="1" dirty="0">
+                <a:solidFill>
+                  <a:srgbClr val="2EAEBB"/>
+                </a:solidFill>
+                <a:latin typeface="Menlo" panose="020B0609030804020204" pitchFamily="49" charset="0"/>
+              </a:rPr>
+              <a:t>if</a:t>
+            </a:r>
+            <a:r>
+              <a:rPr lang="en-US" sz="1600" dirty="0">
+                <a:solidFill>
+                  <a:srgbClr val="000000"/>
+                </a:solidFill>
+                <a:latin typeface="Menlo" panose="020B0609030804020204" pitchFamily="49" charset="0"/>
+              </a:rPr>
+              <a:t> </a:t>
+            </a:r>
+            <a:r>
+              <a:rPr lang="en-US" sz="1600" dirty="0" err="1">
+                <a:solidFill>
+                  <a:srgbClr val="000000"/>
+                </a:solidFill>
+                <a:latin typeface="Menlo" panose="020B0609030804020204" pitchFamily="49" charset="0"/>
+              </a:rPr>
+              <a:t>token_id</a:t>
+            </a:r>
+            <a:r>
+              <a:rPr lang="en-US" sz="1600" dirty="0">
+                <a:solidFill>
+                  <a:srgbClr val="000000"/>
+                </a:solidFill>
+                <a:latin typeface="Menlo" panose="020B0609030804020204" pitchFamily="49" charset="0"/>
+              </a:rPr>
+              <a:t> == </a:t>
+            </a:r>
+            <a:r>
+              <a:rPr lang="en-US" sz="1600" dirty="0">
+                <a:solidFill>
+                  <a:srgbClr val="2FB41D"/>
+                </a:solidFill>
+                <a:latin typeface="Menlo" panose="020B0609030804020204" pitchFamily="49" charset="0"/>
+              </a:rPr>
+              <a:t>"LPAR"</a:t>
+            </a:r>
+            <a:r>
+              <a:rPr lang="en-US" sz="1600" dirty="0">
+                <a:solidFill>
+                  <a:srgbClr val="000000"/>
+                </a:solidFill>
+                <a:latin typeface="Menlo" panose="020B0609030804020204" pitchFamily="49" charset="0"/>
+              </a:rPr>
+              <a:t>:</a:t>
+            </a:r>
+          </a:p>
+          <a:p>
+            <a:r>
+              <a:rPr lang="en-US" sz="1600" dirty="0">
+                <a:solidFill>
+                  <a:srgbClr val="000000"/>
+                </a:solidFill>
+                <a:latin typeface="Menlo" panose="020B0609030804020204" pitchFamily="49" charset="0"/>
+              </a:rPr>
+              <a:t>            </a:t>
+            </a:r>
+            <a:r>
+              <a:rPr lang="en-US" sz="1600" b="1" dirty="0" err="1">
+                <a:solidFill>
+                  <a:srgbClr val="2EAEBB"/>
+                </a:solidFill>
+                <a:highlight>
+                  <a:srgbClr val="FFFF00"/>
+                </a:highlight>
+                <a:latin typeface="Menlo" panose="020B0609030804020204" pitchFamily="49" charset="0"/>
+              </a:rPr>
+              <a:t>self</a:t>
+            </a:r>
+            <a:r>
+              <a:rPr lang="en-US" sz="1600" dirty="0" err="1">
+                <a:solidFill>
+                  <a:srgbClr val="000000"/>
+                </a:solidFill>
+                <a:highlight>
+                  <a:srgbClr val="FFFF00"/>
+                </a:highlight>
+                <a:latin typeface="Menlo" panose="020B0609030804020204" pitchFamily="49" charset="0"/>
+              </a:rPr>
+              <a:t>.eat</a:t>
+            </a:r>
+            <a:r>
+              <a:rPr lang="en-US" sz="1600" dirty="0">
+                <a:solidFill>
+                  <a:srgbClr val="000000"/>
+                </a:solidFill>
+                <a:highlight>
+                  <a:srgbClr val="FFFF00"/>
+                </a:highlight>
+                <a:latin typeface="Menlo" panose="020B0609030804020204" pitchFamily="49" charset="0"/>
+              </a:rPr>
+              <a:t>(</a:t>
+            </a:r>
+            <a:r>
+              <a:rPr lang="en-US" sz="1600" dirty="0">
+                <a:solidFill>
+                  <a:srgbClr val="2FB41D"/>
+                </a:solidFill>
+                <a:highlight>
+                  <a:srgbClr val="FFFF00"/>
+                </a:highlight>
+                <a:latin typeface="Menlo" panose="020B0609030804020204" pitchFamily="49" charset="0"/>
+              </a:rPr>
+              <a:t>"LPAR"</a:t>
+            </a:r>
+            <a:r>
+              <a:rPr lang="en-US" sz="1600" dirty="0">
+                <a:solidFill>
+                  <a:srgbClr val="000000"/>
+                </a:solidFill>
+                <a:highlight>
+                  <a:srgbClr val="FFFF00"/>
+                </a:highlight>
+                <a:latin typeface="Menlo" panose="020B0609030804020204" pitchFamily="49" charset="0"/>
+              </a:rPr>
+              <a:t>)</a:t>
+            </a:r>
+          </a:p>
+          <a:p>
+            <a:r>
+              <a:rPr lang="en-US" sz="1600" dirty="0">
+                <a:solidFill>
+                  <a:srgbClr val="000000"/>
+                </a:solidFill>
+                <a:latin typeface="Menlo" panose="020B0609030804020204" pitchFamily="49" charset="0"/>
+              </a:rPr>
+              <a:t>            </a:t>
+            </a:r>
+            <a:r>
+              <a:rPr lang="en-US" sz="1600" b="1" dirty="0" err="1">
+                <a:solidFill>
+                  <a:srgbClr val="2EAEBB"/>
+                </a:solidFill>
+                <a:latin typeface="Menlo" panose="020B0609030804020204" pitchFamily="49" charset="0"/>
+              </a:rPr>
+              <a:t>self</a:t>
+            </a:r>
+            <a:r>
+              <a:rPr lang="en-US" sz="1600" dirty="0" err="1">
+                <a:solidFill>
+                  <a:srgbClr val="000000"/>
+                </a:solidFill>
+                <a:latin typeface="Menlo" panose="020B0609030804020204" pitchFamily="49" charset="0"/>
+              </a:rPr>
+              <a:t>.parse_Expr</a:t>
+            </a:r>
+            <a:r>
+              <a:rPr lang="en-US" sz="1600" dirty="0">
+                <a:solidFill>
+                  <a:srgbClr val="000000"/>
+                </a:solidFill>
+                <a:latin typeface="Menlo" panose="020B0609030804020204" pitchFamily="49" charset="0"/>
+              </a:rPr>
+              <a:t>()</a:t>
+            </a:r>
+          </a:p>
+          <a:p>
+            <a:r>
+              <a:rPr lang="en-US" sz="1600" dirty="0">
+                <a:solidFill>
+                  <a:srgbClr val="000000"/>
+                </a:solidFill>
+                <a:latin typeface="Menlo" panose="020B0609030804020204" pitchFamily="49" charset="0"/>
+              </a:rPr>
+              <a:t>            </a:t>
+            </a:r>
+            <a:r>
+              <a:rPr lang="en-US" sz="1600" b="1" dirty="0" err="1">
+                <a:solidFill>
+                  <a:srgbClr val="2EAEBB"/>
+                </a:solidFill>
+                <a:highlight>
+                  <a:srgbClr val="FFFF00"/>
+                </a:highlight>
+                <a:latin typeface="Menlo" panose="020B0609030804020204" pitchFamily="49" charset="0"/>
+              </a:rPr>
+              <a:t>self</a:t>
+            </a:r>
+            <a:r>
+              <a:rPr lang="en-US" sz="1600" dirty="0" err="1">
+                <a:solidFill>
+                  <a:srgbClr val="000000"/>
+                </a:solidFill>
+                <a:highlight>
+                  <a:srgbClr val="FFFF00"/>
+                </a:highlight>
+                <a:latin typeface="Menlo" panose="020B0609030804020204" pitchFamily="49" charset="0"/>
+              </a:rPr>
+              <a:t>.eat</a:t>
+            </a:r>
+            <a:r>
+              <a:rPr lang="en-US" sz="1600" dirty="0">
+                <a:solidFill>
+                  <a:srgbClr val="000000"/>
+                </a:solidFill>
+                <a:highlight>
+                  <a:srgbClr val="FFFF00"/>
+                </a:highlight>
+                <a:latin typeface="Menlo" panose="020B0609030804020204" pitchFamily="49" charset="0"/>
+              </a:rPr>
+              <a:t>(</a:t>
+            </a:r>
+            <a:r>
+              <a:rPr lang="en-US" sz="1600" dirty="0">
+                <a:solidFill>
+                  <a:srgbClr val="2FB41D"/>
+                </a:solidFill>
+                <a:highlight>
+                  <a:srgbClr val="FFFF00"/>
+                </a:highlight>
+                <a:latin typeface="Menlo" panose="020B0609030804020204" pitchFamily="49" charset="0"/>
+              </a:rPr>
+              <a:t>"RPAR"</a:t>
+            </a:r>
+            <a:r>
+              <a:rPr lang="en-US" sz="1600" dirty="0">
+                <a:solidFill>
+                  <a:srgbClr val="000000"/>
+                </a:solidFill>
+                <a:highlight>
+                  <a:srgbClr val="FFFF00"/>
+                </a:highlight>
+                <a:latin typeface="Menlo" panose="020B0609030804020204" pitchFamily="49" charset="0"/>
+              </a:rPr>
+              <a:t>)</a:t>
+            </a:r>
+          </a:p>
+          <a:p>
+            <a:r>
+              <a:rPr lang="en-US" sz="1600" dirty="0">
+                <a:solidFill>
+                  <a:srgbClr val="000000"/>
+                </a:solidFill>
+                <a:latin typeface="Menlo" panose="020B0609030804020204" pitchFamily="49" charset="0"/>
+              </a:rPr>
+              <a:t>            </a:t>
+            </a:r>
+            <a:r>
+              <a:rPr lang="en-US" sz="1600" b="1" dirty="0">
+                <a:solidFill>
+                  <a:srgbClr val="2EAEBB"/>
+                </a:solidFill>
+                <a:latin typeface="Menlo" panose="020B0609030804020204" pitchFamily="49" charset="0"/>
+              </a:rPr>
+              <a:t>return</a:t>
+            </a:r>
+            <a:br>
+              <a:rPr lang="en-US" sz="1600" dirty="0">
+                <a:solidFill>
+                  <a:srgbClr val="000000"/>
+                </a:solidFill>
+                <a:latin typeface="Menlo" panose="020B0609030804020204" pitchFamily="49" charset="0"/>
+              </a:rPr>
+            </a:br>
+            <a:endParaRPr lang="en-US" sz="1600" dirty="0">
+              <a:solidFill>
+                <a:srgbClr val="000000"/>
+              </a:solidFill>
+              <a:latin typeface="Menlo" panose="020B0609030804020204" pitchFamily="49" charset="0"/>
+            </a:endParaRPr>
+          </a:p>
+          <a:p>
+            <a:r>
+              <a:rPr lang="en-US" sz="1600" dirty="0">
+                <a:solidFill>
+                  <a:srgbClr val="B42419"/>
+                </a:solidFill>
+                <a:latin typeface="Menlo" panose="020B0609030804020204" pitchFamily="49" charset="0"/>
+              </a:rPr>
+              <a:t>        # Unit :: = ID</a:t>
+            </a:r>
+            <a:endParaRPr lang="en-US" sz="1600" b="1" dirty="0">
+              <a:solidFill>
+                <a:srgbClr val="000000"/>
+              </a:solidFill>
+              <a:latin typeface="Menlo" panose="020B0609030804020204" pitchFamily="49" charset="0"/>
+            </a:endParaRPr>
+          </a:p>
+          <a:p>
+            <a:r>
+              <a:rPr lang="en-US" sz="1600" b="1" dirty="0">
+                <a:solidFill>
+                  <a:srgbClr val="000000"/>
+                </a:solidFill>
+                <a:latin typeface="Menlo" panose="020B0609030804020204" pitchFamily="49" charset="0"/>
+              </a:rPr>
+              <a:t>        </a:t>
+            </a:r>
+            <a:r>
+              <a:rPr lang="en-US" sz="1600" b="1" dirty="0">
+                <a:solidFill>
+                  <a:srgbClr val="2EAEBB"/>
+                </a:solidFill>
+                <a:latin typeface="Menlo" panose="020B0609030804020204" pitchFamily="49" charset="0"/>
+              </a:rPr>
+              <a:t>if</a:t>
+            </a:r>
+            <a:r>
+              <a:rPr lang="en-US" sz="1600" b="1" dirty="0">
+                <a:solidFill>
+                  <a:srgbClr val="000000"/>
+                </a:solidFill>
+                <a:latin typeface="Menlo" panose="020B0609030804020204" pitchFamily="49" charset="0"/>
+              </a:rPr>
+              <a:t> </a:t>
+            </a:r>
+            <a:r>
+              <a:rPr lang="en-US" sz="1600" b="1" dirty="0" err="1">
+                <a:solidFill>
+                  <a:srgbClr val="000000"/>
+                </a:solidFill>
+                <a:latin typeface="Menlo" panose="020B0609030804020204" pitchFamily="49" charset="0"/>
+              </a:rPr>
+              <a:t>token_id</a:t>
+            </a:r>
+            <a:r>
+              <a:rPr lang="en-US" sz="1600" b="1" dirty="0">
+                <a:solidFill>
+                  <a:srgbClr val="000000"/>
+                </a:solidFill>
+                <a:latin typeface="Menlo" panose="020B0609030804020204" pitchFamily="49" charset="0"/>
+              </a:rPr>
+              <a:t> == </a:t>
+            </a:r>
+            <a:r>
+              <a:rPr lang="en-US" sz="1600" b="1" dirty="0">
+                <a:solidFill>
+                  <a:srgbClr val="2FB41D"/>
+                </a:solidFill>
+                <a:latin typeface="Menlo" panose="020B0609030804020204" pitchFamily="49" charset="0"/>
+              </a:rPr>
+              <a:t>"ID"</a:t>
+            </a:r>
+            <a:r>
+              <a:rPr lang="en-US" sz="1600" b="1" dirty="0">
+                <a:solidFill>
+                  <a:srgbClr val="000000"/>
+                </a:solidFill>
+                <a:latin typeface="Menlo" panose="020B0609030804020204" pitchFamily="49" charset="0"/>
+              </a:rPr>
+              <a:t>:</a:t>
+            </a:r>
+          </a:p>
+          <a:p>
+            <a:r>
+              <a:rPr lang="en-US" sz="1600" b="1" dirty="0">
+                <a:solidFill>
+                  <a:srgbClr val="000000"/>
+                </a:solidFill>
+                <a:latin typeface="Menlo" panose="020B0609030804020204" pitchFamily="49" charset="0"/>
+              </a:rPr>
+              <a:t>            </a:t>
+            </a:r>
+            <a:r>
+              <a:rPr lang="en-US" sz="1600" b="1" dirty="0" err="1">
+                <a:solidFill>
+                  <a:srgbClr val="2EAEBB"/>
+                </a:solidFill>
+                <a:highlight>
+                  <a:srgbClr val="FFFF00"/>
+                </a:highlight>
+                <a:latin typeface="Menlo" panose="020B0609030804020204" pitchFamily="49" charset="0"/>
+              </a:rPr>
+              <a:t>self</a:t>
+            </a:r>
+            <a:r>
+              <a:rPr lang="en-US" sz="1600" b="1" dirty="0" err="1">
+                <a:solidFill>
+                  <a:srgbClr val="000000"/>
+                </a:solidFill>
+                <a:highlight>
+                  <a:srgbClr val="FFFF00"/>
+                </a:highlight>
+                <a:latin typeface="Menlo" panose="020B0609030804020204" pitchFamily="49" charset="0"/>
+              </a:rPr>
+              <a:t>.eat</a:t>
+            </a:r>
+            <a:r>
+              <a:rPr lang="en-US" sz="1600" b="1" dirty="0">
+                <a:solidFill>
+                  <a:srgbClr val="000000"/>
+                </a:solidFill>
+                <a:highlight>
+                  <a:srgbClr val="FFFF00"/>
+                </a:highlight>
+                <a:latin typeface="Menlo" panose="020B0609030804020204" pitchFamily="49" charset="0"/>
+              </a:rPr>
+              <a:t>(</a:t>
+            </a:r>
+            <a:r>
+              <a:rPr lang="en-US" sz="1600" b="1" dirty="0">
+                <a:solidFill>
+                  <a:srgbClr val="2FB41D"/>
+                </a:solidFill>
+                <a:highlight>
+                  <a:srgbClr val="FFFF00"/>
+                </a:highlight>
+                <a:latin typeface="Menlo" panose="020B0609030804020204" pitchFamily="49" charset="0"/>
+              </a:rPr>
+              <a:t>"ID"</a:t>
+            </a:r>
+            <a:r>
+              <a:rPr lang="en-US" sz="1600" b="1" dirty="0">
+                <a:solidFill>
+                  <a:srgbClr val="000000"/>
+                </a:solidFill>
+                <a:highlight>
+                  <a:srgbClr val="FFFF00"/>
+                </a:highlight>
+                <a:latin typeface="Menlo" panose="020B0609030804020204" pitchFamily="49" charset="0"/>
+              </a:rPr>
+              <a:t>)</a:t>
+            </a:r>
+          </a:p>
+          <a:p>
+            <a:r>
+              <a:rPr lang="en-US" sz="1600" dirty="0">
+                <a:solidFill>
+                  <a:srgbClr val="000000"/>
+                </a:solidFill>
+                <a:latin typeface="Menlo" panose="020B0609030804020204" pitchFamily="49" charset="0"/>
+              </a:rPr>
+              <a:t>            </a:t>
+            </a:r>
+            <a:r>
+              <a:rPr lang="en-US" sz="1600" b="1" dirty="0">
+                <a:solidFill>
+                  <a:srgbClr val="2EAEBB"/>
+                </a:solidFill>
+                <a:latin typeface="Menlo" panose="020B0609030804020204" pitchFamily="49" charset="0"/>
+              </a:rPr>
+              <a:t>return</a:t>
+            </a:r>
+            <a:endParaRPr lang="en-US" sz="1600" dirty="0">
+              <a:solidFill>
+                <a:srgbClr val="000000"/>
+              </a:solidFill>
+              <a:latin typeface="Menlo" panose="020B0609030804020204" pitchFamily="49" charset="0"/>
+            </a:endParaRPr>
+          </a:p>
+          <a:p>
+            <a:endParaRPr lang="en-US" sz="1600" dirty="0">
+              <a:solidFill>
+                <a:srgbClr val="000000"/>
+              </a:solidFill>
+              <a:latin typeface="Menlo" panose="020B0609030804020204" pitchFamily="49" charset="0"/>
+            </a:endParaRPr>
+          </a:p>
+          <a:p>
+            <a:r>
+              <a:rPr lang="en-US" sz="1600" dirty="0">
+                <a:solidFill>
+                  <a:srgbClr val="000000"/>
+                </a:solidFill>
+                <a:latin typeface="Menlo" panose="020B0609030804020204" pitchFamily="49" charset="0"/>
+              </a:rPr>
+              <a:t>       </a:t>
+            </a:r>
+            <a:endParaRPr lang="en-US" sz="1600" dirty="0">
+              <a:solidFill>
+                <a:srgbClr val="000000"/>
+              </a:solidFill>
+              <a:effectLst/>
+              <a:latin typeface="Menlo" panose="020B0609030804020204" pitchFamily="49" charset="0"/>
+            </a:endParaRPr>
+          </a:p>
+        </p:txBody>
+      </p:sp>
+      <p:sp>
+        <p:nvSpPr>
+          <p:cNvPr id="11" name="TextBox 10">
+            <a:extLst>
+              <a:ext uri="{FF2B5EF4-FFF2-40B4-BE49-F238E27FC236}">
+                <a16:creationId xmlns:a16="http://schemas.microsoft.com/office/drawing/2014/main" id="{70753AE9-02C2-C5B0-0278-257DC208F0FB}"/>
+              </a:ext>
+            </a:extLst>
+          </p:cNvPr>
+          <p:cNvSpPr txBox="1"/>
+          <p:nvPr/>
+        </p:nvSpPr>
+        <p:spPr>
+          <a:xfrm>
+            <a:off x="6637415" y="2231636"/>
+            <a:ext cx="5231856" cy="2062103"/>
+          </a:xfrm>
+          <a:prstGeom prst="rect">
+            <a:avLst/>
+          </a:prstGeom>
+          <a:noFill/>
+        </p:spPr>
+        <p:txBody>
+          <a:bodyPr wrap="square">
+            <a:spAutoFit/>
+          </a:bodyPr>
+          <a:lstStyle/>
+          <a:p>
+            <a:r>
+              <a:rPr lang="en-US" sz="1600" dirty="0">
+                <a:highlight>
+                  <a:srgbClr val="FFFF00"/>
+                </a:highlight>
+              </a:rPr>
+              <a:t>def eat(self, </a:t>
+            </a:r>
+            <a:r>
+              <a:rPr lang="en-US" sz="1600" dirty="0" err="1">
+                <a:highlight>
+                  <a:srgbClr val="FFFF00"/>
+                </a:highlight>
+              </a:rPr>
+              <a:t>expected_token</a:t>
+            </a:r>
+            <a:r>
+              <a:rPr lang="en-US" sz="1600" dirty="0">
+                <a:highlight>
+                  <a:srgbClr val="FFFF00"/>
+                </a:highlight>
+              </a:rPr>
+              <a:t>):</a:t>
+            </a:r>
+          </a:p>
+          <a:p>
+            <a:r>
+              <a:rPr lang="en-US" sz="1600" dirty="0"/>
+              <a:t>    if </a:t>
+            </a:r>
+            <a:r>
+              <a:rPr lang="en-US" sz="1600" dirty="0" err="1"/>
+              <a:t>self.to_match</a:t>
+            </a:r>
+            <a:r>
+              <a:rPr lang="en-US" sz="1600" dirty="0"/>
+              <a:t> == </a:t>
+            </a:r>
+            <a:r>
+              <a:rPr lang="en-US" sz="1600" dirty="0" err="1"/>
+              <a:t>expected_token</a:t>
+            </a:r>
+            <a:r>
+              <a:rPr lang="en-US" sz="1600" dirty="0"/>
+              <a:t>:</a:t>
+            </a:r>
+          </a:p>
+          <a:p>
+            <a:r>
+              <a:rPr lang="en-US" sz="1600" dirty="0"/>
+              <a:t>        </a:t>
+            </a:r>
+            <a:r>
+              <a:rPr lang="en-US" sz="1600" dirty="0" err="1"/>
+              <a:t>self.advance</a:t>
+            </a:r>
+            <a:r>
+              <a:rPr lang="en-US" sz="1600" dirty="0"/>
+              <a:t>()  # move to the next token</a:t>
+            </a:r>
+          </a:p>
+          <a:p>
+            <a:r>
+              <a:rPr lang="en-US" sz="1600" dirty="0"/>
+              <a:t>    else:</a:t>
+            </a:r>
+          </a:p>
+          <a:p>
+            <a:r>
+              <a:rPr lang="en-US" sz="1600" dirty="0"/>
+              <a:t>        </a:t>
+            </a:r>
+            <a:r>
+              <a:rPr lang="en-US" sz="1600" dirty="0">
+                <a:highlight>
+                  <a:srgbClr val="FFFF00"/>
+                </a:highlight>
+              </a:rPr>
+              <a:t>raise </a:t>
+            </a:r>
+            <a:r>
+              <a:rPr lang="en-US" sz="1600" dirty="0" err="1">
+                <a:highlight>
+                  <a:srgbClr val="FFFF00"/>
+                </a:highlight>
+              </a:rPr>
+              <a:t>ParserException</a:t>
+            </a:r>
+            <a:r>
+              <a:rPr lang="en-US" sz="1600" dirty="0"/>
+              <a:t>(</a:t>
+            </a:r>
+          </a:p>
+          <a:p>
+            <a:r>
+              <a:rPr lang="en-US" sz="1600" dirty="0"/>
+              <a:t>                             </a:t>
+            </a:r>
+            <a:r>
+              <a:rPr lang="en-US" sz="1600" dirty="0" err="1"/>
+              <a:t>self.current_line</a:t>
+            </a:r>
+            <a:r>
+              <a:rPr lang="en-US" sz="1600" dirty="0"/>
+              <a:t>,       </a:t>
+            </a:r>
+            <a:r>
+              <a:rPr lang="en-US" sz="1600" dirty="0">
+                <a:solidFill>
+                  <a:srgbClr val="FF0000"/>
+                </a:solidFill>
+              </a:rPr>
+              <a:t># line# (for you to do)</a:t>
+            </a:r>
+          </a:p>
+          <a:p>
+            <a:r>
+              <a:rPr lang="en-US" sz="1600" dirty="0"/>
+              <a:t>                              </a:t>
+            </a:r>
+            <a:r>
+              <a:rPr lang="en-US" sz="1600" dirty="0" err="1"/>
+              <a:t>self.to_match</a:t>
+            </a:r>
+            <a:r>
+              <a:rPr lang="en-US" sz="1600" dirty="0"/>
+              <a:t>,           </a:t>
+            </a:r>
+            <a:r>
+              <a:rPr lang="en-US" sz="1600" dirty="0">
+                <a:solidFill>
+                  <a:srgbClr val="FF0000"/>
+                </a:solidFill>
+              </a:rPr>
+              <a:t># observed token</a:t>
+            </a:r>
+          </a:p>
+          <a:p>
+            <a:r>
+              <a:rPr lang="en-US" sz="1600" dirty="0"/>
+              <a:t>                              [</a:t>
+            </a:r>
+            <a:r>
+              <a:rPr lang="en-US" sz="1600" dirty="0" err="1"/>
+              <a:t>expected_token</a:t>
+            </a:r>
+            <a:r>
+              <a:rPr lang="en-US" sz="1600" dirty="0"/>
+              <a:t>])    </a:t>
+            </a:r>
+            <a:r>
+              <a:rPr lang="en-US" sz="1600" dirty="0">
+                <a:solidFill>
+                  <a:srgbClr val="FF0000"/>
+                </a:solidFill>
+              </a:rPr>
+              <a:t># LPAR or RPAR or ID)</a:t>
+            </a:r>
+          </a:p>
+        </p:txBody>
+      </p:sp>
+      <p:sp>
+        <p:nvSpPr>
+          <p:cNvPr id="13" name="TextBox 12">
+            <a:extLst>
+              <a:ext uri="{FF2B5EF4-FFF2-40B4-BE49-F238E27FC236}">
+                <a16:creationId xmlns:a16="http://schemas.microsoft.com/office/drawing/2014/main" id="{D05F6A23-B194-B66B-024E-53EF98D1EF15}"/>
+              </a:ext>
+            </a:extLst>
+          </p:cNvPr>
+          <p:cNvSpPr txBox="1"/>
+          <p:nvPr/>
+        </p:nvSpPr>
+        <p:spPr>
+          <a:xfrm>
+            <a:off x="6266330" y="4369104"/>
+            <a:ext cx="5737412" cy="2031325"/>
+          </a:xfrm>
+          <a:prstGeom prst="rect">
+            <a:avLst/>
+          </a:prstGeom>
+          <a:noFill/>
+        </p:spPr>
+        <p:txBody>
+          <a:bodyPr wrap="square" rtlCol="0">
+            <a:spAutoFit/>
+          </a:bodyPr>
+          <a:lstStyle/>
+          <a:p>
+            <a:r>
+              <a:rPr lang="en-US" sz="1400" dirty="0"/>
+              <a:t>class </a:t>
+            </a:r>
+            <a:r>
+              <a:rPr lang="en-US" sz="1400" dirty="0" err="1"/>
+              <a:t>ParserException</a:t>
+            </a:r>
+            <a:r>
+              <a:rPr lang="en-US" sz="1400" dirty="0"/>
+              <a:t>(Exception):</a:t>
+            </a:r>
+          </a:p>
+          <a:p>
+            <a:r>
+              <a:rPr lang="en-US" sz="1400" dirty="0"/>
+              <a:t>    def __</a:t>
+            </a:r>
+            <a:r>
+              <a:rPr lang="en-US" sz="1400" dirty="0" err="1"/>
+              <a:t>init</a:t>
+            </a:r>
+            <a:r>
+              <a:rPr lang="en-US" sz="1400" dirty="0"/>
+              <a:t>__(self, </a:t>
+            </a:r>
+            <a:r>
+              <a:rPr lang="en-US" sz="1400" dirty="0" err="1"/>
+              <a:t>line_number</a:t>
+            </a:r>
+            <a:r>
+              <a:rPr lang="en-US" sz="1400" dirty="0"/>
+              <a:t>, </a:t>
+            </a:r>
+            <a:r>
+              <a:rPr lang="en-US" sz="1400" dirty="0" err="1"/>
+              <a:t>found_token</a:t>
+            </a:r>
+            <a:r>
+              <a:rPr lang="en-US" sz="1400" dirty="0"/>
+              <a:t>, </a:t>
+            </a:r>
+            <a:r>
+              <a:rPr lang="en-US" sz="1400" dirty="0" err="1"/>
+              <a:t>expected_tokens</a:t>
+            </a:r>
+            <a:r>
+              <a:rPr lang="en-US" sz="1400" dirty="0"/>
+              <a:t>):</a:t>
+            </a:r>
+          </a:p>
+          <a:p>
+            <a:r>
+              <a:rPr lang="en-US" sz="1400" dirty="0"/>
+              <a:t>        </a:t>
+            </a:r>
+            <a:r>
+              <a:rPr lang="en-US" sz="1400" dirty="0" err="1"/>
+              <a:t>self.line_number</a:t>
+            </a:r>
+            <a:r>
+              <a:rPr lang="en-US" sz="1400" dirty="0"/>
+              <a:t> = </a:t>
+            </a:r>
+            <a:r>
+              <a:rPr lang="en-US" sz="1400" dirty="0" err="1"/>
+              <a:t>line_number</a:t>
+            </a:r>
+            <a:endParaRPr lang="en-US" sz="1400" dirty="0"/>
+          </a:p>
+          <a:p>
+            <a:r>
+              <a:rPr lang="en-US" sz="1400" dirty="0"/>
+              <a:t>        </a:t>
+            </a:r>
+            <a:r>
+              <a:rPr lang="en-US" sz="1400" dirty="0" err="1"/>
+              <a:t>self.found_token</a:t>
+            </a:r>
+            <a:r>
+              <a:rPr lang="en-US" sz="1400" dirty="0"/>
+              <a:t> = </a:t>
+            </a:r>
+            <a:r>
+              <a:rPr lang="en-US" sz="1400" dirty="0" err="1"/>
+              <a:t>found_token</a:t>
+            </a:r>
+            <a:endParaRPr lang="en-US" sz="1400" dirty="0"/>
+          </a:p>
+          <a:p>
+            <a:r>
+              <a:rPr lang="en-US" sz="1400" dirty="0"/>
+              <a:t>        </a:t>
+            </a:r>
+            <a:r>
+              <a:rPr lang="en-US" sz="1400" dirty="0" err="1"/>
+              <a:t>self.expected_tokens</a:t>
+            </a:r>
+            <a:r>
+              <a:rPr lang="en-US" sz="1400" dirty="0"/>
+              <a:t> = </a:t>
+            </a:r>
+            <a:r>
+              <a:rPr lang="en-US" sz="1400" dirty="0" err="1"/>
+              <a:t>expected_tokens</a:t>
+            </a:r>
+            <a:endParaRPr lang="en-US" sz="1400" dirty="0"/>
+          </a:p>
+          <a:p>
+            <a:r>
+              <a:rPr lang="en-US" sz="1400" dirty="0"/>
+              <a:t>        # Create a readable error message</a:t>
+            </a:r>
+          </a:p>
+          <a:p>
+            <a:r>
+              <a:rPr lang="en-US" sz="1400" dirty="0"/>
+              <a:t>        message = (</a:t>
+            </a:r>
+            <a:r>
+              <a:rPr lang="en-US" sz="1400" dirty="0" err="1"/>
+              <a:t>f"Parse</a:t>
+            </a:r>
+            <a:r>
+              <a:rPr lang="en-US" sz="1400" dirty="0"/>
+              <a:t> error on line {</a:t>
+            </a:r>
+            <a:r>
+              <a:rPr lang="en-US" sz="1400" dirty="0" err="1"/>
+              <a:t>line_number</a:t>
+            </a:r>
+            <a:r>
+              <a:rPr lang="en-US" sz="1400" dirty="0"/>
+              <a:t>}: found '{</a:t>
+            </a:r>
+            <a:r>
+              <a:rPr lang="en-US" sz="1400" dirty="0" err="1"/>
+              <a:t>found_token</a:t>
+            </a:r>
+            <a:r>
+              <a:rPr lang="en-US" sz="1400" dirty="0"/>
+              <a:t>}', "</a:t>
+            </a:r>
+          </a:p>
+          <a:p>
+            <a:r>
+              <a:rPr lang="en-US" sz="1400" dirty="0"/>
+              <a:t>                   </a:t>
+            </a:r>
+            <a:r>
+              <a:rPr lang="en-US" sz="1400" dirty="0" err="1"/>
+              <a:t>f"expected</a:t>
+            </a:r>
+            <a:r>
+              <a:rPr lang="en-US" sz="1400" dirty="0"/>
+              <a:t> one of {</a:t>
+            </a:r>
+            <a:r>
+              <a:rPr lang="en-US" sz="1400" dirty="0" err="1"/>
+              <a:t>expected_tokens</a:t>
+            </a:r>
+            <a:r>
+              <a:rPr lang="en-US" sz="1400" dirty="0"/>
+              <a:t>}")</a:t>
+            </a:r>
+          </a:p>
+          <a:p>
+            <a:r>
+              <a:rPr lang="en-US" sz="1400" dirty="0"/>
+              <a:t>        super().__</a:t>
+            </a:r>
+            <a:r>
+              <a:rPr lang="en-US" sz="1400" dirty="0" err="1"/>
+              <a:t>init</a:t>
+            </a:r>
+            <a:r>
+              <a:rPr lang="en-US" sz="1400" dirty="0"/>
+              <a:t>__(message)</a:t>
+            </a:r>
+          </a:p>
+        </p:txBody>
+      </p:sp>
+    </p:spTree>
+    <p:extLst>
+      <p:ext uri="{BB962C8B-B14F-4D97-AF65-F5344CB8AC3E}">
+        <p14:creationId xmlns:p14="http://schemas.microsoft.com/office/powerpoint/2010/main" val="2150285979"/>
+      </p:ext>
+    </p:extLst>
+  </p:cSld>
+  <p:clrMapOvr>
+    <a:masterClrMapping/>
+  </p:clrMapOvr>
+</p:sld>
+</file>
+
+<file path=ppt/slides/slide77.xml><?xml version="1.0" encoding="utf-8"?>
+<p:sld xmlns:a="http://schemas.openxmlformats.org/drawingml/2006/main" xmlns:r="http://schemas.openxmlformats.org/officeDocument/2006/relationships" xmlns:p="http://schemas.openxmlformats.org/presentationml/2006/main">
+  <p:cSld>
+    <p:spTree>
+      <p:nvGrpSpPr>
+        <p:cNvPr id="1" name=""/>
+        <p:cNvGrpSpPr/>
+        <p:nvPr/>
+      </p:nvGrpSpPr>
+      <p:grpSpPr>
+        <a:xfrm>
+          <a:off x="0" y="0"/>
+          <a:ext cx="0" cy="0"/>
+          <a:chOff x="0" y="0"/>
+          <a:chExt cx="0" cy="0"/>
+        </a:xfrm>
+      </p:grpSpPr>
+      <p:sp>
+        <p:nvSpPr>
+          <p:cNvPr id="2" name="Title 1">
+            <a:extLst>
+              <a:ext uri="{FF2B5EF4-FFF2-40B4-BE49-F238E27FC236}">
+                <a16:creationId xmlns:a16="http://schemas.microsoft.com/office/drawing/2014/main" id="{8E411F96-7461-874D-8EA3-B6DFAA688889}"/>
+              </a:ext>
+            </a:extLst>
+          </p:cNvPr>
+          <p:cNvSpPr>
+            <a:spLocks noGrp="1"/>
+          </p:cNvSpPr>
+          <p:nvPr>
+            <p:ph type="title"/>
+          </p:nvPr>
+        </p:nvSpPr>
+        <p:spPr/>
+        <p:txBody>
+          <a:bodyPr/>
+          <a:lstStyle/>
+          <a:p>
+            <a:r>
+              <a:rPr lang="en-US" dirty="0"/>
+              <a:t>Let’s look at the grammar</a:t>
+            </a:r>
+          </a:p>
+        </p:txBody>
+      </p:sp>
+      <p:sp>
+        <p:nvSpPr>
+          <p:cNvPr id="4" name="Rectangle 3">
+            <a:extLst>
+              <a:ext uri="{FF2B5EF4-FFF2-40B4-BE49-F238E27FC236}">
+                <a16:creationId xmlns:a16="http://schemas.microsoft.com/office/drawing/2014/main" id="{C95AD811-DA94-934C-A22D-0CC1576CD299}"/>
+              </a:ext>
+            </a:extLst>
+          </p:cNvPr>
+          <p:cNvSpPr/>
+          <p:nvPr/>
+        </p:nvSpPr>
+        <p:spPr>
+          <a:xfrm>
+            <a:off x="838200" y="1507736"/>
+            <a:ext cx="3911601" cy="2031325"/>
+          </a:xfrm>
+          <a:prstGeom prst="rect">
+            <a:avLst/>
+          </a:prstGeom>
+        </p:spPr>
+        <p:txBody>
+          <a:bodyPr wrap="square">
+            <a:spAutoFit/>
+          </a:bodyPr>
+          <a:lstStyle/>
+          <a:p>
+            <a:r>
+              <a:rPr lang="en-US" dirty="0">
+                <a:latin typeface="Courier" pitchFamily="2" charset="0"/>
+              </a:rPr>
+              <a:t>1: Expr  ::= Unit Expr2</a:t>
+            </a:r>
+          </a:p>
+          <a:p>
+            <a:r>
+              <a:rPr lang="en-US" dirty="0">
+                <a:latin typeface="Courier" pitchFamily="2" charset="0"/>
+              </a:rPr>
+              <a:t>2: Expr2 ::= Op Unit Expr2</a:t>
+            </a:r>
+          </a:p>
+          <a:p>
+            <a:r>
+              <a:rPr lang="en-US" dirty="0">
+                <a:latin typeface="Courier" pitchFamily="2" charset="0"/>
+              </a:rPr>
+              <a:t>3:       | “”</a:t>
+            </a:r>
+            <a:br>
+              <a:rPr lang="en-US" dirty="0">
+                <a:latin typeface="Courier" pitchFamily="2" charset="0"/>
+              </a:rPr>
+            </a:br>
+            <a:r>
+              <a:rPr lang="en-US" dirty="0">
+                <a:latin typeface="Courier" pitchFamily="2" charset="0"/>
+              </a:rPr>
+              <a:t>4: Unit  ::= ‘(‘ Expr ‘)’</a:t>
+            </a:r>
+          </a:p>
+          <a:p>
+            <a:r>
+              <a:rPr lang="en-US" dirty="0">
+                <a:latin typeface="Courier" pitchFamily="2" charset="0"/>
+              </a:rPr>
+              <a:t>5:       |    ID</a:t>
+            </a:r>
+          </a:p>
+          <a:p>
+            <a:r>
+              <a:rPr lang="en-US" dirty="0">
+                <a:highlight>
+                  <a:srgbClr val="FFFF00"/>
+                </a:highlight>
+                <a:latin typeface="Courier" pitchFamily="2" charset="0"/>
+              </a:rPr>
+              <a:t>6: Op    ::= ‘+’</a:t>
+            </a:r>
+          </a:p>
+          <a:p>
+            <a:r>
+              <a:rPr lang="en-US" dirty="0">
+                <a:highlight>
+                  <a:srgbClr val="FFFF00"/>
+                </a:highlight>
+                <a:latin typeface="Courier" pitchFamily="2" charset="0"/>
+              </a:rPr>
+              <a:t>7:       |   ‘*’</a:t>
+            </a:r>
+          </a:p>
+        </p:txBody>
+      </p:sp>
+      <p:sp>
+        <p:nvSpPr>
+          <p:cNvPr id="8" name="TextBox 7">
+            <a:extLst>
+              <a:ext uri="{FF2B5EF4-FFF2-40B4-BE49-F238E27FC236}">
+                <a16:creationId xmlns:a16="http://schemas.microsoft.com/office/drawing/2014/main" id="{436689AF-BA26-3347-BA19-B7CDF8BA594D}"/>
+              </a:ext>
+            </a:extLst>
+          </p:cNvPr>
+          <p:cNvSpPr txBox="1"/>
+          <p:nvPr/>
+        </p:nvSpPr>
+        <p:spPr>
+          <a:xfrm>
+            <a:off x="6764866" y="1585480"/>
+            <a:ext cx="2571986" cy="369332"/>
+          </a:xfrm>
+          <a:prstGeom prst="rect">
+            <a:avLst/>
+          </a:prstGeom>
+          <a:noFill/>
+        </p:spPr>
+        <p:txBody>
+          <a:bodyPr wrap="none" rtlCol="0">
+            <a:spAutoFit/>
+          </a:bodyPr>
+          <a:lstStyle/>
+          <a:p>
+            <a:r>
+              <a:rPr lang="en-US" i="1" dirty="0"/>
+              <a:t>How do we parse an Op? </a:t>
+            </a:r>
+          </a:p>
+        </p:txBody>
+      </p:sp>
+      <p:sp>
+        <p:nvSpPr>
+          <p:cNvPr id="5" name="Rectangle 4">
+            <a:extLst>
+              <a:ext uri="{FF2B5EF4-FFF2-40B4-BE49-F238E27FC236}">
+                <a16:creationId xmlns:a16="http://schemas.microsoft.com/office/drawing/2014/main" id="{8C35DCA6-16D2-F54F-A22A-3EFA1E6D8A47}"/>
+              </a:ext>
+            </a:extLst>
+          </p:cNvPr>
+          <p:cNvSpPr/>
+          <p:nvPr/>
+        </p:nvSpPr>
+        <p:spPr>
+          <a:xfrm>
+            <a:off x="838200" y="4184551"/>
+            <a:ext cx="2275544" cy="2308324"/>
+          </a:xfrm>
+          <a:prstGeom prst="rect">
+            <a:avLst/>
+          </a:prstGeom>
+        </p:spPr>
+        <p:txBody>
+          <a:bodyPr wrap="square">
+            <a:spAutoFit/>
+          </a:bodyPr>
+          <a:lstStyle/>
+          <a:p>
+            <a:r>
+              <a:rPr lang="en-US" dirty="0">
+                <a:latin typeface="Courier" pitchFamily="2" charset="0"/>
+              </a:rPr>
+              <a:t>First+ sets:</a:t>
+            </a:r>
+            <a:br>
+              <a:rPr lang="en-US" dirty="0">
+                <a:latin typeface="Courier" pitchFamily="2" charset="0"/>
+              </a:rPr>
+            </a:br>
+            <a:r>
+              <a:rPr lang="en-US" dirty="0">
+                <a:latin typeface="Courier" pitchFamily="2" charset="0"/>
+              </a:rPr>
+              <a:t>1: {‘(‘, ID}</a:t>
+            </a:r>
+          </a:p>
+          <a:p>
+            <a:r>
+              <a:rPr lang="en-US" dirty="0">
+                <a:latin typeface="Courier" pitchFamily="2" charset="0"/>
+              </a:rPr>
+              <a:t>2: {‘+’, ‘*’}</a:t>
+            </a:r>
+          </a:p>
+          <a:p>
+            <a:r>
+              <a:rPr lang="en-US" dirty="0">
+                <a:latin typeface="Courier" pitchFamily="2" charset="0"/>
+              </a:rPr>
+              <a:t>3: {None, ’)’}</a:t>
+            </a:r>
+            <a:br>
+              <a:rPr lang="en-US" dirty="0">
+                <a:latin typeface="Courier" pitchFamily="2" charset="0"/>
+              </a:rPr>
+            </a:br>
+            <a:r>
+              <a:rPr lang="en-US" dirty="0">
+                <a:latin typeface="Courier" pitchFamily="2" charset="0"/>
+              </a:rPr>
+              <a:t>4: {‘(‘}</a:t>
+            </a:r>
+          </a:p>
+          <a:p>
+            <a:r>
+              <a:rPr lang="en-US" dirty="0">
+                <a:latin typeface="Courier" pitchFamily="2" charset="0"/>
+              </a:rPr>
+              <a:t>5: {ID}</a:t>
+            </a:r>
+          </a:p>
+          <a:p>
+            <a:r>
+              <a:rPr lang="en-US" dirty="0">
+                <a:latin typeface="Courier" pitchFamily="2" charset="0"/>
+              </a:rPr>
+              <a:t>6: {‘+’}</a:t>
+            </a:r>
+          </a:p>
+          <a:p>
+            <a:r>
+              <a:rPr lang="en-US" dirty="0">
+                <a:latin typeface="Courier" pitchFamily="2" charset="0"/>
+              </a:rPr>
+              <a:t>7: {‘*’}</a:t>
+            </a:r>
+          </a:p>
+        </p:txBody>
+      </p:sp>
+    </p:spTree>
+    <p:extLst>
+      <p:ext uri="{BB962C8B-B14F-4D97-AF65-F5344CB8AC3E}">
+        <p14:creationId xmlns:p14="http://schemas.microsoft.com/office/powerpoint/2010/main" val="1672718596"/>
+      </p:ext>
+    </p:extLst>
+  </p:cSld>
+  <p:clrMapOvr>
+    <a:masterClrMapping/>
+  </p:clrMapOvr>
+</p:sld>
+</file>
+
+<file path=ppt/slides/slide78.xml><?xml version="1.0" encoding="utf-8"?>
+<p:sld xmlns:a="http://schemas.openxmlformats.org/drawingml/2006/main" xmlns:r="http://schemas.openxmlformats.org/officeDocument/2006/relationships" xmlns:p="http://schemas.openxmlformats.org/presentationml/2006/main">
+  <p:cSld>
+    <p:spTree>
+      <p:nvGrpSpPr>
+        <p:cNvPr id="1" name=""/>
+        <p:cNvGrpSpPr/>
+        <p:nvPr/>
+      </p:nvGrpSpPr>
+      <p:grpSpPr>
+        <a:xfrm>
+          <a:off x="0" y="0"/>
+          <a:ext cx="0" cy="0"/>
+          <a:chOff x="0" y="0"/>
+          <a:chExt cx="0" cy="0"/>
+        </a:xfrm>
+      </p:grpSpPr>
+      <p:sp>
+        <p:nvSpPr>
+          <p:cNvPr id="2" name="Title 1">
+            <a:extLst>
+              <a:ext uri="{FF2B5EF4-FFF2-40B4-BE49-F238E27FC236}">
+                <a16:creationId xmlns:a16="http://schemas.microsoft.com/office/drawing/2014/main" id="{8E411F96-7461-874D-8EA3-B6DFAA688889}"/>
+              </a:ext>
+            </a:extLst>
+          </p:cNvPr>
+          <p:cNvSpPr>
+            <a:spLocks noGrp="1"/>
+          </p:cNvSpPr>
+          <p:nvPr>
+            <p:ph type="title"/>
+          </p:nvPr>
+        </p:nvSpPr>
+        <p:spPr/>
+        <p:txBody>
+          <a:bodyPr/>
+          <a:lstStyle/>
+          <a:p>
+            <a:r>
+              <a:rPr lang="en-US" dirty="0"/>
+              <a:t>Let’s look at the grammar</a:t>
+            </a:r>
+          </a:p>
+        </p:txBody>
+      </p:sp>
+      <p:sp>
+        <p:nvSpPr>
+          <p:cNvPr id="4" name="Rectangle 3">
+            <a:extLst>
+              <a:ext uri="{FF2B5EF4-FFF2-40B4-BE49-F238E27FC236}">
+                <a16:creationId xmlns:a16="http://schemas.microsoft.com/office/drawing/2014/main" id="{C95AD811-DA94-934C-A22D-0CC1576CD299}"/>
+              </a:ext>
+            </a:extLst>
+          </p:cNvPr>
+          <p:cNvSpPr/>
+          <p:nvPr/>
+        </p:nvSpPr>
+        <p:spPr>
+          <a:xfrm>
+            <a:off x="838200" y="1507736"/>
+            <a:ext cx="3911601" cy="2031325"/>
+          </a:xfrm>
+          <a:prstGeom prst="rect">
+            <a:avLst/>
+          </a:prstGeom>
+        </p:spPr>
+        <p:txBody>
+          <a:bodyPr wrap="square">
+            <a:spAutoFit/>
+          </a:bodyPr>
+          <a:lstStyle/>
+          <a:p>
+            <a:r>
+              <a:rPr lang="en-US" dirty="0">
+                <a:latin typeface="Courier" pitchFamily="2" charset="0"/>
+              </a:rPr>
+              <a:t>1: Expr  ::= Unit Expr2</a:t>
+            </a:r>
+          </a:p>
+          <a:p>
+            <a:r>
+              <a:rPr lang="en-US" dirty="0">
+                <a:latin typeface="Courier" pitchFamily="2" charset="0"/>
+              </a:rPr>
+              <a:t>2: Expr2 ::= Op Unit Expr2</a:t>
+            </a:r>
+          </a:p>
+          <a:p>
+            <a:r>
+              <a:rPr lang="en-US" dirty="0">
+                <a:latin typeface="Courier" pitchFamily="2" charset="0"/>
+              </a:rPr>
+              <a:t>3:       | “”</a:t>
+            </a:r>
+            <a:br>
+              <a:rPr lang="en-US" dirty="0">
+                <a:latin typeface="Courier" pitchFamily="2" charset="0"/>
+              </a:rPr>
+            </a:br>
+            <a:r>
+              <a:rPr lang="en-US" dirty="0">
+                <a:latin typeface="Courier" pitchFamily="2" charset="0"/>
+              </a:rPr>
+              <a:t>4: Unit  ::= ‘(‘ Expr ‘)’</a:t>
+            </a:r>
+          </a:p>
+          <a:p>
+            <a:r>
+              <a:rPr lang="en-US" dirty="0">
+                <a:latin typeface="Courier" pitchFamily="2" charset="0"/>
+              </a:rPr>
+              <a:t>5:       |    ID</a:t>
+            </a:r>
+          </a:p>
+          <a:p>
+            <a:r>
+              <a:rPr lang="en-US" dirty="0">
+                <a:highlight>
+                  <a:srgbClr val="FFFF00"/>
+                </a:highlight>
+                <a:latin typeface="Courier" pitchFamily="2" charset="0"/>
+              </a:rPr>
+              <a:t>6: Op    ::= ‘+’</a:t>
+            </a:r>
+          </a:p>
+          <a:p>
+            <a:r>
+              <a:rPr lang="en-US" dirty="0">
+                <a:highlight>
+                  <a:srgbClr val="FFFF00"/>
+                </a:highlight>
+                <a:latin typeface="Courier" pitchFamily="2" charset="0"/>
+              </a:rPr>
+              <a:t>7:       |   ‘*’</a:t>
+            </a:r>
+          </a:p>
+        </p:txBody>
+      </p:sp>
+      <p:sp>
+        <p:nvSpPr>
+          <p:cNvPr id="8" name="TextBox 7">
+            <a:extLst>
+              <a:ext uri="{FF2B5EF4-FFF2-40B4-BE49-F238E27FC236}">
+                <a16:creationId xmlns:a16="http://schemas.microsoft.com/office/drawing/2014/main" id="{436689AF-BA26-3347-BA19-B7CDF8BA594D}"/>
+              </a:ext>
+            </a:extLst>
+          </p:cNvPr>
+          <p:cNvSpPr txBox="1"/>
+          <p:nvPr/>
+        </p:nvSpPr>
+        <p:spPr>
+          <a:xfrm>
+            <a:off x="6764866" y="1585480"/>
+            <a:ext cx="2571986" cy="369332"/>
+          </a:xfrm>
+          <a:prstGeom prst="rect">
+            <a:avLst/>
+          </a:prstGeom>
+          <a:noFill/>
+        </p:spPr>
+        <p:txBody>
+          <a:bodyPr wrap="none" rtlCol="0">
+            <a:spAutoFit/>
+          </a:bodyPr>
+          <a:lstStyle/>
+          <a:p>
+            <a:r>
+              <a:rPr lang="en-US" i="1" dirty="0"/>
+              <a:t>How do we parse an Op? </a:t>
+            </a:r>
+          </a:p>
+        </p:txBody>
+      </p:sp>
+      <p:sp>
+        <p:nvSpPr>
+          <p:cNvPr id="5" name="Rectangle 4">
+            <a:extLst>
+              <a:ext uri="{FF2B5EF4-FFF2-40B4-BE49-F238E27FC236}">
+                <a16:creationId xmlns:a16="http://schemas.microsoft.com/office/drawing/2014/main" id="{8C35DCA6-16D2-F54F-A22A-3EFA1E6D8A47}"/>
+              </a:ext>
+            </a:extLst>
+          </p:cNvPr>
+          <p:cNvSpPr/>
+          <p:nvPr/>
+        </p:nvSpPr>
+        <p:spPr>
+          <a:xfrm>
+            <a:off x="838200" y="4184551"/>
+            <a:ext cx="2275544" cy="2308324"/>
+          </a:xfrm>
+          <a:prstGeom prst="rect">
+            <a:avLst/>
+          </a:prstGeom>
+        </p:spPr>
+        <p:txBody>
+          <a:bodyPr wrap="square">
+            <a:spAutoFit/>
+          </a:bodyPr>
+          <a:lstStyle/>
+          <a:p>
+            <a:r>
+              <a:rPr lang="en-US" dirty="0">
+                <a:latin typeface="Courier" pitchFamily="2" charset="0"/>
+              </a:rPr>
+              <a:t>First+ sets:</a:t>
+            </a:r>
+            <a:br>
+              <a:rPr lang="en-US" dirty="0">
+                <a:latin typeface="Courier" pitchFamily="2" charset="0"/>
+              </a:rPr>
+            </a:br>
+            <a:r>
+              <a:rPr lang="en-US" dirty="0">
+                <a:latin typeface="Courier" pitchFamily="2" charset="0"/>
+              </a:rPr>
+              <a:t>1: {‘(‘, ID}</a:t>
+            </a:r>
+          </a:p>
+          <a:p>
+            <a:r>
+              <a:rPr lang="en-US" dirty="0">
+                <a:latin typeface="Courier" pitchFamily="2" charset="0"/>
+              </a:rPr>
+              <a:t>2: {‘+’, ‘*’}</a:t>
+            </a:r>
+          </a:p>
+          <a:p>
+            <a:r>
+              <a:rPr lang="en-US" dirty="0">
+                <a:latin typeface="Courier" pitchFamily="2" charset="0"/>
+              </a:rPr>
+              <a:t>3: {None, ’)’}</a:t>
+            </a:r>
+            <a:br>
+              <a:rPr lang="en-US" dirty="0">
+                <a:latin typeface="Courier" pitchFamily="2" charset="0"/>
+              </a:rPr>
+            </a:br>
+            <a:r>
+              <a:rPr lang="en-US" dirty="0">
+                <a:latin typeface="Courier" pitchFamily="2" charset="0"/>
+              </a:rPr>
+              <a:t>4: {‘(‘}</a:t>
+            </a:r>
+          </a:p>
+          <a:p>
+            <a:r>
+              <a:rPr lang="en-US" dirty="0">
+                <a:latin typeface="Courier" pitchFamily="2" charset="0"/>
+              </a:rPr>
+              <a:t>5: {ID}</a:t>
+            </a:r>
+          </a:p>
+          <a:p>
+            <a:r>
+              <a:rPr lang="en-US" dirty="0">
+                <a:highlight>
+                  <a:srgbClr val="FFFF00"/>
+                </a:highlight>
+                <a:latin typeface="Courier" pitchFamily="2" charset="0"/>
+              </a:rPr>
+              <a:t>6: {‘+’}</a:t>
+            </a:r>
+          </a:p>
+          <a:p>
+            <a:r>
+              <a:rPr lang="en-US" dirty="0">
+                <a:highlight>
+                  <a:srgbClr val="FFFF00"/>
+                </a:highlight>
+                <a:latin typeface="Courier" pitchFamily="2" charset="0"/>
+              </a:rPr>
+              <a:t>7: {‘*’}</a:t>
+            </a:r>
+          </a:p>
+        </p:txBody>
+      </p:sp>
+      <p:sp>
+        <p:nvSpPr>
+          <p:cNvPr id="3" name="Rectangle 2">
+            <a:extLst>
+              <a:ext uri="{FF2B5EF4-FFF2-40B4-BE49-F238E27FC236}">
+                <a16:creationId xmlns:a16="http://schemas.microsoft.com/office/drawing/2014/main" id="{4B2E97EB-40B3-014A-B687-59B439FD6ACF}"/>
+              </a:ext>
+            </a:extLst>
+          </p:cNvPr>
+          <p:cNvSpPr/>
+          <p:nvPr/>
+        </p:nvSpPr>
+        <p:spPr>
+          <a:xfrm>
+            <a:off x="3542803" y="2915525"/>
+            <a:ext cx="3911601" cy="4031873"/>
+          </a:xfrm>
+          <a:prstGeom prst="rect">
+            <a:avLst/>
+          </a:prstGeom>
+        </p:spPr>
+        <p:txBody>
+          <a:bodyPr wrap="square">
+            <a:spAutoFit/>
+          </a:bodyPr>
+          <a:lstStyle/>
+          <a:p>
+            <a:r>
+              <a:rPr lang="en-US" sz="1600" dirty="0">
+                <a:solidFill>
+                  <a:srgbClr val="000000"/>
+                </a:solidFill>
+                <a:latin typeface="Menlo" panose="020B0609030804020204" pitchFamily="49" charset="0"/>
+              </a:rPr>
+              <a:t>   </a:t>
+            </a:r>
+            <a:r>
+              <a:rPr lang="en-US" sz="1600" b="1" dirty="0">
+                <a:solidFill>
+                  <a:srgbClr val="2EAEBB"/>
+                </a:solidFill>
+                <a:latin typeface="Menlo" panose="020B0609030804020204" pitchFamily="49" charset="0"/>
+              </a:rPr>
+              <a:t>def</a:t>
+            </a:r>
+            <a:r>
+              <a:rPr lang="en-US" sz="1600" dirty="0">
+                <a:solidFill>
+                  <a:srgbClr val="000000"/>
+                </a:solidFill>
+                <a:latin typeface="Menlo" panose="020B0609030804020204" pitchFamily="49" charset="0"/>
+              </a:rPr>
+              <a:t> </a:t>
+            </a:r>
+            <a:r>
+              <a:rPr lang="en-US" sz="1600" b="1" dirty="0" err="1">
+                <a:solidFill>
+                  <a:srgbClr val="400BD9"/>
+                </a:solidFill>
+                <a:latin typeface="Menlo" panose="020B0609030804020204" pitchFamily="49" charset="0"/>
+              </a:rPr>
+              <a:t>parse_Op</a:t>
+            </a:r>
+            <a:r>
+              <a:rPr lang="en-US" sz="1600" dirty="0">
+                <a:solidFill>
+                  <a:srgbClr val="000000"/>
+                </a:solidFill>
+                <a:latin typeface="Menlo" panose="020B0609030804020204" pitchFamily="49" charset="0"/>
+              </a:rPr>
+              <a:t>(</a:t>
+            </a:r>
+            <a:r>
+              <a:rPr lang="en-US" sz="1600" b="1" dirty="0">
+                <a:solidFill>
+                  <a:srgbClr val="2EAEBB"/>
+                </a:solidFill>
+                <a:latin typeface="Menlo" panose="020B0609030804020204" pitchFamily="49" charset="0"/>
+              </a:rPr>
+              <a:t>self</a:t>
+            </a:r>
+            <a:r>
+              <a:rPr lang="en-US" sz="1600" dirty="0">
+                <a:solidFill>
+                  <a:srgbClr val="000000"/>
+                </a:solidFill>
+                <a:latin typeface="Menlo" panose="020B0609030804020204" pitchFamily="49" charset="0"/>
+              </a:rPr>
+              <a:t>):</a:t>
+            </a:r>
+            <a:endParaRPr lang="en-US" sz="1600" dirty="0">
+              <a:solidFill>
+                <a:srgbClr val="400BD9"/>
+              </a:solidFill>
+              <a:latin typeface="Menlo" panose="020B0609030804020204" pitchFamily="49" charset="0"/>
+            </a:endParaRPr>
+          </a:p>
+          <a:p>
+            <a:endParaRPr lang="en-US" sz="1600" dirty="0">
+              <a:solidFill>
+                <a:srgbClr val="000000"/>
+              </a:solidFill>
+              <a:latin typeface="Menlo" panose="020B0609030804020204" pitchFamily="49" charset="0"/>
+            </a:endParaRPr>
+          </a:p>
+          <a:p>
+            <a:r>
+              <a:rPr lang="en-US" sz="1600" dirty="0">
+                <a:solidFill>
+                  <a:srgbClr val="000000"/>
+                </a:solidFill>
+                <a:latin typeface="Menlo" panose="020B0609030804020204" pitchFamily="49" charset="0"/>
+              </a:rPr>
+              <a:t>        </a:t>
+            </a:r>
+            <a:r>
+              <a:rPr lang="en-US" sz="1600" dirty="0" err="1">
+                <a:solidFill>
+                  <a:srgbClr val="9FA01C"/>
+                </a:solidFill>
+                <a:latin typeface="Menlo" panose="020B0609030804020204" pitchFamily="49" charset="0"/>
+              </a:rPr>
+              <a:t>token_id</a:t>
+            </a:r>
+            <a:r>
+              <a:rPr lang="en-US" sz="1600" dirty="0">
+                <a:solidFill>
+                  <a:srgbClr val="000000"/>
+                </a:solidFill>
+                <a:latin typeface="Menlo" panose="020B0609030804020204" pitchFamily="49" charset="0"/>
+              </a:rPr>
+              <a:t> = </a:t>
+            </a:r>
+            <a:r>
+              <a:rPr lang="en-US" sz="1600" dirty="0" err="1">
+                <a:solidFill>
+                  <a:srgbClr val="000000"/>
+                </a:solidFill>
+                <a:latin typeface="Menlo" panose="020B0609030804020204" pitchFamily="49" charset="0"/>
+              </a:rPr>
+              <a:t>get_token_id</a:t>
+            </a:r>
+            <a:r>
+              <a:rPr lang="en-US" sz="1600" dirty="0">
+                <a:solidFill>
+                  <a:srgbClr val="000000"/>
+                </a:solidFill>
+                <a:latin typeface="Menlo" panose="020B0609030804020204" pitchFamily="49" charset="0"/>
+              </a:rPr>
+              <a:t>(</a:t>
+            </a:r>
+            <a:r>
+              <a:rPr lang="en-US" sz="1600" b="1" dirty="0" err="1">
+                <a:solidFill>
+                  <a:srgbClr val="2EAEBB"/>
+                </a:solidFill>
+                <a:latin typeface="Menlo" panose="020B0609030804020204" pitchFamily="49" charset="0"/>
+              </a:rPr>
+              <a:t>self</a:t>
+            </a:r>
+            <a:r>
+              <a:rPr lang="en-US" sz="1600" dirty="0" err="1">
+                <a:solidFill>
+                  <a:srgbClr val="000000"/>
+                </a:solidFill>
+                <a:latin typeface="Menlo" panose="020B0609030804020204" pitchFamily="49" charset="0"/>
+              </a:rPr>
+              <a:t>.to_match</a:t>
+            </a:r>
+            <a:r>
+              <a:rPr lang="en-US" sz="1600" dirty="0">
+                <a:solidFill>
+                  <a:srgbClr val="000000"/>
+                </a:solidFill>
+                <a:latin typeface="Menlo" panose="020B0609030804020204" pitchFamily="49" charset="0"/>
+              </a:rPr>
+              <a:t>)</a:t>
+            </a:r>
+          </a:p>
+          <a:p>
+            <a:endParaRPr lang="en-US" sz="1600" dirty="0">
+              <a:solidFill>
+                <a:srgbClr val="000000"/>
+              </a:solidFill>
+              <a:latin typeface="Menlo" panose="020B0609030804020204" pitchFamily="49" charset="0"/>
+            </a:endParaRPr>
+          </a:p>
+          <a:p>
+            <a:r>
+              <a:rPr lang="en-US" sz="1600" dirty="0">
+                <a:solidFill>
+                  <a:srgbClr val="000000"/>
+                </a:solidFill>
+                <a:latin typeface="Menlo" panose="020B0609030804020204" pitchFamily="49" charset="0"/>
+              </a:rPr>
+              <a:t>        </a:t>
+            </a:r>
+            <a:r>
+              <a:rPr lang="en-US" sz="1600" dirty="0">
+                <a:solidFill>
+                  <a:srgbClr val="B42419"/>
+                </a:solidFill>
+                <a:latin typeface="Menlo" panose="020B0609030804020204" pitchFamily="49" charset="0"/>
+              </a:rPr>
+              <a:t># Op  ::= '+'</a:t>
+            </a:r>
+            <a:endParaRPr lang="en-US" sz="1600" dirty="0">
+              <a:solidFill>
+                <a:srgbClr val="000000"/>
+              </a:solidFill>
+              <a:latin typeface="Menlo" panose="020B0609030804020204" pitchFamily="49" charset="0"/>
+            </a:endParaRPr>
+          </a:p>
+          <a:p>
+            <a:r>
+              <a:rPr lang="en-US" sz="1600" dirty="0">
+                <a:solidFill>
+                  <a:srgbClr val="000000"/>
+                </a:solidFill>
+                <a:latin typeface="Menlo" panose="020B0609030804020204" pitchFamily="49" charset="0"/>
+              </a:rPr>
+              <a:t>        </a:t>
+            </a:r>
+            <a:r>
+              <a:rPr lang="en-US" sz="1600" b="1" dirty="0">
+                <a:solidFill>
+                  <a:srgbClr val="2EAEBB"/>
+                </a:solidFill>
+                <a:latin typeface="Menlo" panose="020B0609030804020204" pitchFamily="49" charset="0"/>
+              </a:rPr>
+              <a:t>if</a:t>
+            </a:r>
+            <a:r>
+              <a:rPr lang="en-US" sz="1600" dirty="0">
+                <a:solidFill>
+                  <a:srgbClr val="000000"/>
+                </a:solidFill>
+                <a:latin typeface="Menlo" panose="020B0609030804020204" pitchFamily="49" charset="0"/>
+              </a:rPr>
+              <a:t> </a:t>
+            </a:r>
+            <a:r>
+              <a:rPr lang="en-US" sz="1600" dirty="0" err="1">
+                <a:solidFill>
+                  <a:srgbClr val="000000"/>
+                </a:solidFill>
+                <a:latin typeface="Menlo" panose="020B0609030804020204" pitchFamily="49" charset="0"/>
+              </a:rPr>
+              <a:t>token_id</a:t>
+            </a:r>
+            <a:r>
+              <a:rPr lang="en-US" sz="1600" dirty="0">
+                <a:solidFill>
+                  <a:srgbClr val="000000"/>
+                </a:solidFill>
+                <a:latin typeface="Menlo" panose="020B0609030804020204" pitchFamily="49" charset="0"/>
+              </a:rPr>
+              <a:t> == </a:t>
+            </a:r>
+            <a:r>
+              <a:rPr lang="en-US" sz="1600" dirty="0">
+                <a:solidFill>
+                  <a:srgbClr val="2FB41D"/>
+                </a:solidFill>
+                <a:latin typeface="Menlo" panose="020B0609030804020204" pitchFamily="49" charset="0"/>
+              </a:rPr>
+              <a:t>"PLUS"</a:t>
+            </a:r>
+            <a:r>
+              <a:rPr lang="en-US" sz="1600" dirty="0">
+                <a:solidFill>
+                  <a:srgbClr val="000000"/>
+                </a:solidFill>
+                <a:latin typeface="Menlo" panose="020B0609030804020204" pitchFamily="49" charset="0"/>
+              </a:rPr>
+              <a:t>:</a:t>
+            </a:r>
+          </a:p>
+          <a:p>
+            <a:r>
+              <a:rPr lang="en-US" sz="1600" dirty="0">
+                <a:solidFill>
+                  <a:srgbClr val="000000"/>
+                </a:solidFill>
+                <a:latin typeface="Menlo" panose="020B0609030804020204" pitchFamily="49" charset="0"/>
+              </a:rPr>
+              <a:t>            </a:t>
+            </a:r>
+            <a:r>
+              <a:rPr lang="en-US" sz="1600" b="1" dirty="0" err="1">
+                <a:solidFill>
+                  <a:srgbClr val="2EAEBB"/>
+                </a:solidFill>
+                <a:latin typeface="Menlo" panose="020B0609030804020204" pitchFamily="49" charset="0"/>
+              </a:rPr>
+              <a:t>self</a:t>
+            </a:r>
+            <a:r>
+              <a:rPr lang="en-US" sz="1600" dirty="0" err="1">
+                <a:solidFill>
+                  <a:srgbClr val="000000"/>
+                </a:solidFill>
+                <a:latin typeface="Menlo" panose="020B0609030804020204" pitchFamily="49" charset="0"/>
+              </a:rPr>
+              <a:t>.eat</a:t>
+            </a:r>
+            <a:r>
+              <a:rPr lang="en-US" sz="1600" dirty="0">
+                <a:solidFill>
+                  <a:srgbClr val="000000"/>
+                </a:solidFill>
+                <a:latin typeface="Menlo" panose="020B0609030804020204" pitchFamily="49" charset="0"/>
+              </a:rPr>
+              <a:t>(</a:t>
+            </a:r>
+            <a:r>
+              <a:rPr lang="en-US" sz="1600" dirty="0">
+                <a:solidFill>
+                  <a:srgbClr val="2FB41D"/>
+                </a:solidFill>
+                <a:latin typeface="Menlo" panose="020B0609030804020204" pitchFamily="49" charset="0"/>
+              </a:rPr>
+              <a:t>"PLUS"</a:t>
+            </a:r>
+            <a:r>
+              <a:rPr lang="en-US" sz="1600" dirty="0">
+                <a:solidFill>
+                  <a:srgbClr val="000000"/>
+                </a:solidFill>
+                <a:latin typeface="Menlo" panose="020B0609030804020204" pitchFamily="49" charset="0"/>
+              </a:rPr>
+              <a:t>)</a:t>
+            </a:r>
+          </a:p>
+          <a:p>
+            <a:r>
+              <a:rPr lang="en-US" sz="1600" dirty="0">
+                <a:solidFill>
+                  <a:srgbClr val="000000"/>
+                </a:solidFill>
+                <a:latin typeface="Menlo" panose="020B0609030804020204" pitchFamily="49" charset="0"/>
+              </a:rPr>
+              <a:t>            </a:t>
+            </a:r>
+            <a:r>
+              <a:rPr lang="en-US" sz="1600" b="1" dirty="0">
+                <a:solidFill>
+                  <a:srgbClr val="2EAEBB"/>
+                </a:solidFill>
+                <a:latin typeface="Menlo" panose="020B0609030804020204" pitchFamily="49" charset="0"/>
+              </a:rPr>
+              <a:t>return</a:t>
+            </a:r>
+            <a:br>
+              <a:rPr lang="en-US" sz="1600" dirty="0">
+                <a:solidFill>
+                  <a:srgbClr val="000000"/>
+                </a:solidFill>
+                <a:latin typeface="Menlo" panose="020B0609030804020204" pitchFamily="49" charset="0"/>
+              </a:rPr>
+            </a:br>
+            <a:endParaRPr lang="en-US" sz="1600" dirty="0">
+              <a:solidFill>
+                <a:srgbClr val="000000"/>
+              </a:solidFill>
+              <a:latin typeface="Menlo" panose="020B0609030804020204" pitchFamily="49" charset="0"/>
+            </a:endParaRPr>
+          </a:p>
+          <a:p>
+            <a:r>
+              <a:rPr lang="en-US" sz="1600" dirty="0">
+                <a:solidFill>
+                  <a:srgbClr val="B42419"/>
+                </a:solidFill>
+                <a:latin typeface="Menlo" panose="020B0609030804020204" pitchFamily="49" charset="0"/>
+              </a:rPr>
+              <a:t>        # Op  ::= '*'</a:t>
+            </a:r>
+            <a:endParaRPr lang="en-US" sz="1600" dirty="0">
+              <a:solidFill>
+                <a:srgbClr val="000000"/>
+              </a:solidFill>
+              <a:latin typeface="Menlo" panose="020B0609030804020204" pitchFamily="49" charset="0"/>
+            </a:endParaRPr>
+          </a:p>
+          <a:p>
+            <a:r>
+              <a:rPr lang="en-US" sz="1600" dirty="0">
+                <a:solidFill>
+                  <a:srgbClr val="000000"/>
+                </a:solidFill>
+                <a:latin typeface="Menlo" panose="020B0609030804020204" pitchFamily="49" charset="0"/>
+              </a:rPr>
+              <a:t>        </a:t>
+            </a:r>
+            <a:r>
+              <a:rPr lang="en-US" sz="1600" b="1" dirty="0">
+                <a:solidFill>
+                  <a:srgbClr val="2EAEBB"/>
+                </a:solidFill>
+                <a:latin typeface="Menlo" panose="020B0609030804020204" pitchFamily="49" charset="0"/>
+              </a:rPr>
+              <a:t>if</a:t>
+            </a:r>
+            <a:r>
+              <a:rPr lang="en-US" sz="1600" dirty="0">
+                <a:solidFill>
+                  <a:srgbClr val="000000"/>
+                </a:solidFill>
+                <a:latin typeface="Menlo" panose="020B0609030804020204" pitchFamily="49" charset="0"/>
+              </a:rPr>
+              <a:t> </a:t>
+            </a:r>
+            <a:r>
+              <a:rPr lang="en-US" sz="1600" dirty="0" err="1">
+                <a:solidFill>
+                  <a:srgbClr val="000000"/>
+                </a:solidFill>
+                <a:latin typeface="Menlo" panose="020B0609030804020204" pitchFamily="49" charset="0"/>
+              </a:rPr>
+              <a:t>token_id</a:t>
+            </a:r>
+            <a:r>
+              <a:rPr lang="en-US" sz="1600" dirty="0">
+                <a:solidFill>
+                  <a:srgbClr val="000000"/>
+                </a:solidFill>
+                <a:latin typeface="Menlo" panose="020B0609030804020204" pitchFamily="49" charset="0"/>
+              </a:rPr>
+              <a:t> == </a:t>
+            </a:r>
+            <a:r>
+              <a:rPr lang="en-US" sz="1600" dirty="0">
+                <a:solidFill>
+                  <a:srgbClr val="2FB41D"/>
+                </a:solidFill>
+                <a:latin typeface="Menlo" panose="020B0609030804020204" pitchFamily="49" charset="0"/>
+              </a:rPr>
+              <a:t>"MULT"</a:t>
+            </a:r>
+            <a:r>
+              <a:rPr lang="en-US" sz="1600" dirty="0">
+                <a:solidFill>
+                  <a:srgbClr val="000000"/>
+                </a:solidFill>
+                <a:latin typeface="Menlo" panose="020B0609030804020204" pitchFamily="49" charset="0"/>
+              </a:rPr>
+              <a:t>:</a:t>
+            </a:r>
+          </a:p>
+          <a:p>
+            <a:r>
+              <a:rPr lang="en-US" sz="1600" dirty="0">
+                <a:solidFill>
+                  <a:srgbClr val="000000"/>
+                </a:solidFill>
+                <a:latin typeface="Menlo" panose="020B0609030804020204" pitchFamily="49" charset="0"/>
+              </a:rPr>
+              <a:t>            </a:t>
+            </a:r>
+            <a:r>
+              <a:rPr lang="en-US" sz="1600" b="1" dirty="0" err="1">
+                <a:solidFill>
+                  <a:srgbClr val="2EAEBB"/>
+                </a:solidFill>
+                <a:latin typeface="Menlo" panose="020B0609030804020204" pitchFamily="49" charset="0"/>
+              </a:rPr>
+              <a:t>self</a:t>
+            </a:r>
+            <a:r>
+              <a:rPr lang="en-US" sz="1600" dirty="0" err="1">
+                <a:solidFill>
+                  <a:srgbClr val="000000"/>
+                </a:solidFill>
+                <a:latin typeface="Menlo" panose="020B0609030804020204" pitchFamily="49" charset="0"/>
+              </a:rPr>
+              <a:t>.eat</a:t>
+            </a:r>
+            <a:r>
+              <a:rPr lang="en-US" sz="1600" dirty="0">
+                <a:solidFill>
+                  <a:srgbClr val="000000"/>
+                </a:solidFill>
+                <a:latin typeface="Menlo" panose="020B0609030804020204" pitchFamily="49" charset="0"/>
+              </a:rPr>
+              <a:t>(</a:t>
+            </a:r>
+            <a:r>
+              <a:rPr lang="en-US" sz="1600" dirty="0">
+                <a:solidFill>
+                  <a:srgbClr val="2FB41D"/>
+                </a:solidFill>
+                <a:latin typeface="Menlo" panose="020B0609030804020204" pitchFamily="49" charset="0"/>
+              </a:rPr>
+              <a:t>"MULT"</a:t>
+            </a:r>
+            <a:r>
+              <a:rPr lang="en-US" sz="1600" dirty="0">
+                <a:solidFill>
+                  <a:srgbClr val="000000"/>
+                </a:solidFill>
+                <a:latin typeface="Menlo" panose="020B0609030804020204" pitchFamily="49" charset="0"/>
+              </a:rPr>
+              <a:t>)</a:t>
+            </a:r>
+          </a:p>
+          <a:p>
+            <a:r>
+              <a:rPr lang="en-US" sz="1600" dirty="0">
+                <a:solidFill>
+                  <a:srgbClr val="000000"/>
+                </a:solidFill>
+                <a:latin typeface="Menlo" panose="020B0609030804020204" pitchFamily="49" charset="0"/>
+              </a:rPr>
+              <a:t>            </a:t>
+            </a:r>
+            <a:r>
+              <a:rPr lang="en-US" sz="1600" b="1" dirty="0">
+                <a:solidFill>
+                  <a:srgbClr val="2EAEBB"/>
+                </a:solidFill>
+                <a:latin typeface="Menlo" panose="020B0609030804020204" pitchFamily="49" charset="0"/>
+              </a:rPr>
+              <a:t>return</a:t>
+            </a:r>
+            <a:endParaRPr lang="en-US" sz="1600" dirty="0">
+              <a:solidFill>
+                <a:srgbClr val="000000"/>
+              </a:solidFill>
+              <a:latin typeface="Menlo" panose="020B0609030804020204" pitchFamily="49" charset="0"/>
+            </a:endParaRPr>
+          </a:p>
+          <a:p>
+            <a:br>
+              <a:rPr lang="en-US" sz="1600" dirty="0">
+                <a:solidFill>
+                  <a:srgbClr val="000000"/>
+                </a:solidFill>
+                <a:latin typeface="Menlo" panose="020B0609030804020204" pitchFamily="49" charset="0"/>
+              </a:rPr>
+            </a:br>
+            <a:endParaRPr lang="en-US" sz="1600" dirty="0">
+              <a:solidFill>
+                <a:srgbClr val="000000"/>
+              </a:solidFill>
+              <a:latin typeface="Menlo" panose="020B0609030804020204" pitchFamily="49" charset="0"/>
+            </a:endParaRPr>
+          </a:p>
+          <a:p>
+            <a:r>
+              <a:rPr lang="en-US" sz="1600" dirty="0">
+                <a:solidFill>
+                  <a:srgbClr val="000000"/>
+                </a:solidFill>
+                <a:latin typeface="Menlo" panose="020B0609030804020204" pitchFamily="49" charset="0"/>
+              </a:rPr>
+              <a:t>       </a:t>
+            </a:r>
+            <a:endParaRPr lang="en-US" sz="1600" dirty="0">
+              <a:solidFill>
+                <a:srgbClr val="000000"/>
+              </a:solidFill>
+              <a:effectLst/>
+              <a:latin typeface="Menlo" panose="020B0609030804020204" pitchFamily="49" charset="0"/>
+            </a:endParaRPr>
+          </a:p>
+        </p:txBody>
+      </p:sp>
+      <p:sp>
+        <p:nvSpPr>
+          <p:cNvPr id="7" name="TextBox 6">
+            <a:extLst>
+              <a:ext uri="{FF2B5EF4-FFF2-40B4-BE49-F238E27FC236}">
+                <a16:creationId xmlns:a16="http://schemas.microsoft.com/office/drawing/2014/main" id="{6CAF0A1F-26BC-4B42-6E81-005B10BC1CF3}"/>
+              </a:ext>
+            </a:extLst>
+          </p:cNvPr>
+          <p:cNvSpPr txBox="1"/>
+          <p:nvPr/>
+        </p:nvSpPr>
+        <p:spPr>
+          <a:xfrm>
+            <a:off x="7841380" y="2277038"/>
+            <a:ext cx="4621306" cy="2031325"/>
+          </a:xfrm>
+          <a:prstGeom prst="rect">
+            <a:avLst/>
+          </a:prstGeom>
+          <a:noFill/>
+        </p:spPr>
+        <p:txBody>
+          <a:bodyPr wrap="square" rtlCol="0">
+            <a:spAutoFit/>
+          </a:bodyPr>
+          <a:lstStyle/>
+          <a:p>
+            <a:r>
+              <a:rPr lang="en-US" b="1" dirty="0">
+                <a:solidFill>
+                  <a:srgbClr val="2EAEBB"/>
+                </a:solidFill>
+                <a:latin typeface="Menlo" panose="020B0609030804020204" pitchFamily="49" charset="0"/>
+              </a:rPr>
+              <a:t>d</a:t>
+            </a:r>
+            <a:r>
+              <a:rPr lang="en-US" sz="1800" b="1" dirty="0">
+                <a:solidFill>
+                  <a:srgbClr val="2EAEBB"/>
+                </a:solidFill>
+                <a:latin typeface="Menlo" panose="020B0609030804020204" pitchFamily="49" charset="0"/>
+              </a:rPr>
+              <a:t>ef eat(self, </a:t>
+            </a:r>
+            <a:r>
+              <a:rPr lang="en-US" sz="1800" b="1" dirty="0" err="1">
+                <a:solidFill>
+                  <a:srgbClr val="2EAEBB"/>
+                </a:solidFill>
+                <a:latin typeface="Menlo" panose="020B0609030804020204" pitchFamily="49" charset="0"/>
+              </a:rPr>
+              <a:t>expected_token</a:t>
+            </a:r>
+            <a:r>
+              <a:rPr lang="en-US" sz="1800" b="1" dirty="0">
+                <a:solidFill>
+                  <a:srgbClr val="2EAEBB"/>
+                </a:solidFill>
+                <a:latin typeface="Menlo" panose="020B0609030804020204" pitchFamily="49" charset="0"/>
+              </a:rPr>
+              <a:t>):</a:t>
+            </a:r>
+          </a:p>
+          <a:p>
+            <a:r>
+              <a:rPr lang="en-US" b="1" dirty="0">
+                <a:solidFill>
+                  <a:srgbClr val="2EAEBB"/>
+                </a:solidFill>
+                <a:latin typeface="Menlo" panose="020B0609030804020204" pitchFamily="49" charset="0"/>
+              </a:rPr>
+              <a:t>     …</a:t>
+            </a:r>
+            <a:endParaRPr lang="en-US" sz="1800" b="1" dirty="0">
+              <a:solidFill>
+                <a:srgbClr val="2EAEBB"/>
+              </a:solidFill>
+              <a:latin typeface="Menlo" panose="020B0609030804020204" pitchFamily="49" charset="0"/>
+            </a:endParaRPr>
+          </a:p>
+          <a:p>
+            <a:r>
+              <a:rPr lang="en-US" b="1" dirty="0">
+                <a:solidFill>
+                  <a:srgbClr val="2EAEBB"/>
+                </a:solidFill>
+                <a:latin typeface="Menlo" panose="020B0609030804020204" pitchFamily="49" charset="0"/>
+              </a:rPr>
+              <a:t>     </a:t>
+            </a:r>
+            <a:r>
+              <a:rPr lang="en-US" sz="1800" b="1" dirty="0">
+                <a:solidFill>
+                  <a:srgbClr val="2EAEBB"/>
+                </a:solidFill>
+                <a:latin typeface="Menlo" panose="020B0609030804020204" pitchFamily="49" charset="0"/>
+              </a:rPr>
+              <a:t>raise</a:t>
+            </a:r>
+            <a:r>
+              <a:rPr lang="en-US" sz="1800" dirty="0">
+                <a:solidFill>
+                  <a:srgbClr val="000000"/>
+                </a:solidFill>
+                <a:latin typeface="Menlo" panose="020B0609030804020204" pitchFamily="49" charset="0"/>
+              </a:rPr>
+              <a:t> </a:t>
+            </a:r>
+            <a:r>
+              <a:rPr lang="en-US" sz="1800" dirty="0" err="1">
+                <a:solidFill>
+                  <a:srgbClr val="000000"/>
+                </a:solidFill>
+                <a:latin typeface="Menlo" panose="020B0609030804020204" pitchFamily="49" charset="0"/>
+              </a:rPr>
+              <a:t>ParserException</a:t>
+            </a:r>
+            <a:r>
+              <a:rPr lang="en-US" sz="1800" dirty="0">
+                <a:solidFill>
+                  <a:srgbClr val="000000"/>
+                </a:solidFill>
+                <a:latin typeface="Menlo" panose="020B0609030804020204" pitchFamily="49" charset="0"/>
+              </a:rPr>
+              <a:t>(</a:t>
+            </a:r>
+          </a:p>
+          <a:p>
+            <a:r>
+              <a:rPr lang="en-US" dirty="0">
+                <a:solidFill>
+                  <a:srgbClr val="000000"/>
+                </a:solidFill>
+                <a:latin typeface="Menlo" panose="020B0609030804020204" pitchFamily="49" charset="0"/>
+              </a:rPr>
+              <a:t>               </a:t>
+            </a:r>
+            <a:r>
+              <a:rPr lang="en-US" sz="1800" dirty="0" err="1">
+                <a:solidFill>
+                  <a:srgbClr val="000000"/>
+                </a:solidFill>
+                <a:latin typeface="Menlo" panose="020B0609030804020204" pitchFamily="49" charset="0"/>
+              </a:rPr>
+              <a:t>self.current_line</a:t>
+            </a:r>
+            <a:r>
+              <a:rPr lang="en-US" sz="1800" dirty="0">
+                <a:solidFill>
+                  <a:srgbClr val="000000"/>
+                </a:solidFill>
+                <a:latin typeface="Menlo" panose="020B0609030804020204" pitchFamily="49" charset="0"/>
+              </a:rPr>
+              <a:t>,    </a:t>
+            </a:r>
+          </a:p>
+          <a:p>
+            <a:r>
+              <a:rPr lang="en-US" sz="1800" dirty="0">
+                <a:solidFill>
+                  <a:srgbClr val="000000"/>
+                </a:solidFill>
+                <a:latin typeface="Menlo" panose="020B0609030804020204" pitchFamily="49" charset="0"/>
+              </a:rPr>
+              <a:t>               </a:t>
+            </a:r>
+            <a:r>
+              <a:rPr lang="en-US" sz="1800" b="1" dirty="0" err="1">
+                <a:solidFill>
+                  <a:srgbClr val="2EAEBB"/>
+                </a:solidFill>
+                <a:latin typeface="Menlo" panose="020B0609030804020204" pitchFamily="49" charset="0"/>
+              </a:rPr>
+              <a:t>self</a:t>
+            </a:r>
+            <a:r>
+              <a:rPr lang="en-US" sz="1800" dirty="0" err="1">
+                <a:solidFill>
+                  <a:srgbClr val="000000"/>
+                </a:solidFill>
+                <a:latin typeface="Menlo" panose="020B0609030804020204" pitchFamily="49" charset="0"/>
+              </a:rPr>
+              <a:t>.to_match</a:t>
+            </a:r>
+            <a:r>
+              <a:rPr lang="en-US" sz="1800" dirty="0">
+                <a:solidFill>
+                  <a:srgbClr val="000000"/>
+                </a:solidFill>
+                <a:latin typeface="Menlo" panose="020B0609030804020204" pitchFamily="49" charset="0"/>
+              </a:rPr>
+              <a:t>,       </a:t>
+            </a:r>
+            <a:r>
+              <a:rPr lang="en-US" sz="1800" dirty="0">
+                <a:solidFill>
+                  <a:srgbClr val="B42419"/>
+                </a:solidFill>
+                <a:latin typeface="Menlo" panose="020B0609030804020204" pitchFamily="49" charset="0"/>
+              </a:rPr>
+              <a:t># observed token </a:t>
+            </a:r>
+            <a:r>
+              <a:rPr lang="en-US" sz="1800" dirty="0">
+                <a:solidFill>
+                  <a:srgbClr val="000000"/>
+                </a:solidFill>
+                <a:latin typeface="Menlo" panose="020B0609030804020204" pitchFamily="49" charset="0"/>
+              </a:rPr>
+              <a:t> </a:t>
+            </a:r>
+          </a:p>
+          <a:p>
+            <a:r>
+              <a:rPr lang="en-US" sz="1800" dirty="0">
+                <a:solidFill>
+                  <a:srgbClr val="000000"/>
+                </a:solidFill>
+                <a:latin typeface="Menlo" panose="020B0609030804020204" pitchFamily="49" charset="0"/>
+              </a:rPr>
+              <a:t>               [</a:t>
+            </a:r>
+            <a:r>
+              <a:rPr lang="en-US" sz="1800" dirty="0" err="1">
+                <a:solidFill>
+                  <a:srgbClr val="000000"/>
+                </a:solidFill>
+                <a:latin typeface="Menlo" panose="020B0609030804020204" pitchFamily="49" charset="0"/>
+              </a:rPr>
+              <a:t>expected_token</a:t>
+            </a:r>
+            <a:r>
+              <a:rPr lang="en-US" sz="1800" dirty="0">
+                <a:solidFill>
+                  <a:srgbClr val="000000"/>
+                </a:solidFill>
+                <a:latin typeface="Menlo" panose="020B0609030804020204" pitchFamily="49" charset="0"/>
+              </a:rPr>
+              <a:t>]) </a:t>
+            </a:r>
+            <a:r>
+              <a:rPr lang="en-US" sz="1800" dirty="0">
+                <a:solidFill>
+                  <a:srgbClr val="B42419"/>
+                </a:solidFill>
+                <a:latin typeface="Menlo" panose="020B0609030804020204" pitchFamily="49" charset="0"/>
+              </a:rPr>
+              <a:t># expected token</a:t>
+            </a:r>
+          </a:p>
+          <a:p>
+            <a:r>
+              <a:rPr lang="en-US" dirty="0">
+                <a:solidFill>
+                  <a:srgbClr val="B42419"/>
+                </a:solidFill>
+                <a:effectLst/>
+                <a:latin typeface="Menlo" panose="020B0609030804020204" pitchFamily="49" charset="0"/>
+              </a:rPr>
+              <a:t>      </a:t>
+            </a:r>
+            <a:r>
+              <a:rPr lang="en-US" dirty="0">
+                <a:solidFill>
+                  <a:srgbClr val="B42419"/>
+                </a:solidFill>
+                <a:latin typeface="Menlo" panose="020B0609030804020204" pitchFamily="49" charset="0"/>
+              </a:rPr>
+              <a:t>…</a:t>
+            </a:r>
+            <a:endParaRPr lang="en-US" sz="1800" dirty="0">
+              <a:solidFill>
+                <a:srgbClr val="000000"/>
+              </a:solidFill>
+              <a:effectLst/>
+              <a:latin typeface="Menlo" panose="020B0609030804020204" pitchFamily="49" charset="0"/>
+            </a:endParaRPr>
+          </a:p>
+        </p:txBody>
+      </p:sp>
+    </p:spTree>
+    <p:extLst>
+      <p:ext uri="{BB962C8B-B14F-4D97-AF65-F5344CB8AC3E}">
+        <p14:creationId xmlns:p14="http://schemas.microsoft.com/office/powerpoint/2010/main" val="851352408"/>
+      </p:ext>
+    </p:extLst>
+  </p:cSld>
+  <p:clrMapOvr>
+    <a:masterClrMapping/>
+  </p:clrMapOvr>
+</p:sld>
+</file>
+
+<file path=ppt/slides/slide79.xml><?xml version="1.0" encoding="utf-8"?>
+<p:sld xmlns:a="http://schemas.openxmlformats.org/drawingml/2006/main" xmlns:r="http://schemas.openxmlformats.org/officeDocument/2006/relationships" xmlns:p="http://schemas.openxmlformats.org/presentationml/2006/main">
+  <p:cSld>
+    <p:spTree>
+      <p:nvGrpSpPr>
+        <p:cNvPr id="1" name="">
+          <a:extLst>
+            <a:ext uri="{FF2B5EF4-FFF2-40B4-BE49-F238E27FC236}">
+              <a16:creationId xmlns:a16="http://schemas.microsoft.com/office/drawing/2014/main" id="{0842EEFD-A114-FB93-AC70-A0AB4155CA9C}"/>
+            </a:ext>
+          </a:extLst>
+        </p:cNvPr>
+        <p:cNvGrpSpPr/>
+        <p:nvPr/>
+      </p:nvGrpSpPr>
+      <p:grpSpPr>
+        <a:xfrm>
+          <a:off x="0" y="0"/>
+          <a:ext cx="0" cy="0"/>
+          <a:chOff x="0" y="0"/>
+          <a:chExt cx="0" cy="0"/>
+        </a:xfrm>
+      </p:grpSpPr>
+      <p:sp>
+        <p:nvSpPr>
+          <p:cNvPr id="2" name="Title 1">
+            <a:extLst>
+              <a:ext uri="{FF2B5EF4-FFF2-40B4-BE49-F238E27FC236}">
+                <a16:creationId xmlns:a16="http://schemas.microsoft.com/office/drawing/2014/main" id="{BD176D3A-2595-D59C-75BE-72D4024A6A83}"/>
+              </a:ext>
+            </a:extLst>
+          </p:cNvPr>
+          <p:cNvSpPr>
+            <a:spLocks noGrp="1"/>
+          </p:cNvSpPr>
+          <p:nvPr>
+            <p:ph type="title"/>
+          </p:nvPr>
+        </p:nvSpPr>
+        <p:spPr>
+          <a:xfrm>
+            <a:off x="838200" y="365125"/>
+            <a:ext cx="10515600" cy="4771651"/>
+          </a:xfrm>
+        </p:spPr>
+        <p:txBody>
+          <a:bodyPr>
+            <a:normAutofit/>
+          </a:bodyPr>
+          <a:lstStyle/>
+          <a:p>
+            <a:pPr algn="ctr"/>
+            <a:r>
+              <a:rPr lang="en-US" sz="8900" dirty="0"/>
+              <a:t>Recursive Descent</a:t>
+            </a:r>
+            <a:br>
+              <a:rPr lang="en-US" dirty="0"/>
+            </a:br>
+            <a:r>
+              <a:rPr lang="en-US" sz="6600" dirty="0"/>
+              <a:t>IS THAT SIMPLE</a:t>
+            </a:r>
+            <a:endParaRPr lang="en-US" dirty="0"/>
+          </a:p>
+        </p:txBody>
+      </p:sp>
+    </p:spTree>
+    <p:extLst>
+      <p:ext uri="{BB962C8B-B14F-4D97-AF65-F5344CB8AC3E}">
+        <p14:creationId xmlns:p14="http://schemas.microsoft.com/office/powerpoint/2010/main" val="1222227674"/>
       </p:ext>
     </p:extLst>
   </p:cSld>
